--- a/docs/fmva/packs/day6-slides.pptx
+++ b/docs/fmva/packs/day6-slides.pptx
@@ -17,9 +17,15 @@
     <p:sldId id="265" r:id="rId11"/>
     <p:sldId id="266" r:id="rId12"/>
     <p:sldId id="267" r:id="rId13"/>
+    <p:sldId id="268" r:id="rId14"/>
+    <p:sldId id="269" r:id="rId15"/>
+    <p:sldId id="270" r:id="rId16"/>
+    <p:sldId id="271" r:id="rId17"/>
+    <p:sldId id="272" r:id="rId18"/>
+    <p:sldId id="273" r:id="rId19"/>
   </p:sldIdLst>
   <p:notesMasterIdLst>
-    <p:notesMasterId r:id="rId14"/>
+    <p:notesMasterId r:id="rId20"/>
   </p:notesMasterIdLst>
   <p:sldSz cx="9144000" cy="5148072"/>
   <p:notesSz cx="5148072" cy="9144000"/>
@@ -801,6 +807,534 @@
             <a:fld id="{F7021451-1387-4CA6-816F-3879F97B5CBC}" type="slidenum">
               <a:rPr lang="en-US"/>
               <a:t>12</a:t>
+            </a:fld>
+            <a:endParaRPr lang="en-US"/>
+          </a:p>
+        </p:txBody>
+      </p:sp>
+    </p:spTree>
+    <p:extLst>
+      <p:ext uri="{BB962C8B-B14F-4D97-AF65-F5344CB8AC3E}">
+        <p14:creationId xmlns:p14="http://schemas.microsoft.com/office/powerpoint/2010/main" val="1024086991"/>
+      </p:ext>
+    </p:extLst>
+  </p:cSld>
+  <p:clrMapOvr>
+    <a:masterClrMapping/>
+  </p:clrMapOvr>
+</p:notes>
+</file>
+
+<file path=ppt/notesSlides/notesSlide13.xml><?xml version="1.0" encoding="utf-8"?>
+<p:notes xmlns:a="http://schemas.openxmlformats.org/drawingml/2006/main" xmlns:r="http://schemas.openxmlformats.org/officeDocument/2006/relationships" xmlns:p="http://schemas.openxmlformats.org/presentationml/2006/main">
+  <p:cSld>
+    <p:spTree>
+      <p:nvGrpSpPr>
+        <p:cNvPr id="1" name=""/>
+        <p:cNvGrpSpPr/>
+        <p:nvPr/>
+      </p:nvGrpSpPr>
+      <p:grpSpPr>
+        <a:xfrm>
+          <a:off x="0" y="0"/>
+          <a:ext cx="0" cy="0"/>
+          <a:chOff x="0" y="0"/>
+          <a:chExt cx="0" cy="0"/>
+        </a:xfrm>
+      </p:grpSpPr>
+      <p:sp>
+        <p:nvSpPr>
+          <p:cNvPr id="2" name="Slide Image Placeholder 1"/>
+          <p:cNvSpPr>
+            <a:spLocks noGrp="1" noRot="1" noChangeAspect="1"/>
+          </p:cNvSpPr>
+          <p:nvPr>
+            <p:ph type="sldImg"/>
+          </p:nvPr>
+        </p:nvSpPr>
+        <p:spPr/>
+      </p:sp>
+      <p:sp>
+        <p:nvSpPr>
+          <p:cNvPr id="3" name="Notes Placeholder 2"/>
+          <p:cNvSpPr>
+            <a:spLocks noGrp="1"/>
+          </p:cNvSpPr>
+          <p:nvPr>
+            <p:ph type="body" idx="1"/>
+          </p:nvPr>
+        </p:nvSpPr>
+        <p:spPr/>
+        <p:txBody>
+          <a:bodyPr/>
+          <a:lstStyle/>
+          <a:p>
+            <a:r>
+              <a:rPr lang="en-US" dirty="0"/>
+              <a:t/>
+            </a:r>
+            <a:endParaRPr lang="en-US" dirty="0"/>
+          </a:p>
+        </p:txBody>
+      </p:sp>
+      <p:sp>
+        <p:nvSpPr>
+          <p:cNvPr id="4" name="Slide Number Placeholder 3"/>
+          <p:cNvSpPr>
+            <a:spLocks noGrp="1"/>
+          </p:cNvSpPr>
+          <p:nvPr>
+            <p:ph type="sldNum" sz="quarter" idx="10"/>
+          </p:nvPr>
+        </p:nvSpPr>
+        <p:spPr/>
+        <p:txBody>
+          <a:bodyPr/>
+          <a:lstStyle/>
+          <a:p>
+            <a:fld id="{F7021451-1387-4CA6-816F-3879F97B5CBC}" type="slidenum">
+              <a:rPr lang="en-US"/>
+              <a:t>13</a:t>
+            </a:fld>
+            <a:endParaRPr lang="en-US"/>
+          </a:p>
+        </p:txBody>
+      </p:sp>
+    </p:spTree>
+    <p:extLst>
+      <p:ext uri="{BB962C8B-B14F-4D97-AF65-F5344CB8AC3E}">
+        <p14:creationId xmlns:p14="http://schemas.microsoft.com/office/powerpoint/2010/main" val="1024086991"/>
+      </p:ext>
+    </p:extLst>
+  </p:cSld>
+  <p:clrMapOvr>
+    <a:masterClrMapping/>
+  </p:clrMapOvr>
+</p:notes>
+</file>
+
+<file path=ppt/notesSlides/notesSlide14.xml><?xml version="1.0" encoding="utf-8"?>
+<p:notes xmlns:a="http://schemas.openxmlformats.org/drawingml/2006/main" xmlns:r="http://schemas.openxmlformats.org/officeDocument/2006/relationships" xmlns:p="http://schemas.openxmlformats.org/presentationml/2006/main">
+  <p:cSld>
+    <p:spTree>
+      <p:nvGrpSpPr>
+        <p:cNvPr id="1" name=""/>
+        <p:cNvGrpSpPr/>
+        <p:nvPr/>
+      </p:nvGrpSpPr>
+      <p:grpSpPr>
+        <a:xfrm>
+          <a:off x="0" y="0"/>
+          <a:ext cx="0" cy="0"/>
+          <a:chOff x="0" y="0"/>
+          <a:chExt cx="0" cy="0"/>
+        </a:xfrm>
+      </p:grpSpPr>
+      <p:sp>
+        <p:nvSpPr>
+          <p:cNvPr id="2" name="Slide Image Placeholder 1"/>
+          <p:cNvSpPr>
+            <a:spLocks noGrp="1" noRot="1" noChangeAspect="1"/>
+          </p:cNvSpPr>
+          <p:nvPr>
+            <p:ph type="sldImg"/>
+          </p:nvPr>
+        </p:nvSpPr>
+        <p:spPr/>
+      </p:sp>
+      <p:sp>
+        <p:nvSpPr>
+          <p:cNvPr id="3" name="Notes Placeholder 2"/>
+          <p:cNvSpPr>
+            <a:spLocks noGrp="1"/>
+          </p:cNvSpPr>
+          <p:nvPr>
+            <p:ph type="body" idx="1"/>
+          </p:nvPr>
+        </p:nvSpPr>
+        <p:spPr/>
+        <p:txBody>
+          <a:bodyPr/>
+          <a:lstStyle/>
+          <a:p>
+            <a:r>
+              <a:rPr lang="en-US" dirty="0"/>
+              <a:t/>
+            </a:r>
+            <a:endParaRPr lang="en-US" dirty="0"/>
+          </a:p>
+        </p:txBody>
+      </p:sp>
+      <p:sp>
+        <p:nvSpPr>
+          <p:cNvPr id="4" name="Slide Number Placeholder 3"/>
+          <p:cNvSpPr>
+            <a:spLocks noGrp="1"/>
+          </p:cNvSpPr>
+          <p:nvPr>
+            <p:ph type="sldNum" sz="quarter" idx="10"/>
+          </p:nvPr>
+        </p:nvSpPr>
+        <p:spPr/>
+        <p:txBody>
+          <a:bodyPr/>
+          <a:lstStyle/>
+          <a:p>
+            <a:fld id="{F7021451-1387-4CA6-816F-3879F97B5CBC}" type="slidenum">
+              <a:rPr lang="en-US"/>
+              <a:t>14</a:t>
+            </a:fld>
+            <a:endParaRPr lang="en-US"/>
+          </a:p>
+        </p:txBody>
+      </p:sp>
+    </p:spTree>
+    <p:extLst>
+      <p:ext uri="{BB962C8B-B14F-4D97-AF65-F5344CB8AC3E}">
+        <p14:creationId xmlns:p14="http://schemas.microsoft.com/office/powerpoint/2010/main" val="1024086991"/>
+      </p:ext>
+    </p:extLst>
+  </p:cSld>
+  <p:clrMapOvr>
+    <a:masterClrMapping/>
+  </p:clrMapOvr>
+</p:notes>
+</file>
+
+<file path=ppt/notesSlides/notesSlide15.xml><?xml version="1.0" encoding="utf-8"?>
+<p:notes xmlns:a="http://schemas.openxmlformats.org/drawingml/2006/main" xmlns:r="http://schemas.openxmlformats.org/officeDocument/2006/relationships" xmlns:p="http://schemas.openxmlformats.org/presentationml/2006/main">
+  <p:cSld>
+    <p:spTree>
+      <p:nvGrpSpPr>
+        <p:cNvPr id="1" name=""/>
+        <p:cNvGrpSpPr/>
+        <p:nvPr/>
+      </p:nvGrpSpPr>
+      <p:grpSpPr>
+        <a:xfrm>
+          <a:off x="0" y="0"/>
+          <a:ext cx="0" cy="0"/>
+          <a:chOff x="0" y="0"/>
+          <a:chExt cx="0" cy="0"/>
+        </a:xfrm>
+      </p:grpSpPr>
+      <p:sp>
+        <p:nvSpPr>
+          <p:cNvPr id="2" name="Slide Image Placeholder 1"/>
+          <p:cNvSpPr>
+            <a:spLocks noGrp="1" noRot="1" noChangeAspect="1"/>
+          </p:cNvSpPr>
+          <p:nvPr>
+            <p:ph type="sldImg"/>
+          </p:nvPr>
+        </p:nvSpPr>
+        <p:spPr/>
+      </p:sp>
+      <p:sp>
+        <p:nvSpPr>
+          <p:cNvPr id="3" name="Notes Placeholder 2"/>
+          <p:cNvSpPr>
+            <a:spLocks noGrp="1"/>
+          </p:cNvSpPr>
+          <p:nvPr>
+            <p:ph type="body" idx="1"/>
+          </p:nvPr>
+        </p:nvSpPr>
+        <p:spPr/>
+        <p:txBody>
+          <a:bodyPr/>
+          <a:lstStyle/>
+          <a:p>
+            <a:r>
+              <a:rPr lang="en-US" dirty="0"/>
+              <a:t/>
+            </a:r>
+            <a:endParaRPr lang="en-US" dirty="0"/>
+          </a:p>
+        </p:txBody>
+      </p:sp>
+      <p:sp>
+        <p:nvSpPr>
+          <p:cNvPr id="4" name="Slide Number Placeholder 3"/>
+          <p:cNvSpPr>
+            <a:spLocks noGrp="1"/>
+          </p:cNvSpPr>
+          <p:nvPr>
+            <p:ph type="sldNum" sz="quarter" idx="10"/>
+          </p:nvPr>
+        </p:nvSpPr>
+        <p:spPr/>
+        <p:txBody>
+          <a:bodyPr/>
+          <a:lstStyle/>
+          <a:p>
+            <a:fld id="{F7021451-1387-4CA6-816F-3879F97B5CBC}" type="slidenum">
+              <a:rPr lang="en-US"/>
+              <a:t>15</a:t>
+            </a:fld>
+            <a:endParaRPr lang="en-US"/>
+          </a:p>
+        </p:txBody>
+      </p:sp>
+    </p:spTree>
+    <p:extLst>
+      <p:ext uri="{BB962C8B-B14F-4D97-AF65-F5344CB8AC3E}">
+        <p14:creationId xmlns:p14="http://schemas.microsoft.com/office/powerpoint/2010/main" val="1024086991"/>
+      </p:ext>
+    </p:extLst>
+  </p:cSld>
+  <p:clrMapOvr>
+    <a:masterClrMapping/>
+  </p:clrMapOvr>
+</p:notes>
+</file>
+
+<file path=ppt/notesSlides/notesSlide16.xml><?xml version="1.0" encoding="utf-8"?>
+<p:notes xmlns:a="http://schemas.openxmlformats.org/drawingml/2006/main" xmlns:r="http://schemas.openxmlformats.org/officeDocument/2006/relationships" xmlns:p="http://schemas.openxmlformats.org/presentationml/2006/main">
+  <p:cSld>
+    <p:spTree>
+      <p:nvGrpSpPr>
+        <p:cNvPr id="1" name=""/>
+        <p:cNvGrpSpPr/>
+        <p:nvPr/>
+      </p:nvGrpSpPr>
+      <p:grpSpPr>
+        <a:xfrm>
+          <a:off x="0" y="0"/>
+          <a:ext cx="0" cy="0"/>
+          <a:chOff x="0" y="0"/>
+          <a:chExt cx="0" cy="0"/>
+        </a:xfrm>
+      </p:grpSpPr>
+      <p:sp>
+        <p:nvSpPr>
+          <p:cNvPr id="2" name="Slide Image Placeholder 1"/>
+          <p:cNvSpPr>
+            <a:spLocks noGrp="1" noRot="1" noChangeAspect="1"/>
+          </p:cNvSpPr>
+          <p:nvPr>
+            <p:ph type="sldImg"/>
+          </p:nvPr>
+        </p:nvSpPr>
+        <p:spPr/>
+      </p:sp>
+      <p:sp>
+        <p:nvSpPr>
+          <p:cNvPr id="3" name="Notes Placeholder 2"/>
+          <p:cNvSpPr>
+            <a:spLocks noGrp="1"/>
+          </p:cNvSpPr>
+          <p:nvPr>
+            <p:ph type="body" idx="1"/>
+          </p:nvPr>
+        </p:nvSpPr>
+        <p:spPr/>
+        <p:txBody>
+          <a:bodyPr/>
+          <a:lstStyle/>
+          <a:p>
+            <a:r>
+              <a:rPr lang="en-US" dirty="0"/>
+              <a:t/>
+            </a:r>
+            <a:endParaRPr lang="en-US" dirty="0"/>
+          </a:p>
+        </p:txBody>
+      </p:sp>
+      <p:sp>
+        <p:nvSpPr>
+          <p:cNvPr id="4" name="Slide Number Placeholder 3"/>
+          <p:cNvSpPr>
+            <a:spLocks noGrp="1"/>
+          </p:cNvSpPr>
+          <p:nvPr>
+            <p:ph type="sldNum" sz="quarter" idx="10"/>
+          </p:nvPr>
+        </p:nvSpPr>
+        <p:spPr/>
+        <p:txBody>
+          <a:bodyPr/>
+          <a:lstStyle/>
+          <a:p>
+            <a:fld id="{F7021451-1387-4CA6-816F-3879F97B5CBC}" type="slidenum">
+              <a:rPr lang="en-US"/>
+              <a:t>16</a:t>
+            </a:fld>
+            <a:endParaRPr lang="en-US"/>
+          </a:p>
+        </p:txBody>
+      </p:sp>
+    </p:spTree>
+    <p:extLst>
+      <p:ext uri="{BB962C8B-B14F-4D97-AF65-F5344CB8AC3E}">
+        <p14:creationId xmlns:p14="http://schemas.microsoft.com/office/powerpoint/2010/main" val="1024086991"/>
+      </p:ext>
+    </p:extLst>
+  </p:cSld>
+  <p:clrMapOvr>
+    <a:masterClrMapping/>
+  </p:clrMapOvr>
+</p:notes>
+</file>
+
+<file path=ppt/notesSlides/notesSlide17.xml><?xml version="1.0" encoding="utf-8"?>
+<p:notes xmlns:a="http://schemas.openxmlformats.org/drawingml/2006/main" xmlns:r="http://schemas.openxmlformats.org/officeDocument/2006/relationships" xmlns:p="http://schemas.openxmlformats.org/presentationml/2006/main">
+  <p:cSld>
+    <p:spTree>
+      <p:nvGrpSpPr>
+        <p:cNvPr id="1" name=""/>
+        <p:cNvGrpSpPr/>
+        <p:nvPr/>
+      </p:nvGrpSpPr>
+      <p:grpSpPr>
+        <a:xfrm>
+          <a:off x="0" y="0"/>
+          <a:ext cx="0" cy="0"/>
+          <a:chOff x="0" y="0"/>
+          <a:chExt cx="0" cy="0"/>
+        </a:xfrm>
+      </p:grpSpPr>
+      <p:sp>
+        <p:nvSpPr>
+          <p:cNvPr id="2" name="Slide Image Placeholder 1"/>
+          <p:cNvSpPr>
+            <a:spLocks noGrp="1" noRot="1" noChangeAspect="1"/>
+          </p:cNvSpPr>
+          <p:nvPr>
+            <p:ph type="sldImg"/>
+          </p:nvPr>
+        </p:nvSpPr>
+        <p:spPr/>
+      </p:sp>
+      <p:sp>
+        <p:nvSpPr>
+          <p:cNvPr id="3" name="Notes Placeholder 2"/>
+          <p:cNvSpPr>
+            <a:spLocks noGrp="1"/>
+          </p:cNvSpPr>
+          <p:nvPr>
+            <p:ph type="body" idx="1"/>
+          </p:nvPr>
+        </p:nvSpPr>
+        <p:spPr/>
+        <p:txBody>
+          <a:bodyPr/>
+          <a:lstStyle/>
+          <a:p>
+            <a:r>
+              <a:rPr lang="en-US" dirty="0"/>
+              <a:t/>
+            </a:r>
+            <a:endParaRPr lang="en-US" dirty="0"/>
+          </a:p>
+        </p:txBody>
+      </p:sp>
+      <p:sp>
+        <p:nvSpPr>
+          <p:cNvPr id="4" name="Slide Number Placeholder 3"/>
+          <p:cNvSpPr>
+            <a:spLocks noGrp="1"/>
+          </p:cNvSpPr>
+          <p:nvPr>
+            <p:ph type="sldNum" sz="quarter" idx="10"/>
+          </p:nvPr>
+        </p:nvSpPr>
+        <p:spPr/>
+        <p:txBody>
+          <a:bodyPr/>
+          <a:lstStyle/>
+          <a:p>
+            <a:fld id="{F7021451-1387-4CA6-816F-3879F97B5CBC}" type="slidenum">
+              <a:rPr lang="en-US"/>
+              <a:t>17</a:t>
+            </a:fld>
+            <a:endParaRPr lang="en-US"/>
+          </a:p>
+        </p:txBody>
+      </p:sp>
+    </p:spTree>
+    <p:extLst>
+      <p:ext uri="{BB962C8B-B14F-4D97-AF65-F5344CB8AC3E}">
+        <p14:creationId xmlns:p14="http://schemas.microsoft.com/office/powerpoint/2010/main" val="1024086991"/>
+      </p:ext>
+    </p:extLst>
+  </p:cSld>
+  <p:clrMapOvr>
+    <a:masterClrMapping/>
+  </p:clrMapOvr>
+</p:notes>
+</file>
+
+<file path=ppt/notesSlides/notesSlide18.xml><?xml version="1.0" encoding="utf-8"?>
+<p:notes xmlns:a="http://schemas.openxmlformats.org/drawingml/2006/main" xmlns:r="http://schemas.openxmlformats.org/officeDocument/2006/relationships" xmlns:p="http://schemas.openxmlformats.org/presentationml/2006/main">
+  <p:cSld>
+    <p:spTree>
+      <p:nvGrpSpPr>
+        <p:cNvPr id="1" name=""/>
+        <p:cNvGrpSpPr/>
+        <p:nvPr/>
+      </p:nvGrpSpPr>
+      <p:grpSpPr>
+        <a:xfrm>
+          <a:off x="0" y="0"/>
+          <a:ext cx="0" cy="0"/>
+          <a:chOff x="0" y="0"/>
+          <a:chExt cx="0" cy="0"/>
+        </a:xfrm>
+      </p:grpSpPr>
+      <p:sp>
+        <p:nvSpPr>
+          <p:cNvPr id="2" name="Slide Image Placeholder 1"/>
+          <p:cNvSpPr>
+            <a:spLocks noGrp="1" noRot="1" noChangeAspect="1"/>
+          </p:cNvSpPr>
+          <p:nvPr>
+            <p:ph type="sldImg"/>
+          </p:nvPr>
+        </p:nvSpPr>
+        <p:spPr/>
+      </p:sp>
+      <p:sp>
+        <p:nvSpPr>
+          <p:cNvPr id="3" name="Notes Placeholder 2"/>
+          <p:cNvSpPr>
+            <a:spLocks noGrp="1"/>
+          </p:cNvSpPr>
+          <p:nvPr>
+            <p:ph type="body" idx="1"/>
+          </p:nvPr>
+        </p:nvSpPr>
+        <p:spPr/>
+        <p:txBody>
+          <a:bodyPr/>
+          <a:lstStyle/>
+          <a:p>
+            <a:r>
+              <a:rPr lang="en-US" dirty="0"/>
+              <a:t/>
+            </a:r>
+            <a:endParaRPr lang="en-US" dirty="0"/>
+          </a:p>
+        </p:txBody>
+      </p:sp>
+      <p:sp>
+        <p:nvSpPr>
+          <p:cNvPr id="4" name="Slide Number Placeholder 3"/>
+          <p:cNvSpPr>
+            <a:spLocks noGrp="1"/>
+          </p:cNvSpPr>
+          <p:nvPr>
+            <p:ph type="sldNum" sz="quarter" idx="10"/>
+          </p:nvPr>
+        </p:nvSpPr>
+        <p:spPr/>
+        <p:txBody>
+          <a:bodyPr/>
+          <a:lstStyle/>
+          <a:p>
+            <a:fld id="{F7021451-1387-4CA6-816F-3879F97B5CBC}" type="slidenum">
+              <a:rPr lang="en-US"/>
+              <a:t>18</a:t>
             </a:fld>
             <a:endParaRPr lang="en-US"/>
           </a:p>
@@ -1833,6 +2367,13 @@
 <file path=ppt/slides/slide1.xml><?xml version="1.0" encoding="utf-8"?>
 <p:sld xmlns:a="http://schemas.openxmlformats.org/drawingml/2006/main" xmlns:r="http://schemas.openxmlformats.org/officeDocument/2006/relationships" xmlns:p="http://schemas.openxmlformats.org/presentationml/2006/main">
   <p:cSld name="Slide 1">
+    <p:bg>
+      <p:bgPr>
+        <a:solidFill>
+          <a:srgbClr val="FFFFFF"/>
+        </a:solidFill>
+      </p:bgPr>
+    </p:bg>
     <p:spTree>
       <p:nvGrpSpPr>
         <p:cNvPr id="1" name=""/>
@@ -1849,14 +2390,56 @@
       </p:grpSpPr>
       <p:sp>
         <p:nvSpPr>
-          <p:cNvPr id="2" name="Text 0"/>
-          <p:cNvSpPr/>
-          <p:nvPr/>
-        </p:nvSpPr>
-        <p:spPr>
-          <a:xfrm>
-            <a:off x="548640" y="1828800"/>
-            <a:ext cx="8046720" cy="1097280"/>
+          <p:cNvPr id="2" name="Shape 0"/>
+          <p:cNvSpPr/>
+          <p:nvPr/>
+        </p:nvSpPr>
+        <p:spPr>
+          <a:xfrm>
+            <a:off x="0" y="0"/>
+            <a:ext cx="256032" cy="5148072"/>
+          </a:xfrm>
+          <a:prstGeom prst="rect">
+            <a:avLst/>
+          </a:prstGeom>
+          <a:solidFill>
+            <a:srgbClr val="B45309"/>
+          </a:solidFill>
+          <a:ln/>
+        </p:spPr>
+      </p:sp>
+      <p:sp>
+        <p:nvSpPr>
+          <p:cNvPr id="3" name="Shape 1"/>
+          <p:cNvSpPr/>
+          <p:nvPr/>
+        </p:nvSpPr>
+        <p:spPr>
+          <a:xfrm>
+            <a:off x="256032" y="0"/>
+            <a:ext cx="8887968" cy="109728"/>
+          </a:xfrm>
+          <a:prstGeom prst="rect">
+            <a:avLst/>
+          </a:prstGeom>
+          <a:solidFill>
+            <a:srgbClr val="B45309">
+              <a:alpha val="40000"/>
+            </a:srgbClr>
+          </a:solidFill>
+          <a:ln/>
+        </p:spPr>
+      </p:sp>
+      <p:sp>
+        <p:nvSpPr>
+          <p:cNvPr id="4" name="Text 2"/>
+          <p:cNvSpPr/>
+          <p:nvPr/>
+        </p:nvSpPr>
+        <p:spPr>
+          <a:xfrm>
+            <a:off x="685800" y="1051560"/>
+            <a:ext cx="7863840" cy="365760"/>
           </a:xfrm>
           <a:prstGeom prst="rect">
             <a:avLst/>
@@ -1872,27 +2455,30 @@
               <a:buNone/>
             </a:pPr>
             <a:r>
-              <a:rPr lang="en-US" sz="3200" b="1" dirty="0">
+              <a:rPr lang="en-US" sz="1300" b="1" spc="300" kern="0" dirty="0">
                 <a:solidFill>
                   <a:srgbClr val="B45309"/>
                 </a:solidFill>
-              </a:rPr>
-              <a:t>Model Audit and Risk Management</a:t>
-            </a:r>
-            <a:endParaRPr lang="en-US" sz="3200" dirty="0"/>
-          </a:p>
-        </p:txBody>
-      </p:sp>
-      <p:sp>
-        <p:nvSpPr>
-          <p:cNvPr id="3" name="Text 1"/>
-          <p:cNvSpPr/>
-          <p:nvPr/>
-        </p:nvSpPr>
-        <p:spPr>
-          <a:xfrm>
-            <a:off x="548640" y="3017520"/>
-            <a:ext cx="8046720" cy="457200"/>
+                <a:latin typeface="Arial" pitchFamily="34" charset="0"/>
+                <a:ea typeface="Arial" pitchFamily="34" charset="-122"/>
+                <a:cs typeface="Arial" pitchFamily="34" charset="-120"/>
+              </a:rPr>
+              <a:t>DAY 6</a:t>
+            </a:r>
+            <a:endParaRPr lang="en-US" sz="1300" dirty="0"/>
+          </a:p>
+        </p:txBody>
+      </p:sp>
+      <p:sp>
+        <p:nvSpPr>
+          <p:cNvPr id="5" name="Text 3"/>
+          <p:cNvSpPr/>
+          <p:nvPr/>
+        </p:nvSpPr>
+        <p:spPr>
+          <a:xfrm>
+            <a:off x="685800" y="1417320"/>
+            <a:ext cx="7863840" cy="1463040"/>
           </a:xfrm>
           <a:prstGeom prst="rect">
             <a:avLst/>
@@ -1908,27 +2494,30 @@
               <a:buNone/>
             </a:pPr>
             <a:r>
-              <a:rPr lang="en-US" sz="1400" dirty="0">
-                <a:solidFill>
-                  <a:srgbClr val="666666"/>
-                </a:solidFill>
-              </a:rPr>
-              <a:t>Lesson Forge Pro (owner)</a:t>
-            </a:r>
-            <a:endParaRPr lang="en-US" sz="1400" dirty="0"/>
-          </a:p>
-        </p:txBody>
-      </p:sp>
-      <p:sp>
-        <p:nvSpPr>
-          <p:cNvPr id="4" name="Text 2"/>
-          <p:cNvSpPr/>
-          <p:nvPr/>
-        </p:nvSpPr>
-        <p:spPr>
-          <a:xfrm>
-            <a:off x="548640" y="4389120"/>
-            <a:ext cx="8046720" cy="548640"/>
+              <a:rPr lang="en-US" sz="3300" b="1" dirty="0">
+                <a:solidFill>
+                  <a:srgbClr val="1C1917"/>
+                </a:solidFill>
+                <a:latin typeface="Arial" pitchFamily="34" charset="0"/>
+                <a:ea typeface="Arial" pitchFamily="34" charset="-122"/>
+                <a:cs typeface="Arial" pitchFamily="34" charset="-120"/>
+              </a:rPr>
+              <a:t>Model Audit and Risk Management</a:t>
+            </a:r>
+            <a:endParaRPr lang="en-US" sz="3300" dirty="0"/>
+          </a:p>
+        </p:txBody>
+      </p:sp>
+      <p:sp>
+        <p:nvSpPr>
+          <p:cNvPr id="6" name="Text 4"/>
+          <p:cNvSpPr/>
+          <p:nvPr/>
+        </p:nvSpPr>
+        <p:spPr>
+          <a:xfrm>
+            <a:off x="685800" y="2971800"/>
+            <a:ext cx="7863840" cy="411480"/>
           </a:xfrm>
           <a:prstGeom prst="rect">
             <a:avLst/>
@@ -1944,14 +2533,95 @@
               <a:buNone/>
             </a:pPr>
             <a:r>
-              <a:rPr lang="en-US" sz="1000" dirty="0">
-                <a:solidFill>
-                  <a:srgbClr val="888888"/>
-                </a:solidFill>
+              <a:rPr lang="en-US" sz="1400" dirty="0">
+                <a:solidFill>
+                  <a:srgbClr val="78716C"/>
+                </a:solidFill>
+                <a:latin typeface="Arial" pitchFamily="34" charset="0"/>
+                <a:ea typeface="Arial" pitchFamily="34" charset="-122"/>
+                <a:cs typeface="Arial" pitchFamily="34" charset="-120"/>
+              </a:rPr>
+              <a:t>FMVA Certification Prep: Financial Modeling and Valuation Bootcamp</a:t>
+            </a:r>
+            <a:endParaRPr lang="en-US" sz="1400" dirty="0"/>
+          </a:p>
+        </p:txBody>
+      </p:sp>
+      <p:sp>
+        <p:nvSpPr>
+          <p:cNvPr id="7" name="Text 5"/>
+          <p:cNvSpPr/>
+          <p:nvPr/>
+        </p:nvSpPr>
+        <p:spPr>
+          <a:xfrm>
+            <a:off x="685800" y="4343400"/>
+            <a:ext cx="7863840" cy="365760"/>
+          </a:xfrm>
+          <a:prstGeom prst="rect">
+            <a:avLst/>
+          </a:prstGeom>
+          <a:noFill/>
+          <a:ln/>
+        </p:spPr>
+        <p:txBody>
+          <a:bodyPr wrap="square" rtlCol="0" anchor="ctr"/>
+          <a:lstStyle/>
+          <a:p>
+            <a:pPr indent="0" marL="0">
+              <a:buNone/>
+            </a:pPr>
+            <a:r>
+              <a:rPr lang="en-US" sz="1200" b="1" dirty="0">
+                <a:solidFill>
+                  <a:srgbClr val="B45309"/>
+                </a:solidFill>
+                <a:latin typeface="Arial" pitchFamily="34" charset="0"/>
+                <a:ea typeface="Arial" pitchFamily="34" charset="-122"/>
+                <a:cs typeface="Arial" pitchFamily="34" charset="-120"/>
+              </a:rPr>
+              <a:t>Lesson Forge Pro (owner)</a:t>
+            </a:r>
+            <a:endParaRPr lang="en-US" sz="1200" dirty="0"/>
+          </a:p>
+        </p:txBody>
+      </p:sp>
+      <p:sp>
+        <p:nvSpPr>
+          <p:cNvPr id="8" name="Text 6"/>
+          <p:cNvSpPr/>
+          <p:nvPr/>
+        </p:nvSpPr>
+        <p:spPr>
+          <a:xfrm>
+            <a:off x="685800" y="4709160"/>
+            <a:ext cx="7863840" cy="320040"/>
+          </a:xfrm>
+          <a:prstGeom prst="rect">
+            <a:avLst/>
+          </a:prstGeom>
+          <a:noFill/>
+          <a:ln/>
+        </p:spPr>
+        <p:txBody>
+          <a:bodyPr wrap="square" rtlCol="0" anchor="ctr"/>
+          <a:lstStyle/>
+          <a:p>
+            <a:pPr indent="0" marL="0">
+              <a:buNone/>
+            </a:pPr>
+            <a:r>
+              <a:rPr lang="en-US" sz="850" dirty="0">
+                <a:solidFill>
+                  <a:srgbClr val="AAAAAA"/>
+                </a:solidFill>
+                <a:latin typeface="Arial" pitchFamily="34" charset="0"/>
+                <a:ea typeface="Arial" pitchFamily="34" charset="-122"/>
+                <a:cs typeface="Arial" pitchFamily="34" charset="-120"/>
               </a:rPr>
               <a:t>This content is educational material only and does not constitute financial, investment, or trading advice.</a:t>
             </a:r>
-            <a:endParaRPr lang="en-US" sz="1000" dirty="0"/>
+            <a:endParaRPr lang="en-US" sz="850" dirty="0"/>
           </a:p>
         </p:txBody>
       </p:sp>
@@ -1966,6 +2636,13 @@
 <file path=ppt/slides/slide10.xml><?xml version="1.0" encoding="utf-8"?>
 <p:sld xmlns:a="http://schemas.openxmlformats.org/drawingml/2006/main" xmlns:r="http://schemas.openxmlformats.org/officeDocument/2006/relationships" xmlns:p="http://schemas.openxmlformats.org/presentationml/2006/main">
   <p:cSld name="Slide 10">
+    <p:bg>
+      <p:bgPr>
+        <a:solidFill>
+          <a:srgbClr val="FFFFFF"/>
+        </a:solidFill>
+      </p:bgPr>
+    </p:bg>
     <p:spTree>
       <p:nvGrpSpPr>
         <p:cNvPr id="1" name=""/>
@@ -1982,14 +2659,34 @@
       </p:grpSpPr>
       <p:sp>
         <p:nvSpPr>
-          <p:cNvPr id="2" name="Text 0"/>
-          <p:cNvSpPr/>
-          <p:nvPr/>
-        </p:nvSpPr>
-        <p:spPr>
-          <a:xfrm>
-            <a:off x="457200" y="320040"/>
-            <a:ext cx="8229600" cy="731520"/>
+          <p:cNvPr id="2" name="Shape 0"/>
+          <p:cNvSpPr/>
+          <p:nvPr/>
+        </p:nvSpPr>
+        <p:spPr>
+          <a:xfrm>
+            <a:off x="411480" y="402336"/>
+            <a:ext cx="82296" cy="329184"/>
+          </a:xfrm>
+          <a:prstGeom prst="rect">
+            <a:avLst/>
+          </a:prstGeom>
+          <a:solidFill>
+            <a:srgbClr val="B45309"/>
+          </a:solidFill>
+          <a:ln/>
+        </p:spPr>
+      </p:sp>
+      <p:sp>
+        <p:nvSpPr>
+          <p:cNvPr id="3" name="Text 1"/>
+          <p:cNvSpPr/>
+          <p:nvPr/>
+        </p:nvSpPr>
+        <p:spPr>
+          <a:xfrm>
+            <a:off x="566928" y="292608"/>
+            <a:ext cx="8138160" cy="548640"/>
           </a:xfrm>
           <a:prstGeom prst="rect">
             <a:avLst/>
@@ -2005,27 +2702,92 @@
               <a:buNone/>
             </a:pPr>
             <a:r>
-              <a:rPr lang="en-US" sz="2400" b="1" dirty="0">
-                <a:solidFill>
-                  <a:srgbClr val="B45309"/>
-                </a:solidFill>
-              </a:rPr>
-              <a:t>Creating Model Documentation (1:05 - 1:20)</a:t>
-            </a:r>
-            <a:endParaRPr lang="en-US" sz="2400" dirty="0"/>
-          </a:p>
-        </p:txBody>
-      </p:sp>
-      <p:sp>
-        <p:nvSpPr>
-          <p:cNvPr id="3" name="Text 1"/>
-          <p:cNvSpPr/>
-          <p:nvPr/>
-        </p:nvSpPr>
-        <p:spPr>
-          <a:xfrm>
-            <a:off x="640080" y="1188720"/>
-            <a:ext cx="7863840" cy="3291840"/>
+              <a:rPr lang="en-US" sz="2100" b="1" dirty="0">
+                <a:solidFill>
+                  <a:srgbClr val="1C1917"/>
+                </a:solidFill>
+                <a:latin typeface="Arial" pitchFamily="34" charset="0"/>
+                <a:ea typeface="Arial" pitchFamily="34" charset="-122"/>
+                <a:cs typeface="Arial" pitchFamily="34" charset="-120"/>
+              </a:rPr>
+              <a:t>Worked Example: Catching a $1,198 NPV Error</a:t>
+            </a:r>
+            <a:endParaRPr lang="en-US" sz="2100" dirty="0"/>
+          </a:p>
+        </p:txBody>
+      </p:sp>
+      <p:sp>
+        <p:nvSpPr>
+          <p:cNvPr id="4" name="Shape 2"/>
+          <p:cNvSpPr/>
+          <p:nvPr/>
+        </p:nvSpPr>
+        <p:spPr>
+          <a:xfrm>
+            <a:off x="411480" y="960120"/>
+            <a:ext cx="8321040" cy="0"/>
+          </a:xfrm>
+          <a:prstGeom prst="line">
+            <a:avLst/>
+          </a:prstGeom>
+          <a:noFill/>
+          <a:ln w="12700">
+            <a:solidFill>
+              <a:srgbClr val="E7E5E4"/>
+            </a:solidFill>
+            <a:prstDash val="solid"/>
+          </a:ln>
+        </p:spPr>
+      </p:sp>
+      <p:sp>
+        <p:nvSpPr>
+          <p:cNvPr id="5" name="Text 3"/>
+          <p:cNvSpPr/>
+          <p:nvPr/>
+        </p:nvSpPr>
+        <p:spPr>
+          <a:xfrm>
+            <a:off x="411480" y="4864608"/>
+            <a:ext cx="8321040" cy="237744"/>
+          </a:xfrm>
+          <a:prstGeom prst="rect">
+            <a:avLst/>
+          </a:prstGeom>
+          <a:noFill/>
+          <a:ln/>
+        </p:spPr>
+        <p:txBody>
+          <a:bodyPr wrap="square" rtlCol="0" anchor="ctr"/>
+          <a:lstStyle/>
+          <a:p>
+            <a:pPr indent="0" marL="0">
+              <a:buNone/>
+            </a:pPr>
+            <a:r>
+              <a:rPr lang="en-US" sz="750" dirty="0">
+                <a:solidFill>
+                  <a:srgbClr val="AAAAAA"/>
+                </a:solidFill>
+                <a:latin typeface="Arial" pitchFamily="34" charset="0"/>
+                <a:ea typeface="Arial" pitchFamily="34" charset="-122"/>
+                <a:cs typeface="Arial" pitchFamily="34" charset="-120"/>
+              </a:rPr>
+              <a:t>Lesson Forge Pro (owner) — This content is educational material only and does not constitute financial, investment, or trading advice.</a:t>
+            </a:r>
+            <a:endParaRPr lang="en-US" sz="750" dirty="0"/>
+          </a:p>
+        </p:txBody>
+      </p:sp>
+      <p:sp>
+        <p:nvSpPr>
+          <p:cNvPr id="6" name="Text 4"/>
+          <p:cNvSpPr/>
+          <p:nvPr/>
+        </p:nvSpPr>
+        <p:spPr>
+          <a:xfrm>
+            <a:off x="731520" y="1188720"/>
+            <a:ext cx="7680960" cy="2743200"/>
           </a:xfrm>
           <a:prstGeom prst="rect">
             <a:avLst/>
@@ -2037,92 +2799,151 @@
           <a:bodyPr wrap="square" rtlCol="0" anchor="t"/>
           <a:lstStyle/>
           <a:p>
-            <a:pPr marL="342900" indent="-342900">
+            <a:pPr marL="152400" indent="-152400">
+              <a:spcAft>
+                <a:spcPts val="800"/>
+              </a:spcAft>
               <a:buSzPct val="100000"/>
               <a:buChar char="•"/>
             </a:pPr>
             <a:r>
-              <a:rPr lang="en-US" sz="1600" dirty="0">
-                <a:solidFill>
-                  <a:srgbClr val="333333"/>
-                </a:solidFill>
-              </a:rPr>
-              <a:t>Creating model documentation is essential to ensure transparency and reproducibility. It's like writing a recipe for your favorite dish - you want to ensure tha</a:t>
-            </a:r>
-            <a:endParaRPr lang="en-US" sz="1600" dirty="0"/>
-          </a:p>
-          <a:p>
-            <a:pPr marL="342900" indent="-342900">
+              <a:rPr lang="en-US" sz="1500" dirty="0">
+                <a:solidFill>
+                  <a:srgbClr val="1C1917"/>
+                </a:solidFill>
+                <a:latin typeface="Arial" pitchFamily="34" charset="0"/>
+                <a:ea typeface="Arial" pitchFamily="34" charset="-122"/>
+                <a:cs typeface="Arial" pitchFamily="34" charset="-120"/>
+              </a:rPr>
+              <a:t>Model claimed NPV = $1,842 on a three-year project with 12% WACC.</a:t>
+            </a:r>
+            <a:endParaRPr lang="en-US" sz="1500" dirty="0"/>
+          </a:p>
+          <a:p>
+            <a:pPr marL="152400" indent="-152400">
+              <a:spcAft>
+                <a:spcPts val="800"/>
+              </a:spcAft>
               <a:buSzPct val="100000"/>
               <a:buChar char="•"/>
             </a:pPr>
             <a:r>
-              <a:rPr lang="en-US" sz="1600" dirty="0">
-                <a:solidFill>
-                  <a:srgbClr val="333333"/>
-                </a:solidFill>
-              </a:rPr>
-              <a:t>Here are some best practices to follow when creating model documentation:</a:t>
-            </a:r>
-            <a:endParaRPr lang="en-US" sz="1600" dirty="0"/>
-          </a:p>
-          <a:p>
-            <a:pPr marL="342900" indent="-342900">
+              <a:rPr lang="en-US" sz="1500" dirty="0">
+                <a:solidFill>
+                  <a:srgbClr val="1C1917"/>
+                </a:solidFill>
+                <a:latin typeface="Arial" pitchFamily="34" charset="0"/>
+                <a:ea typeface="Arial" pitchFamily="34" charset="-122"/>
+                <a:cs typeface="Arial" pitchFamily="34" charset="-120"/>
+              </a:rPr>
+              <a:t>Independent PV recalculation: Year 1 $714, Year 2 $717, Year 3 $712 = $2,144.</a:t>
+            </a:r>
+            <a:endParaRPr lang="en-US" sz="1500" dirty="0"/>
+          </a:p>
+          <a:p>
+            <a:pPr marL="152400" indent="-152400">
+              <a:spcAft>
+                <a:spcPts val="800"/>
+              </a:spcAft>
               <a:buSzPct val="100000"/>
               <a:buChar char="•"/>
             </a:pPr>
             <a:r>
-              <a:rPr lang="en-US" sz="1600" dirty="0">
-                <a:solidFill>
-                  <a:srgbClr val="333333"/>
-                </a:solidFill>
-              </a:rPr>
-              <a:t>1. Use clear and concise language to explain your model's assumptions and methodology.</a:t>
-            </a:r>
-            <a:endParaRPr lang="en-US" sz="1600" dirty="0"/>
-          </a:p>
-          <a:p>
-            <a:pPr marL="342900" indent="-342900">
+              <a:rPr lang="en-US" sz="1500" dirty="0">
+                <a:solidFill>
+                  <a:srgbClr val="1C1917"/>
+                </a:solidFill>
+                <a:latin typeface="Arial" pitchFamily="34" charset="0"/>
+                <a:ea typeface="Arial" pitchFamily="34" charset="-122"/>
+                <a:cs typeface="Arial" pitchFamily="34" charset="-120"/>
+              </a:rPr>
+              <a:t>Correct NPV = $2,144 − $1,500 initial investment = $643.</a:t>
+            </a:r>
+            <a:endParaRPr lang="en-US" sz="1500" dirty="0"/>
+          </a:p>
+          <a:p>
+            <a:pPr marL="152400" indent="-152400">
+              <a:spcAft>
+                <a:spcPts val="800"/>
+              </a:spcAft>
               <a:buSzPct val="100000"/>
               <a:buChar char="•"/>
             </a:pPr>
             <a:r>
-              <a:rPr lang="en-US" sz="1600" dirty="0">
-                <a:solidFill>
-                  <a:srgbClr val="333333"/>
-                </a:solidFill>
-              </a:rPr>
-              <a:t>2. Include diagrams and flowcharts to illustrate your model's logic and workflow.</a:t>
-            </a:r>
-            <a:endParaRPr lang="en-US" sz="1600" dirty="0"/>
-          </a:p>
-          <a:p>
-            <a:pPr marL="342900" indent="-342900">
+              <a:rPr lang="en-US" sz="1500" dirty="0">
+                <a:solidFill>
+                  <a:srgbClr val="1C1917"/>
+                </a:solidFill>
+                <a:latin typeface="Arial" pitchFamily="34" charset="0"/>
+                <a:ea typeface="Arial" pitchFamily="34" charset="-122"/>
+                <a:cs typeface="Arial" pitchFamily="34" charset="-120"/>
+              </a:rPr>
+              <a:t>Error source: model omitted the initial investment subtraction entirely.</a:t>
+            </a:r>
+            <a:endParaRPr lang="en-US" sz="1500" dirty="0"/>
+          </a:p>
+          <a:p>
+            <a:pPr marL="152400" indent="-152400">
+              <a:spcAft>
+                <a:spcPts val="800"/>
+              </a:spcAft>
               <a:buSzPct val="100000"/>
               <a:buChar char="•"/>
             </a:pPr>
             <a:r>
-              <a:rPr lang="en-US" sz="1600" dirty="0">
-                <a:solidFill>
-                  <a:srgbClr val="333333"/>
-                </a:solidFill>
-              </a:rPr>
-              <a:t>3. Keep your documentation up-to-date and accurate.</a:t>
-            </a:r>
-            <a:endParaRPr lang="en-US" sz="1600" dirty="0"/>
-          </a:p>
-        </p:txBody>
-      </p:sp>
-      <p:sp>
-        <p:nvSpPr>
-          <p:cNvPr id="4" name="Text 2"/>
-          <p:cNvSpPr/>
-          <p:nvPr/>
-        </p:nvSpPr>
-        <p:spPr>
-          <a:xfrm>
-            <a:off x="457200" y="4709160"/>
-            <a:ext cx="8229600" cy="320040"/>
+              <a:rPr lang="en-US" sz="1500" dirty="0">
+                <a:solidFill>
+                  <a:srgbClr val="1C1917"/>
+                </a:solidFill>
+                <a:latin typeface="Arial" pitchFamily="34" charset="0"/>
+                <a:ea typeface="Arial" pitchFamily="34" charset="-122"/>
+                <a:cs typeface="Arial" pitchFamily="34" charset="-120"/>
+              </a:rPr>
+              <a:t>Formula audit (Step 3) pinpointed the exact cell causing the $1,198 overstatement.</a:t>
+            </a:r>
+            <a:endParaRPr lang="en-US" sz="1500" dirty="0"/>
+          </a:p>
+        </p:txBody>
+      </p:sp>
+      <p:sp>
+        <p:nvSpPr>
+          <p:cNvPr id="7" name="Shape 5"/>
+          <p:cNvSpPr/>
+          <p:nvPr/>
+        </p:nvSpPr>
+        <p:spPr>
+          <a:xfrm>
+            <a:off x="731520" y="4041648"/>
+            <a:ext cx="7680960" cy="566928"/>
+          </a:xfrm>
+          <a:prstGeom prst="roundRect">
+            <a:avLst>
+              <a:gd name="adj" fmla="val 12903"/>
+            </a:avLst>
+          </a:prstGeom>
+          <a:solidFill>
+            <a:srgbClr val="B45309">
+              <a:alpha val="12000"/>
+            </a:srgbClr>
+          </a:solidFill>
+          <a:ln w="12700">
+            <a:solidFill>
+              <a:srgbClr val="B45309"/>
+            </a:solidFill>
+            <a:prstDash val="solid"/>
+          </a:ln>
+        </p:spPr>
+      </p:sp>
+      <p:sp>
+        <p:nvSpPr>
+          <p:cNvPr id="8" name="Text 6"/>
+          <p:cNvSpPr/>
+          <p:nvPr/>
+        </p:nvSpPr>
+        <p:spPr>
+          <a:xfrm>
+            <a:off x="868680" y="4087368"/>
+            <a:ext cx="7406640" cy="475488"/>
           </a:xfrm>
           <a:prstGeom prst="rect">
             <a:avLst/>
@@ -2138,14 +2959,31 @@
               <a:buNone/>
             </a:pPr>
             <a:r>
-              <a:rPr lang="en-US" sz="800" dirty="0">
-                <a:solidFill>
-                  <a:srgbClr val="AAAAAA"/>
-                </a:solidFill>
-              </a:rPr>
-              <a:t>Lesson Forge Pro (owner) — This content is educational material only and does not constitute financial, investment, or trading advice.</a:t>
-            </a:r>
-            <a:endParaRPr lang="en-US" sz="800" dirty="0"/>
+              <a:rPr lang="en-US" sz="1100" b="1" dirty="0">
+                <a:solidFill>
+                  <a:srgbClr val="B45309"/>
+                </a:solidFill>
+                <a:latin typeface="Arial" pitchFamily="34" charset="0"/>
+                <a:ea typeface="Arial" pitchFamily="34" charset="-122"/>
+                <a:cs typeface="Arial" pitchFamily="34" charset="-120"/>
+              </a:rPr>
+              <a:t>Takeaway  </a:t>
+            </a:r>
+            <a:pPr indent="0" marL="0">
+              <a:buNone/>
+            </a:pPr>
+            <a:r>
+              <a:rPr lang="en-US" sz="1150" dirty="0">
+                <a:solidFill>
+                  <a:srgbClr val="1C1917"/>
+                </a:solidFill>
+                <a:latin typeface="Arial" pitchFamily="34" charset="0"/>
+                <a:ea typeface="Arial" pitchFamily="34" charset="-122"/>
+                <a:cs typeface="Arial" pitchFamily="34" charset="-120"/>
+              </a:rPr>
+              <a:t>Independent recalculation of every intermediate subtotal—not just the final cell—is what exposes material errors in practice.</a:t>
+            </a:r>
+            <a:endParaRPr lang="en-US" sz="1100" dirty="0"/>
           </a:p>
         </p:txBody>
       </p:sp>
@@ -2160,6 +2998,13 @@
 <file path=ppt/slides/slide11.xml><?xml version="1.0" encoding="utf-8"?>
 <p:sld xmlns:a="http://schemas.openxmlformats.org/drawingml/2006/main" xmlns:r="http://schemas.openxmlformats.org/officeDocument/2006/relationships" xmlns:p="http://schemas.openxmlformats.org/presentationml/2006/main">
   <p:cSld name="Slide 11">
+    <p:bg>
+      <p:bgPr>
+        <a:solidFill>
+          <a:srgbClr val="FFFFFF"/>
+        </a:solidFill>
+      </p:bgPr>
+    </p:bg>
     <p:spTree>
       <p:nvGrpSpPr>
         <p:cNvPr id="1" name=""/>
@@ -2176,14 +3021,34 @@
       </p:grpSpPr>
       <p:sp>
         <p:nvSpPr>
-          <p:cNvPr id="2" name="Text 0"/>
-          <p:cNvSpPr/>
-          <p:nvPr/>
-        </p:nvSpPr>
-        <p:spPr>
-          <a:xfrm>
-            <a:off x="457200" y="320040"/>
-            <a:ext cx="8229600" cy="731520"/>
+          <p:cNvPr id="2" name="Shape 0"/>
+          <p:cNvSpPr/>
+          <p:nvPr/>
+        </p:nvSpPr>
+        <p:spPr>
+          <a:xfrm>
+            <a:off x="411480" y="384048"/>
+            <a:ext cx="82296" cy="310896"/>
+          </a:xfrm>
+          <a:prstGeom prst="rect">
+            <a:avLst/>
+          </a:prstGeom>
+          <a:solidFill>
+            <a:srgbClr val="B45309"/>
+          </a:solidFill>
+          <a:ln/>
+        </p:spPr>
+      </p:sp>
+      <p:sp>
+        <p:nvSpPr>
+          <p:cNvPr id="3" name="Text 1"/>
+          <p:cNvSpPr/>
+          <p:nvPr/>
+        </p:nvSpPr>
+        <p:spPr>
+          <a:xfrm>
+            <a:off x="566928" y="292608"/>
+            <a:ext cx="8138160" cy="502920"/>
           </a:xfrm>
           <a:prstGeom prst="rect">
             <a:avLst/>
@@ -2199,66 +3064,17 @@
               <a:buNone/>
             </a:pPr>
             <a:r>
-              <a:rPr lang="en-US" sz="2400" b="1" dirty="0">
-                <a:solidFill>
-                  <a:srgbClr val="B45309"/>
-                </a:solidFill>
-              </a:rPr>
-              <a:t>Conclusion and Next Steps (1:20 - 1:30)</a:t>
-            </a:r>
-            <a:endParaRPr lang="en-US" sz="2400" dirty="0"/>
-          </a:p>
-        </p:txBody>
-      </p:sp>
-      <p:sp>
-        <p:nvSpPr>
-          <p:cNvPr id="3" name="Text 1"/>
-          <p:cNvSpPr/>
-          <p:nvPr/>
-        </p:nvSpPr>
-        <p:spPr>
-          <a:xfrm>
-            <a:off x="640080" y="1188720"/>
-            <a:ext cx="7863840" cy="3291840"/>
-          </a:xfrm>
-          <a:prstGeom prst="rect">
-            <a:avLst/>
-          </a:prstGeom>
-          <a:noFill/>
-          <a:ln/>
-        </p:spPr>
-        <p:txBody>
-          <a:bodyPr wrap="square" rtlCol="0" anchor="t"/>
-          <a:lstStyle/>
-          <a:p>
-            <a:pPr marL="342900" indent="-342900">
-              <a:buSzPct val="100000"/>
-              <a:buChar char="•"/>
-            </a:pPr>
-            <a:r>
-              <a:rPr lang="en-US" sz="1600" dirty="0">
-                <a:solidFill>
-                  <a:srgbClr val="333333"/>
-                </a:solidFill>
-              </a:rPr>
-              <a:t>In conclusion, model audits and risk management are essential in financial modeling. By conducting regular model audits, developing risk management strategies, </a:t>
-            </a:r>
-            <a:endParaRPr lang="en-US" sz="1600" dirty="0"/>
-          </a:p>
-          <a:p>
-            <a:pPr marL="342900" indent="-342900">
-              <a:buSzPct val="100000"/>
-              <a:buChar char="•"/>
-            </a:pPr>
-            <a:r>
-              <a:rPr lang="en-US" sz="1600" dirty="0">
-                <a:solidFill>
-                  <a:srgbClr val="333333"/>
-                </a:solidFill>
-              </a:rPr>
-              <a:t>As a next step, I encourage you to apply the concepts learned in this session to your own work. Remember, a model audit is like a health check-up for your finan</a:t>
-            </a:r>
-            <a:endParaRPr lang="en-US" sz="1600" dirty="0"/>
+              <a:rPr lang="en-US" sz="2000" b="1" dirty="0">
+                <a:solidFill>
+                  <a:srgbClr val="1C1917"/>
+                </a:solidFill>
+                <a:latin typeface="Arial" pitchFamily="34" charset="0"/>
+                <a:ea typeface="Arial" pitchFamily="34" charset="-122"/>
+                <a:cs typeface="Arial" pitchFamily="34" charset="-120"/>
+              </a:rPr>
+              <a:t>Three Lines of Defence</a:t>
+            </a:r>
+            <a:endParaRPr lang="en-US" sz="2000" dirty="0"/>
           </a:p>
         </p:txBody>
       </p:sp>
@@ -2270,8 +3086,8 @@
         </p:nvSpPr>
         <p:spPr>
           <a:xfrm>
-            <a:off x="457200" y="4709160"/>
-            <a:ext cx="8229600" cy="320040"/>
+            <a:off x="566928" y="4681728"/>
+            <a:ext cx="8138160" cy="320040"/>
           </a:xfrm>
           <a:prstGeom prst="rect">
             <a:avLst/>
@@ -2287,14 +3103,356 @@
               <a:buNone/>
             </a:pPr>
             <a:r>
-              <a:rPr lang="en-US" sz="800" dirty="0">
+              <a:rPr lang="en-US" sz="1000" i="1" dirty="0">
+                <a:solidFill>
+                  <a:srgbClr val="78716C"/>
+                </a:solidFill>
+                <a:latin typeface="Arial" pitchFamily="34" charset="0"/>
+                <a:ea typeface="Arial" pitchFamily="34" charset="-122"/>
+                <a:cs typeface="Arial" pitchFamily="34" charset="-120"/>
+              </a:rPr>
+              <a:t>Independence increases up the pyramid; model audit sits at second line</a:t>
+            </a:r>
+            <a:endParaRPr lang="en-US" sz="1000" dirty="0"/>
+          </a:p>
+        </p:txBody>
+      </p:sp>
+      <p:sp>
+        <p:nvSpPr>
+          <p:cNvPr id="5" name="Text 3"/>
+          <p:cNvSpPr/>
+          <p:nvPr/>
+        </p:nvSpPr>
+        <p:spPr>
+          <a:xfrm>
+            <a:off x="411480" y="4919472"/>
+            <a:ext cx="8321040" cy="219456"/>
+          </a:xfrm>
+          <a:prstGeom prst="rect">
+            <a:avLst/>
+          </a:prstGeom>
+          <a:noFill/>
+          <a:ln/>
+        </p:spPr>
+        <p:txBody>
+          <a:bodyPr wrap="square" rtlCol="0" anchor="ctr"/>
+          <a:lstStyle/>
+          <a:p>
+            <a:pPr indent="0" marL="0">
+              <a:buNone/>
+            </a:pPr>
+            <a:r>
+              <a:rPr lang="en-US" sz="750" dirty="0">
                 <a:solidFill>
                   <a:srgbClr val="AAAAAA"/>
                 </a:solidFill>
+                <a:latin typeface="Arial" pitchFamily="34" charset="0"/>
+                <a:ea typeface="Arial" pitchFamily="34" charset="-122"/>
+                <a:cs typeface="Arial" pitchFamily="34" charset="-120"/>
               </a:rPr>
               <a:t>Lesson Forge Pro (owner) — This content is educational material only and does not constitute financial, investment, or trading advice.</a:t>
             </a:r>
-            <a:endParaRPr lang="en-US" sz="800" dirty="0"/>
+            <a:endParaRPr lang="en-US" sz="750" dirty="0"/>
+          </a:p>
+        </p:txBody>
+      </p:sp>
+      <p:sp>
+        <p:nvSpPr>
+          <p:cNvPr id="6" name="Shape 4"/>
+          <p:cNvSpPr/>
+          <p:nvPr/>
+        </p:nvSpPr>
+        <p:spPr>
+          <a:xfrm flipV="1">
+            <a:off x="1828800" y="1234440"/>
+            <a:ext cx="2560320" cy="713232"/>
+          </a:xfrm>
+          <a:prstGeom prst="trapezoid">
+            <a:avLst/>
+          </a:prstGeom>
+          <a:solidFill>
+            <a:srgbClr val="B45309">
+              <a:alpha val="40000"/>
+            </a:srgbClr>
+          </a:solidFill>
+          <a:ln/>
+        </p:spPr>
+      </p:sp>
+      <p:sp>
+        <p:nvSpPr>
+          <p:cNvPr id="7" name="Text 5"/>
+          <p:cNvSpPr/>
+          <p:nvPr/>
+        </p:nvSpPr>
+        <p:spPr>
+          <a:xfrm>
+            <a:off x="1828800" y="1289304"/>
+            <a:ext cx="2560320" cy="621792"/>
+          </a:xfrm>
+          <a:prstGeom prst="rect">
+            <a:avLst/>
+          </a:prstGeom>
+          <a:noFill/>
+          <a:ln/>
+        </p:spPr>
+        <p:txBody>
+          <a:bodyPr wrap="square" rtlCol="0" anchor="ctr"/>
+          <a:lstStyle/>
+          <a:p>
+            <a:pPr algn="ctr" indent="0" marL="0">
+              <a:buNone/>
+            </a:pPr>
+            <a:r>
+              <a:rPr lang="en-US" sz="1200" b="1" dirty="0">
+                <a:solidFill>
+                  <a:srgbClr val="FFFFFF"/>
+                </a:solidFill>
+                <a:latin typeface="Arial" pitchFamily="34" charset="0"/>
+                <a:ea typeface="Arial" pitchFamily="34" charset="-122"/>
+                <a:cs typeface="Arial" pitchFamily="34" charset="-120"/>
+              </a:rPr>
+              <a:t>Internal Audit</a:t>
+            </a:r>
+            <a:endParaRPr lang="en-US" sz="1200" dirty="0"/>
+          </a:p>
+        </p:txBody>
+      </p:sp>
+      <p:sp>
+        <p:nvSpPr>
+          <p:cNvPr id="8" name="Text 6"/>
+          <p:cNvSpPr/>
+          <p:nvPr/>
+        </p:nvSpPr>
+        <p:spPr>
+          <a:xfrm>
+            <a:off x="5760720" y="1444752"/>
+            <a:ext cx="2926080" cy="310896"/>
+          </a:xfrm>
+          <a:prstGeom prst="rect">
+            <a:avLst/>
+          </a:prstGeom>
+          <a:noFill/>
+          <a:ln/>
+        </p:spPr>
+        <p:txBody>
+          <a:bodyPr wrap="square" rtlCol="0" anchor="ctr"/>
+          <a:lstStyle/>
+          <a:p>
+            <a:pPr indent="0" marL="0">
+              <a:buNone/>
+            </a:pPr>
+            <a:r>
+              <a:rPr lang="en-US" sz="1000" dirty="0">
+                <a:solidFill>
+                  <a:srgbClr val="78716C"/>
+                </a:solidFill>
+                <a:latin typeface="Arial" pitchFamily="34" charset="0"/>
+                <a:ea typeface="Arial" pitchFamily="34" charset="-122"/>
+                <a:cs typeface="Arial" pitchFamily="34" charset="-120"/>
+              </a:rPr>
+              <a:t>Third line: checks governance framework works</a:t>
+            </a:r>
+            <a:endParaRPr lang="en-US" sz="1000" dirty="0"/>
+          </a:p>
+        </p:txBody>
+      </p:sp>
+      <p:sp>
+        <p:nvSpPr>
+          <p:cNvPr id="9" name="Shape 7"/>
+          <p:cNvSpPr/>
+          <p:nvPr/>
+        </p:nvSpPr>
+        <p:spPr>
+          <a:xfrm flipV="1">
+            <a:off x="1188720" y="2039112"/>
+            <a:ext cx="3840480" cy="713232"/>
+          </a:xfrm>
+          <a:prstGeom prst="trapezoid">
+            <a:avLst/>
+          </a:prstGeom>
+          <a:solidFill>
+            <a:srgbClr val="B45309">
+              <a:alpha val="67000"/>
+            </a:srgbClr>
+          </a:solidFill>
+          <a:ln/>
+        </p:spPr>
+      </p:sp>
+      <p:sp>
+        <p:nvSpPr>
+          <p:cNvPr id="10" name="Text 8"/>
+          <p:cNvSpPr/>
+          <p:nvPr/>
+        </p:nvSpPr>
+        <p:spPr>
+          <a:xfrm>
+            <a:off x="1188720" y="2093976"/>
+            <a:ext cx="3840480" cy="621792"/>
+          </a:xfrm>
+          <a:prstGeom prst="rect">
+            <a:avLst/>
+          </a:prstGeom>
+          <a:noFill/>
+          <a:ln/>
+        </p:spPr>
+        <p:txBody>
+          <a:bodyPr wrap="square" rtlCol="0" anchor="ctr"/>
+          <a:lstStyle/>
+          <a:p>
+            <a:pPr algn="ctr" indent="0" marL="0">
+              <a:buNone/>
+            </a:pPr>
+            <a:r>
+              <a:rPr lang="en-US" sz="1200" b="1" dirty="0">
+                <a:solidFill>
+                  <a:srgbClr val="FFFFFF"/>
+                </a:solidFill>
+                <a:latin typeface="Arial" pitchFamily="34" charset="0"/>
+                <a:ea typeface="Arial" pitchFamily="34" charset="-122"/>
+                <a:cs typeface="Arial" pitchFamily="34" charset="-120"/>
+              </a:rPr>
+              <a:t>Model Audit Team</a:t>
+            </a:r>
+            <a:endParaRPr lang="en-US" sz="1200" dirty="0"/>
+          </a:p>
+        </p:txBody>
+      </p:sp>
+      <p:sp>
+        <p:nvSpPr>
+          <p:cNvPr id="11" name="Text 9"/>
+          <p:cNvSpPr/>
+          <p:nvPr/>
+        </p:nvSpPr>
+        <p:spPr>
+          <a:xfrm>
+            <a:off x="5760720" y="2249424"/>
+            <a:ext cx="2926080" cy="310896"/>
+          </a:xfrm>
+          <a:prstGeom prst="rect">
+            <a:avLst/>
+          </a:prstGeom>
+          <a:noFill/>
+          <a:ln/>
+        </p:spPr>
+        <p:txBody>
+          <a:bodyPr wrap="square" rtlCol="0" anchor="ctr"/>
+          <a:lstStyle/>
+          <a:p>
+            <a:pPr indent="0" marL="0">
+              <a:buNone/>
+            </a:pPr>
+            <a:r>
+              <a:rPr lang="en-US" sz="1000" dirty="0">
+                <a:solidFill>
+                  <a:srgbClr val="78716C"/>
+                </a:solidFill>
+                <a:latin typeface="Arial" pitchFamily="34" charset="0"/>
+                <a:ea typeface="Arial" pitchFamily="34" charset="-122"/>
+                <a:cs typeface="Arial" pitchFamily="34" charset="-120"/>
+              </a:rPr>
+              <a:t>Second line: independent challenge of models</a:t>
+            </a:r>
+            <a:endParaRPr lang="en-US" sz="1000" dirty="0"/>
+          </a:p>
+        </p:txBody>
+      </p:sp>
+      <p:sp>
+        <p:nvSpPr>
+          <p:cNvPr id="12" name="Shape 10"/>
+          <p:cNvSpPr/>
+          <p:nvPr/>
+        </p:nvSpPr>
+        <p:spPr>
+          <a:xfrm flipV="1">
+            <a:off x="548640" y="2843784"/>
+            <a:ext cx="5120640" cy="713232"/>
+          </a:xfrm>
+          <a:prstGeom prst="trapezoid">
+            <a:avLst/>
+          </a:prstGeom>
+          <a:solidFill>
+            <a:srgbClr val="B45309">
+              <a:alpha val="95000"/>
+            </a:srgbClr>
+          </a:solidFill>
+          <a:ln/>
+        </p:spPr>
+      </p:sp>
+      <p:sp>
+        <p:nvSpPr>
+          <p:cNvPr id="13" name="Text 11"/>
+          <p:cNvSpPr/>
+          <p:nvPr/>
+        </p:nvSpPr>
+        <p:spPr>
+          <a:xfrm>
+            <a:off x="548640" y="2898648"/>
+            <a:ext cx="5120640" cy="621792"/>
+          </a:xfrm>
+          <a:prstGeom prst="rect">
+            <a:avLst/>
+          </a:prstGeom>
+          <a:noFill/>
+          <a:ln/>
+        </p:spPr>
+        <p:txBody>
+          <a:bodyPr wrap="square" rtlCol="0" anchor="ctr"/>
+          <a:lstStyle/>
+          <a:p>
+            <a:pPr algn="ctr" indent="0" marL="0">
+              <a:buNone/>
+            </a:pPr>
+            <a:r>
+              <a:rPr lang="en-US" sz="1200" b="1" dirty="0">
+                <a:solidFill>
+                  <a:srgbClr val="FFFFFF"/>
+                </a:solidFill>
+                <a:latin typeface="Arial" pitchFamily="34" charset="0"/>
+                <a:ea typeface="Arial" pitchFamily="34" charset="-122"/>
+                <a:cs typeface="Arial" pitchFamily="34" charset="-120"/>
+              </a:rPr>
+              <a:t>Model Developer</a:t>
+            </a:r>
+            <a:endParaRPr lang="en-US" sz="1200" dirty="0"/>
+          </a:p>
+        </p:txBody>
+      </p:sp>
+      <p:sp>
+        <p:nvSpPr>
+          <p:cNvPr id="14" name="Text 12"/>
+          <p:cNvSpPr/>
+          <p:nvPr/>
+        </p:nvSpPr>
+        <p:spPr>
+          <a:xfrm>
+            <a:off x="5760720" y="3054096"/>
+            <a:ext cx="2926080" cy="310896"/>
+          </a:xfrm>
+          <a:prstGeom prst="rect">
+            <a:avLst/>
+          </a:prstGeom>
+          <a:noFill/>
+          <a:ln/>
+        </p:spPr>
+        <p:txBody>
+          <a:bodyPr wrap="square" rtlCol="0" anchor="ctr"/>
+          <a:lstStyle/>
+          <a:p>
+            <a:pPr indent="0" marL="0">
+              <a:buNone/>
+            </a:pPr>
+            <a:r>
+              <a:rPr lang="en-US" sz="1000" dirty="0">
+                <a:solidFill>
+                  <a:srgbClr val="78716C"/>
+                </a:solidFill>
+                <a:latin typeface="Arial" pitchFamily="34" charset="0"/>
+                <a:ea typeface="Arial" pitchFamily="34" charset="-122"/>
+                <a:cs typeface="Arial" pitchFamily="34" charset="-120"/>
+              </a:rPr>
+              <a:t>First line: builds, documents, owns model</a:t>
+            </a:r>
+            <a:endParaRPr lang="en-US" sz="1000" dirty="0"/>
           </a:p>
         </p:txBody>
       </p:sp>
@@ -2309,6 +3467,13 @@
 <file path=ppt/slides/slide12.xml><?xml version="1.0" encoding="utf-8"?>
 <p:sld xmlns:a="http://schemas.openxmlformats.org/drawingml/2006/main" xmlns:r="http://schemas.openxmlformats.org/officeDocument/2006/relationships" xmlns:p="http://schemas.openxmlformats.org/presentationml/2006/main">
   <p:cSld name="Slide 12">
+    <p:bg>
+      <p:bgPr>
+        <a:solidFill>
+          <a:srgbClr val="FFFFFF"/>
+        </a:solidFill>
+      </p:bgPr>
+    </p:bg>
     <p:spTree>
       <p:nvGrpSpPr>
         <p:cNvPr id="1" name=""/>
@@ -2325,14 +3490,34 @@
       </p:grpSpPr>
       <p:sp>
         <p:nvSpPr>
-          <p:cNvPr id="2" name="Text 0"/>
-          <p:cNvSpPr/>
-          <p:nvPr/>
-        </p:nvSpPr>
-        <p:spPr>
-          <a:xfrm>
-            <a:off x="457200" y="320040"/>
-            <a:ext cx="8229600" cy="731520"/>
+          <p:cNvPr id="2" name="Shape 0"/>
+          <p:cNvSpPr/>
+          <p:nvPr/>
+        </p:nvSpPr>
+        <p:spPr>
+          <a:xfrm>
+            <a:off x="411480" y="402336"/>
+            <a:ext cx="82296" cy="329184"/>
+          </a:xfrm>
+          <a:prstGeom prst="rect">
+            <a:avLst/>
+          </a:prstGeom>
+          <a:solidFill>
+            <a:srgbClr val="B45309"/>
+          </a:solidFill>
+          <a:ln/>
+        </p:spPr>
+      </p:sp>
+      <p:sp>
+        <p:nvSpPr>
+          <p:cNvPr id="3" name="Text 1"/>
+          <p:cNvSpPr/>
+          <p:nvPr/>
+        </p:nvSpPr>
+        <p:spPr>
+          <a:xfrm>
+            <a:off x="566928" y="292608"/>
+            <a:ext cx="8138160" cy="548640"/>
           </a:xfrm>
           <a:prstGeom prst="rect">
             <a:avLst/>
@@ -2348,27 +3533,92 @@
               <a:buNone/>
             </a:pPr>
             <a:r>
-              <a:rPr lang="en-US" sz="2400" b="1" dirty="0">
-                <a:solidFill>
-                  <a:srgbClr val="B45309"/>
-                </a:solidFill>
-              </a:rPr>
-              <a:t>Anticipated Learner Questions and Answers</a:t>
-            </a:r>
-            <a:endParaRPr lang="en-US" sz="2400" dirty="0"/>
-          </a:p>
-        </p:txBody>
-      </p:sp>
-      <p:sp>
-        <p:nvSpPr>
-          <p:cNvPr id="3" name="Text 1"/>
-          <p:cNvSpPr/>
-          <p:nvPr/>
-        </p:nvSpPr>
-        <p:spPr>
-          <a:xfrm>
-            <a:off x="640080" y="1188720"/>
-            <a:ext cx="7863840" cy="3291840"/>
+              <a:rPr lang="en-US" sz="2100" b="1" dirty="0">
+                <a:solidFill>
+                  <a:srgbClr val="1C1917"/>
+                </a:solidFill>
+                <a:latin typeface="Arial" pitchFamily="34" charset="0"/>
+                <a:ea typeface="Arial" pitchFamily="34" charset="-122"/>
+                <a:cs typeface="Arial" pitchFamily="34" charset="-120"/>
+              </a:rPr>
+              <a:t>Audit Outputs and Final Checks</a:t>
+            </a:r>
+            <a:endParaRPr lang="en-US" sz="2100" dirty="0"/>
+          </a:p>
+        </p:txBody>
+      </p:sp>
+      <p:sp>
+        <p:nvSpPr>
+          <p:cNvPr id="4" name="Shape 2"/>
+          <p:cNvSpPr/>
+          <p:nvPr/>
+        </p:nvSpPr>
+        <p:spPr>
+          <a:xfrm>
+            <a:off x="411480" y="960120"/>
+            <a:ext cx="8321040" cy="0"/>
+          </a:xfrm>
+          <a:prstGeom prst="line">
+            <a:avLst/>
+          </a:prstGeom>
+          <a:noFill/>
+          <a:ln w="12700">
+            <a:solidFill>
+              <a:srgbClr val="E7E5E4"/>
+            </a:solidFill>
+            <a:prstDash val="solid"/>
+          </a:ln>
+        </p:spPr>
+      </p:sp>
+      <p:sp>
+        <p:nvSpPr>
+          <p:cNvPr id="5" name="Text 3"/>
+          <p:cNvSpPr/>
+          <p:nvPr/>
+        </p:nvSpPr>
+        <p:spPr>
+          <a:xfrm>
+            <a:off x="411480" y="4864608"/>
+            <a:ext cx="8321040" cy="237744"/>
+          </a:xfrm>
+          <a:prstGeom prst="rect">
+            <a:avLst/>
+          </a:prstGeom>
+          <a:noFill/>
+          <a:ln/>
+        </p:spPr>
+        <p:txBody>
+          <a:bodyPr wrap="square" rtlCol="0" anchor="ctr"/>
+          <a:lstStyle/>
+          <a:p>
+            <a:pPr indent="0" marL="0">
+              <a:buNone/>
+            </a:pPr>
+            <a:r>
+              <a:rPr lang="en-US" sz="750" dirty="0">
+                <a:solidFill>
+                  <a:srgbClr val="AAAAAA"/>
+                </a:solidFill>
+                <a:latin typeface="Arial" pitchFamily="34" charset="0"/>
+                <a:ea typeface="Arial" pitchFamily="34" charset="-122"/>
+                <a:cs typeface="Arial" pitchFamily="34" charset="-120"/>
+              </a:rPr>
+              <a:t>Lesson Forge Pro (owner) — This content is educational material only and does not constitute financial, investment, or trading advice.</a:t>
+            </a:r>
+            <a:endParaRPr lang="en-US" sz="750" dirty="0"/>
+          </a:p>
+        </p:txBody>
+      </p:sp>
+      <p:sp>
+        <p:nvSpPr>
+          <p:cNvPr id="6" name="Text 4"/>
+          <p:cNvSpPr/>
+          <p:nvPr/>
+        </p:nvSpPr>
+        <p:spPr>
+          <a:xfrm>
+            <a:off x="731520" y="1188720"/>
+            <a:ext cx="7680960" cy="2743200"/>
           </a:xfrm>
           <a:prstGeom prst="rect">
             <a:avLst/>
@@ -2380,107 +3630,151 @@
           <a:bodyPr wrap="square" rtlCol="0" anchor="t"/>
           <a:lstStyle/>
           <a:p>
-            <a:pPr marL="342900" indent="-342900">
+            <a:pPr marL="152400" indent="-152400">
+              <a:spcAft>
+                <a:spcPts val="800"/>
+              </a:spcAft>
               <a:buSzPct val="100000"/>
               <a:buChar char="•"/>
             </a:pPr>
             <a:r>
-              <a:rPr lang="en-US" sz="1600" dirty="0">
-                <a:solidFill>
-                  <a:srgbClr val="333333"/>
-                </a:solidFill>
-              </a:rPr>
-              <a:t>Q: What is the difference between a model audit and risk management?</a:t>
-            </a:r>
-            <a:endParaRPr lang="en-US" sz="1600" dirty="0"/>
-          </a:p>
-          <a:p>
-            <a:pPr marL="342900" indent="-342900">
+              <a:rPr lang="en-US" sz="1500" dirty="0">
+                <a:solidFill>
+                  <a:srgbClr val="1C1917"/>
+                </a:solidFill>
+                <a:latin typeface="Arial" pitchFamily="34" charset="0"/>
+                <a:ea typeface="Arial" pitchFamily="34" charset="-122"/>
+                <a:cs typeface="Arial" pitchFamily="34" charset="-120"/>
+              </a:rPr>
+              <a:t>Deliver a findings log: each error's location, severity, and recommended fix.</a:t>
+            </a:r>
+            <a:endParaRPr lang="en-US" sz="1500" dirty="0"/>
+          </a:p>
+          <a:p>
+            <a:pPr marL="152400" indent="-152400">
+              <a:spcAft>
+                <a:spcPts val="800"/>
+              </a:spcAft>
               <a:buSzPct val="100000"/>
               <a:buChar char="•"/>
             </a:pPr>
             <a:r>
-              <a:rPr lang="en-US" sz="1600" dirty="0">
-                <a:solidFill>
-                  <a:srgbClr val="333333"/>
-                </a:solidFill>
-              </a:rPr>
-              <a:t>A: A model audit is a review of your model's assumptions, inputs, and outputs to ensure they are accurate and reliable. Risk management involves identifying pot</a:t>
-            </a:r>
-            <a:endParaRPr lang="en-US" sz="1600" dirty="0"/>
-          </a:p>
-          <a:p>
-            <a:pPr marL="342900" indent="-342900">
+              <a:rPr lang="en-US" sz="1500" dirty="0">
+                <a:solidFill>
+                  <a:srgbClr val="1C1917"/>
+                </a:solidFill>
+                <a:latin typeface="Arial" pitchFamily="34" charset="0"/>
+                <a:ea typeface="Arial" pitchFamily="34" charset="-122"/>
+                <a:cs typeface="Arial" pitchFamily="34" charset="-120"/>
+              </a:rPr>
+              <a:t>Provide a corrected model file or formal sign-off if no issues are found.</a:t>
+            </a:r>
+            <a:endParaRPr lang="en-US" sz="1500" dirty="0"/>
+          </a:p>
+          <a:p>
+            <a:pPr marL="152400" indent="-152400">
+              <a:spcAft>
+                <a:spcPts val="800"/>
+              </a:spcAft>
               <a:buSzPct val="100000"/>
               <a:buChar char="•"/>
             </a:pPr>
             <a:r>
-              <a:rPr lang="en-US" sz="1600" dirty="0">
-                <a:solidFill>
-                  <a:srgbClr val="333333"/>
-                </a:solidFill>
-              </a:rPr>
-              <a:t>Q: How often should I conduct a model audit?</a:t>
-            </a:r>
-            <a:endParaRPr lang="en-US" sz="1600" dirty="0"/>
-          </a:p>
-          <a:p>
-            <a:pPr marL="342900" indent="-342900">
+              <a:rPr lang="en-US" sz="1500" dirty="0">
+                <a:solidFill>
+                  <a:srgbClr val="1C1917"/>
+                </a:solidFill>
+                <a:latin typeface="Arial" pitchFamily="34" charset="0"/>
+                <a:ea typeface="Arial" pitchFamily="34" charset="-122"/>
+                <a:cs typeface="Arial" pitchFamily="34" charset="-120"/>
+              </a:rPr>
+              <a:t>Issue a written audit opinion on whether the model is fit for purpose.</a:t>
+            </a:r>
+            <a:endParaRPr lang="en-US" sz="1500" dirty="0"/>
+          </a:p>
+          <a:p>
+            <a:pPr marL="152400" indent="-152400">
+              <a:spcAft>
+                <a:spcPts val="800"/>
+              </a:spcAft>
               <a:buSzPct val="100000"/>
               <a:buChar char="•"/>
             </a:pPr>
             <a:r>
-              <a:rPr lang="en-US" sz="1600" dirty="0">
-                <a:solidFill>
-                  <a:srgbClr val="333333"/>
-                </a:solidFill>
-              </a:rPr>
-              <a:t>A: It depends on the complexity and criticality of your model. As a general rule, you should conduct a model audit at least once a year, or whenever you make si</a:t>
-            </a:r>
-            <a:endParaRPr lang="en-US" sz="1600" dirty="0"/>
-          </a:p>
-          <a:p>
-            <a:pPr marL="342900" indent="-342900">
+              <a:rPr lang="en-US" sz="1500" dirty="0">
+                <a:solidFill>
+                  <a:srgbClr val="1C1917"/>
+                </a:solidFill>
+                <a:latin typeface="Arial" pitchFamily="34" charset="0"/>
+                <a:ea typeface="Arial" pitchFamily="34" charset="-122"/>
+                <a:cs typeface="Arial" pitchFamily="34" charset="-120"/>
+              </a:rPr>
+              <a:t>Confirm all findings are resolved or formally accepted before release.</a:t>
+            </a:r>
+            <a:endParaRPr lang="en-US" sz="1500" dirty="0"/>
+          </a:p>
+          <a:p>
+            <a:pPr marL="152400" indent="-152400">
+              <a:spcAft>
+                <a:spcPts val="800"/>
+              </a:spcAft>
               <a:buSzPct val="100000"/>
               <a:buChar char="•"/>
             </a:pPr>
             <a:r>
-              <a:rPr lang="en-US" sz="1600" dirty="0">
-                <a:solidFill>
-                  <a:srgbClr val="333333"/>
-                </a:solidFill>
-              </a:rPr>
-              <a:t>Q: What are some common model risks that I should be aware of?</a:t>
-            </a:r>
-            <a:endParaRPr lang="en-US" sz="1600" dirty="0"/>
-          </a:p>
-          <a:p>
-            <a:pPr marL="342900" indent="-342900">
-              <a:buSzPct val="100000"/>
-              <a:buChar char="•"/>
-            </a:pPr>
-            <a:r>
-              <a:rPr lang="en-US" sz="1600" dirty="0">
-                <a:solidFill>
-                  <a:srgbClr val="333333"/>
-                </a:solidFill>
-              </a:rPr>
-              <a:t>A: Some common model risks include data errors, assumption errors, and methodology errors. You should also be aware of external risks such as changes in market </a:t>
-            </a:r>
-            <a:endParaRPr lang="en-US" sz="1600" dirty="0"/>
-          </a:p>
-        </p:txBody>
-      </p:sp>
-      <p:sp>
-        <p:nvSpPr>
-          <p:cNvPr id="4" name="Text 2"/>
-          <p:cNvSpPr/>
-          <p:nvPr/>
-        </p:nvSpPr>
-        <p:spPr>
-          <a:xfrm>
-            <a:off x="457200" y="4709160"/>
-            <a:ext cx="8229600" cy="320040"/>
+              <a:rPr lang="en-US" sz="1500" dirty="0">
+                <a:solidFill>
+                  <a:srgbClr val="1C1917"/>
+                </a:solidFill>
+                <a:latin typeface="Arial" pitchFamily="34" charset="0"/>
+                <a:ea typeface="Arial" pitchFamily="34" charset="-122"/>
+                <a:cs typeface="Arial" pitchFamily="34" charset="-120"/>
+              </a:rPr>
+              <a:t>Verify the corrected model reproduces auditor benchmark figures exactly.</a:t>
+            </a:r>
+            <a:endParaRPr lang="en-US" sz="1500" dirty="0"/>
+          </a:p>
+        </p:txBody>
+      </p:sp>
+      <p:sp>
+        <p:nvSpPr>
+          <p:cNvPr id="7" name="Shape 5"/>
+          <p:cNvSpPr/>
+          <p:nvPr/>
+        </p:nvSpPr>
+        <p:spPr>
+          <a:xfrm>
+            <a:off x="731520" y="4041648"/>
+            <a:ext cx="7680960" cy="566928"/>
+          </a:xfrm>
+          <a:prstGeom prst="roundRect">
+            <a:avLst>
+              <a:gd name="adj" fmla="val 12903"/>
+            </a:avLst>
+          </a:prstGeom>
+          <a:solidFill>
+            <a:srgbClr val="B45309">
+              <a:alpha val="12000"/>
+            </a:srgbClr>
+          </a:solidFill>
+          <a:ln w="12700">
+            <a:solidFill>
+              <a:srgbClr val="B45309"/>
+            </a:solidFill>
+            <a:prstDash val="solid"/>
+          </a:ln>
+        </p:spPr>
+      </p:sp>
+      <p:sp>
+        <p:nvSpPr>
+          <p:cNvPr id="8" name="Text 6"/>
+          <p:cNvSpPr/>
+          <p:nvPr/>
+        </p:nvSpPr>
+        <p:spPr>
+          <a:xfrm>
+            <a:off x="868680" y="4087368"/>
+            <a:ext cx="7406640" cy="475488"/>
           </a:xfrm>
           <a:prstGeom prst="rect">
             <a:avLst/>
@@ -2496,14 +3790,31 @@
               <a:buNone/>
             </a:pPr>
             <a:r>
-              <a:rPr lang="en-US" sz="800" dirty="0">
-                <a:solidFill>
-                  <a:srgbClr val="AAAAAA"/>
-                </a:solidFill>
-              </a:rPr>
-              <a:t>Lesson Forge Pro (owner) — This content is educational material only and does not constitute financial, investment, or trading advice.</a:t>
-            </a:r>
-            <a:endParaRPr lang="en-US" sz="800" dirty="0"/>
+              <a:rPr lang="en-US" sz="1100" b="1" dirty="0">
+                <a:solidFill>
+                  <a:srgbClr val="B45309"/>
+                </a:solidFill>
+                <a:latin typeface="Arial" pitchFamily="34" charset="0"/>
+                <a:ea typeface="Arial" pitchFamily="34" charset="-122"/>
+                <a:cs typeface="Arial" pitchFamily="34" charset="-120"/>
+              </a:rPr>
+              <a:t>Takeaway  </a:t>
+            </a:r>
+            <a:pPr indent="0" marL="0">
+              <a:buNone/>
+            </a:pPr>
+            <a:r>
+              <a:rPr lang="en-US" sz="1150" dirty="0">
+                <a:solidFill>
+                  <a:srgbClr val="1C1917"/>
+                </a:solidFill>
+                <a:latin typeface="Arial" pitchFamily="34" charset="0"/>
+                <a:ea typeface="Arial" pitchFamily="34" charset="-122"/>
+                <a:cs typeface="Arial" pitchFamily="34" charset="-120"/>
+              </a:rPr>
+              <a:t>An audit is only complete when findings are resolved, the corrected model matches the benchmark, and a written opinion is issued.</a:t>
+            </a:r>
+            <a:endParaRPr lang="en-US" sz="1100" dirty="0"/>
           </a:p>
         </p:txBody>
       </p:sp>
@@ -2515,9 +3826,16 @@
 </p:sld>
 </file>
 
-<file path=ppt/slides/slide2.xml><?xml version="1.0" encoding="utf-8"?>
+<file path=ppt/slides/slide13.xml><?xml version="1.0" encoding="utf-8"?>
 <p:sld xmlns:a="http://schemas.openxmlformats.org/drawingml/2006/main" xmlns:r="http://schemas.openxmlformats.org/officeDocument/2006/relationships" xmlns:p="http://schemas.openxmlformats.org/presentationml/2006/main">
-  <p:cSld name="Slide 2">
+  <p:cSld name="Slide 13">
+    <p:bg>
+      <p:bgPr>
+        <a:solidFill>
+          <a:srgbClr val="FFFFFF"/>
+        </a:solidFill>
+      </p:bgPr>
+    </p:bg>
     <p:spTree>
       <p:nvGrpSpPr>
         <p:cNvPr id="1" name=""/>
@@ -2534,14 +3852,34 @@
       </p:grpSpPr>
       <p:sp>
         <p:nvSpPr>
-          <p:cNvPr id="2" name="Text 0"/>
-          <p:cNvSpPr/>
-          <p:nvPr/>
-        </p:nvSpPr>
-        <p:spPr>
-          <a:xfrm>
-            <a:off x="457200" y="320040"/>
-            <a:ext cx="8229600" cy="731520"/>
+          <p:cNvPr id="2" name="Shape 0"/>
+          <p:cNvSpPr/>
+          <p:nvPr/>
+        </p:nvSpPr>
+        <p:spPr>
+          <a:xfrm>
+            <a:off x="411480" y="402336"/>
+            <a:ext cx="82296" cy="329184"/>
+          </a:xfrm>
+          <a:prstGeom prst="rect">
+            <a:avLst/>
+          </a:prstGeom>
+          <a:solidFill>
+            <a:srgbClr val="B45309"/>
+          </a:solidFill>
+          <a:ln/>
+        </p:spPr>
+      </p:sp>
+      <p:sp>
+        <p:nvSpPr>
+          <p:cNvPr id="3" name="Text 1"/>
+          <p:cNvSpPr/>
+          <p:nvPr/>
+        </p:nvSpPr>
+        <p:spPr>
+          <a:xfrm>
+            <a:off x="566928" y="292608"/>
+            <a:ext cx="8138160" cy="548640"/>
           </a:xfrm>
           <a:prstGeom prst="rect">
             <a:avLst/>
@@ -2557,27 +3895,53 @@
               <a:buNone/>
             </a:pPr>
             <a:r>
-              <a:rPr lang="en-US" sz="2400" b="1" dirty="0">
-                <a:solidFill>
-                  <a:srgbClr val="B45309"/>
-                </a:solidFill>
-              </a:rPr>
-              <a:t>Model Audit and Risk Management</a:t>
-            </a:r>
-            <a:endParaRPr lang="en-US" sz="2400" dirty="0"/>
-          </a:p>
-        </p:txBody>
-      </p:sp>
-      <p:sp>
-        <p:nvSpPr>
-          <p:cNvPr id="3" name="Text 1"/>
-          <p:cNvSpPr/>
-          <p:nvPr/>
-        </p:nvSpPr>
-        <p:spPr>
-          <a:xfrm>
-            <a:off x="457200" y="4709160"/>
-            <a:ext cx="8229600" cy="320040"/>
+              <a:rPr lang="en-US" sz="2100" b="1" dirty="0">
+                <a:solidFill>
+                  <a:srgbClr val="1C1917"/>
+                </a:solidFill>
+                <a:latin typeface="Arial" pitchFamily="34" charset="0"/>
+                <a:ea typeface="Arial" pitchFamily="34" charset="-122"/>
+                <a:cs typeface="Arial" pitchFamily="34" charset="-120"/>
+              </a:rPr>
+              <a:t>Typical Use Cases Across Finance</a:t>
+            </a:r>
+            <a:endParaRPr lang="en-US" sz="2100" dirty="0"/>
+          </a:p>
+        </p:txBody>
+      </p:sp>
+      <p:sp>
+        <p:nvSpPr>
+          <p:cNvPr id="4" name="Shape 2"/>
+          <p:cNvSpPr/>
+          <p:nvPr/>
+        </p:nvSpPr>
+        <p:spPr>
+          <a:xfrm>
+            <a:off x="411480" y="960120"/>
+            <a:ext cx="8321040" cy="0"/>
+          </a:xfrm>
+          <a:prstGeom prst="line">
+            <a:avLst/>
+          </a:prstGeom>
+          <a:noFill/>
+          <a:ln w="12700">
+            <a:solidFill>
+              <a:srgbClr val="E7E5E4"/>
+            </a:solidFill>
+            <a:prstDash val="solid"/>
+          </a:ln>
+        </p:spPr>
+      </p:sp>
+      <p:sp>
+        <p:nvSpPr>
+          <p:cNvPr id="5" name="Text 3"/>
+          <p:cNvSpPr/>
+          <p:nvPr/>
+        </p:nvSpPr>
+        <p:spPr>
+          <a:xfrm>
+            <a:off x="411480" y="4864608"/>
+            <a:ext cx="8321040" cy="237744"/>
           </a:xfrm>
           <a:prstGeom prst="rect">
             <a:avLst/>
@@ -2593,14 +3957,226 @@
               <a:buNone/>
             </a:pPr>
             <a:r>
-              <a:rPr lang="en-US" sz="800" dirty="0">
+              <a:rPr lang="en-US" sz="750" dirty="0">
                 <a:solidFill>
                   <a:srgbClr val="AAAAAA"/>
                 </a:solidFill>
+                <a:latin typeface="Arial" pitchFamily="34" charset="0"/>
+                <a:ea typeface="Arial" pitchFamily="34" charset="-122"/>
+                <a:cs typeface="Arial" pitchFamily="34" charset="-120"/>
               </a:rPr>
               <a:t>Lesson Forge Pro (owner) — This content is educational material only and does not constitute financial, investment, or trading advice.</a:t>
             </a:r>
-            <a:endParaRPr lang="en-US" sz="800" dirty="0"/>
+            <a:endParaRPr lang="en-US" sz="750" dirty="0"/>
+          </a:p>
+        </p:txBody>
+      </p:sp>
+      <p:sp>
+        <p:nvSpPr>
+          <p:cNvPr id="6" name="Text 4"/>
+          <p:cNvSpPr/>
+          <p:nvPr/>
+        </p:nvSpPr>
+        <p:spPr>
+          <a:xfrm>
+            <a:off x="731520" y="1188720"/>
+            <a:ext cx="7680960" cy="2743200"/>
+          </a:xfrm>
+          <a:prstGeom prst="rect">
+            <a:avLst/>
+          </a:prstGeom>
+          <a:noFill/>
+          <a:ln/>
+        </p:spPr>
+        <p:txBody>
+          <a:bodyPr wrap="square" rtlCol="0" anchor="t"/>
+          <a:lstStyle/>
+          <a:p>
+            <a:pPr marL="152400" indent="-152400">
+              <a:spcAft>
+                <a:spcPts val="800"/>
+              </a:spcAft>
+              <a:buSzPct val="100000"/>
+              <a:buChar char="•"/>
+            </a:pPr>
+            <a:r>
+              <a:rPr lang="en-US" sz="1500" dirty="0">
+                <a:solidFill>
+                  <a:srgbClr val="1C1917"/>
+                </a:solidFill>
+                <a:latin typeface="Arial" pitchFamily="34" charset="0"/>
+                <a:ea typeface="Arial" pitchFamily="34" charset="-122"/>
+                <a:cs typeface="Arial" pitchFamily="34" charset="-120"/>
+              </a:rPr>
+              <a:t>Capital markets: option pricing, Greeks, volatility surfaces, XVA/CVA engines.</a:t>
+            </a:r>
+            <a:endParaRPr lang="en-US" sz="1500" dirty="0"/>
+          </a:p>
+          <a:p>
+            <a:pPr marL="152400" indent="-152400">
+              <a:spcAft>
+                <a:spcPts val="800"/>
+              </a:spcAft>
+              <a:buSzPct val="100000"/>
+              <a:buChar char="•"/>
+            </a:pPr>
+            <a:r>
+              <a:rPr lang="en-US" sz="1500" dirty="0">
+                <a:solidFill>
+                  <a:srgbClr val="1C1917"/>
+                </a:solidFill>
+                <a:latin typeface="Arial" pitchFamily="34" charset="0"/>
+                <a:ea typeface="Arial" pitchFamily="34" charset="-122"/>
+                <a:cs typeface="Arial" pitchFamily="34" charset="-120"/>
+              </a:rPr>
+              <a:t>Credit risk: PD/LGD/EAD for regulatory capital, IFRS 9 impairment, Merton models.</a:t>
+            </a:r>
+            <a:endParaRPr lang="en-US" sz="1500" dirty="0"/>
+          </a:p>
+          <a:p>
+            <a:pPr marL="152400" indent="-152400">
+              <a:spcAft>
+                <a:spcPts val="800"/>
+              </a:spcAft>
+              <a:buSzPct val="100000"/>
+              <a:buChar char="•"/>
+            </a:pPr>
+            <a:r>
+              <a:rPr lang="en-US" sz="1500" dirty="0">
+                <a:solidFill>
+                  <a:srgbClr val="1C1917"/>
+                </a:solidFill>
+                <a:latin typeface="Arial" pitchFamily="34" charset="0"/>
+                <a:ea typeface="Arial" pitchFamily="34" charset="-122"/>
+                <a:cs typeface="Arial" pitchFamily="34" charset="-120"/>
+              </a:rPr>
+              <a:t>Corporate finance: DCF valuation, WACC, scenario planning, treasury management.</a:t>
+            </a:r>
+            <a:endParaRPr lang="en-US" sz="1500" dirty="0"/>
+          </a:p>
+          <a:p>
+            <a:pPr marL="152400" indent="-152400">
+              <a:spcAft>
+                <a:spcPts val="800"/>
+              </a:spcAft>
+              <a:buSzPct val="100000"/>
+              <a:buChar char="•"/>
+            </a:pPr>
+            <a:r>
+              <a:rPr lang="en-US" sz="1500" dirty="0">
+                <a:solidFill>
+                  <a:srgbClr val="1C1917"/>
+                </a:solidFill>
+                <a:latin typeface="Arial" pitchFamily="34" charset="0"/>
+                <a:ea typeface="Arial" pitchFamily="34" charset="-122"/>
+                <a:cs typeface="Arial" pitchFamily="34" charset="-120"/>
+              </a:rPr>
+              <a:t>Portfolio optimisation, real options, and actuarial dynamic financial analysis.</a:t>
+            </a:r>
+            <a:endParaRPr lang="en-US" sz="1500" dirty="0"/>
+          </a:p>
+          <a:p>
+            <a:pPr marL="152400" indent="-152400">
+              <a:spcAft>
+                <a:spcPts val="800"/>
+              </a:spcAft>
+              <a:buSzPct val="100000"/>
+              <a:buChar char="•"/>
+            </a:pPr>
+            <a:r>
+              <a:rPr lang="en-US" sz="1500" dirty="0">
+                <a:solidFill>
+                  <a:srgbClr val="1C1917"/>
+                </a:solidFill>
+                <a:latin typeface="Arial" pitchFamily="34" charset="0"/>
+                <a:ea typeface="Arial" pitchFamily="34" charset="-122"/>
+                <a:cs typeface="Arial" pitchFamily="34" charset="-120"/>
+              </a:rPr>
+              <a:t>Most models—regardless of complexity—ultimately live in Microsoft Excel.</a:t>
+            </a:r>
+            <a:endParaRPr lang="en-US" sz="1500" dirty="0"/>
+          </a:p>
+        </p:txBody>
+      </p:sp>
+      <p:sp>
+        <p:nvSpPr>
+          <p:cNvPr id="7" name="Shape 5"/>
+          <p:cNvSpPr/>
+          <p:nvPr/>
+        </p:nvSpPr>
+        <p:spPr>
+          <a:xfrm>
+            <a:off x="731520" y="4041648"/>
+            <a:ext cx="7680960" cy="566928"/>
+          </a:xfrm>
+          <a:prstGeom prst="roundRect">
+            <a:avLst>
+              <a:gd name="adj" fmla="val 12903"/>
+            </a:avLst>
+          </a:prstGeom>
+          <a:solidFill>
+            <a:srgbClr val="B45309">
+              <a:alpha val="12000"/>
+            </a:srgbClr>
+          </a:solidFill>
+          <a:ln w="12700">
+            <a:solidFill>
+              <a:srgbClr val="B45309"/>
+            </a:solidFill>
+            <a:prstDash val="solid"/>
+          </a:ln>
+        </p:spPr>
+      </p:sp>
+      <p:sp>
+        <p:nvSpPr>
+          <p:cNvPr id="8" name="Text 6"/>
+          <p:cNvSpPr/>
+          <p:nvPr/>
+        </p:nvSpPr>
+        <p:spPr>
+          <a:xfrm>
+            <a:off x="868680" y="4087368"/>
+            <a:ext cx="7406640" cy="475488"/>
+          </a:xfrm>
+          <a:prstGeom prst="rect">
+            <a:avLst/>
+          </a:prstGeom>
+          <a:noFill/>
+          <a:ln/>
+        </p:spPr>
+        <p:txBody>
+          <a:bodyPr wrap="square" rtlCol="0" anchor="ctr"/>
+          <a:lstStyle/>
+          <a:p>
+            <a:pPr indent="0" marL="0">
+              <a:buNone/>
+            </a:pPr>
+            <a:r>
+              <a:rPr lang="en-US" sz="1100" b="1" dirty="0">
+                <a:solidFill>
+                  <a:srgbClr val="B45309"/>
+                </a:solidFill>
+                <a:latin typeface="Arial" pitchFamily="34" charset="0"/>
+                <a:ea typeface="Arial" pitchFamily="34" charset="-122"/>
+                <a:cs typeface="Arial" pitchFamily="34" charset="-120"/>
+              </a:rPr>
+              <a:t>Takeaway  </a:t>
+            </a:r>
+            <a:pPr indent="0" marL="0">
+              <a:buNone/>
+            </a:pPr>
+            <a:r>
+              <a:rPr lang="en-US" sz="1150" dirty="0">
+                <a:solidFill>
+                  <a:srgbClr val="1C1917"/>
+                </a:solidFill>
+                <a:latin typeface="Arial" pitchFamily="34" charset="0"/>
+                <a:ea typeface="Arial" pitchFamily="34" charset="-122"/>
+                <a:cs typeface="Arial" pitchFamily="34" charset="-120"/>
+              </a:rPr>
+              <a:t>Model audit applies across every finance domain because quantitative models drive decisions in capital markets, credit, and corporate finance alike.</a:t>
+            </a:r>
+            <a:endParaRPr lang="en-US" sz="1100" dirty="0"/>
           </a:p>
         </p:txBody>
       </p:sp>
@@ -2612,9 +4188,16 @@
 </p:sld>
 </file>
 
-<file path=ppt/slides/slide3.xml><?xml version="1.0" encoding="utf-8"?>
+<file path=ppt/slides/slide14.xml><?xml version="1.0" encoding="utf-8"?>
 <p:sld xmlns:a="http://schemas.openxmlformats.org/drawingml/2006/main" xmlns:r="http://schemas.openxmlformats.org/officeDocument/2006/relationships" xmlns:p="http://schemas.openxmlformats.org/presentationml/2006/main">
-  <p:cSld name="Slide 3">
+  <p:cSld name="Slide 14">
+    <p:bg>
+      <p:bgPr>
+        <a:solidFill>
+          <a:srgbClr val="FFFFFF"/>
+        </a:solidFill>
+      </p:bgPr>
+    </p:bg>
     <p:spTree>
       <p:nvGrpSpPr>
         <p:cNvPr id="1" name=""/>
@@ -2631,14 +4214,34 @@
       </p:grpSpPr>
       <p:sp>
         <p:nvSpPr>
-          <p:cNvPr id="2" name="Text 0"/>
-          <p:cNvSpPr/>
-          <p:nvPr/>
-        </p:nvSpPr>
-        <p:spPr>
-          <a:xfrm>
-            <a:off x="457200" y="320040"/>
-            <a:ext cx="8229600" cy="731520"/>
+          <p:cNvPr id="2" name="Shape 0"/>
+          <p:cNvSpPr/>
+          <p:nvPr/>
+        </p:nvSpPr>
+        <p:spPr>
+          <a:xfrm>
+            <a:off x="411480" y="402336"/>
+            <a:ext cx="82296" cy="329184"/>
+          </a:xfrm>
+          <a:prstGeom prst="rect">
+            <a:avLst/>
+          </a:prstGeom>
+          <a:solidFill>
+            <a:srgbClr val="B45309"/>
+          </a:solidFill>
+          <a:ln/>
+        </p:spPr>
+      </p:sp>
+      <p:sp>
+        <p:nvSpPr>
+          <p:cNvPr id="3" name="Text 1"/>
+          <p:cNvSpPr/>
+          <p:nvPr/>
+        </p:nvSpPr>
+        <p:spPr>
+          <a:xfrm>
+            <a:off x="566928" y="292608"/>
+            <a:ext cx="8138160" cy="548640"/>
           </a:xfrm>
           <a:prstGeom prst="rect">
             <a:avLst/>
@@ -2654,27 +4257,92 @@
               <a:buNone/>
             </a:pPr>
             <a:r>
-              <a:rPr lang="en-US" sz="2400" b="1" dirty="0">
-                <a:solidFill>
-                  <a:srgbClr val="B45309"/>
-                </a:solidFill>
-              </a:rPr>
-              <a:t>Session Overview</a:t>
-            </a:r>
-            <a:endParaRPr lang="en-US" sz="2400" dirty="0"/>
-          </a:p>
-        </p:txBody>
-      </p:sp>
-      <p:sp>
-        <p:nvSpPr>
-          <p:cNvPr id="3" name="Text 1"/>
-          <p:cNvSpPr/>
-          <p:nvPr/>
-        </p:nvSpPr>
-        <p:spPr>
-          <a:xfrm>
-            <a:off x="640080" y="1188720"/>
-            <a:ext cx="7863840" cy="3291840"/>
+              <a:rPr lang="en-US" sz="2100" b="1" dirty="0">
+                <a:solidFill>
+                  <a:srgbClr val="1C1917"/>
+                </a:solidFill>
+                <a:latin typeface="Arial" pitchFamily="34" charset="0"/>
+                <a:ea typeface="Arial" pitchFamily="34" charset="-122"/>
+                <a:cs typeface="Arial" pitchFamily="34" charset="-120"/>
+              </a:rPr>
+              <a:t>Common Modelling Mistakes</a:t>
+            </a:r>
+            <a:endParaRPr lang="en-US" sz="2100" dirty="0"/>
+          </a:p>
+        </p:txBody>
+      </p:sp>
+      <p:sp>
+        <p:nvSpPr>
+          <p:cNvPr id="4" name="Shape 2"/>
+          <p:cNvSpPr/>
+          <p:nvPr/>
+        </p:nvSpPr>
+        <p:spPr>
+          <a:xfrm>
+            <a:off x="411480" y="960120"/>
+            <a:ext cx="8321040" cy="0"/>
+          </a:xfrm>
+          <a:prstGeom prst="line">
+            <a:avLst/>
+          </a:prstGeom>
+          <a:noFill/>
+          <a:ln w="12700">
+            <a:solidFill>
+              <a:srgbClr val="E7E5E4"/>
+            </a:solidFill>
+            <a:prstDash val="solid"/>
+          </a:ln>
+        </p:spPr>
+      </p:sp>
+      <p:sp>
+        <p:nvSpPr>
+          <p:cNvPr id="5" name="Text 3"/>
+          <p:cNvSpPr/>
+          <p:nvPr/>
+        </p:nvSpPr>
+        <p:spPr>
+          <a:xfrm>
+            <a:off x="411480" y="4864608"/>
+            <a:ext cx="8321040" cy="237744"/>
+          </a:xfrm>
+          <a:prstGeom prst="rect">
+            <a:avLst/>
+          </a:prstGeom>
+          <a:noFill/>
+          <a:ln/>
+        </p:spPr>
+        <p:txBody>
+          <a:bodyPr wrap="square" rtlCol="0" anchor="ctr"/>
+          <a:lstStyle/>
+          <a:p>
+            <a:pPr indent="0" marL="0">
+              <a:buNone/>
+            </a:pPr>
+            <a:r>
+              <a:rPr lang="en-US" sz="750" dirty="0">
+                <a:solidFill>
+                  <a:srgbClr val="AAAAAA"/>
+                </a:solidFill>
+                <a:latin typeface="Arial" pitchFamily="34" charset="0"/>
+                <a:ea typeface="Arial" pitchFamily="34" charset="-122"/>
+                <a:cs typeface="Arial" pitchFamily="34" charset="-120"/>
+              </a:rPr>
+              <a:t>Lesson Forge Pro (owner) — This content is educational material only and does not constitute financial, investment, or trading advice.</a:t>
+            </a:r>
+            <a:endParaRPr lang="en-US" sz="750" dirty="0"/>
+          </a:p>
+        </p:txBody>
+      </p:sp>
+      <p:sp>
+        <p:nvSpPr>
+          <p:cNvPr id="6" name="Text 4"/>
+          <p:cNvSpPr/>
+          <p:nvPr/>
+        </p:nvSpPr>
+        <p:spPr>
+          <a:xfrm>
+            <a:off x="731520" y="1188720"/>
+            <a:ext cx="7680960" cy="2743200"/>
           </a:xfrm>
           <a:prstGeom prst="rect">
             <a:avLst/>
@@ -2686,32 +4354,151 @@
           <a:bodyPr wrap="square" rtlCol="0" anchor="t"/>
           <a:lstStyle/>
           <a:p>
-            <a:pPr marL="342900" indent="-342900">
+            <a:pPr marL="152400" indent="-152400">
+              <a:spcAft>
+                <a:spcPts val="800"/>
+              </a:spcAft>
               <a:buSzPct val="100000"/>
               <a:buChar char="•"/>
             </a:pPr>
             <a:r>
-              <a:rPr lang="en-US" sz="1600" dirty="0">
-                <a:solidFill>
-                  <a:srgbClr val="333333"/>
-                </a:solidFill>
-              </a:rPr>
-              <a:t>In this 90-minute session, we will explore the importance of model audits and risk management in financial modeling. By the end of this session, you will be abl</a:t>
-            </a:r>
-            <a:endParaRPr lang="en-US" sz="1600" dirty="0"/>
-          </a:p>
-        </p:txBody>
-      </p:sp>
-      <p:sp>
-        <p:nvSpPr>
-          <p:cNvPr id="4" name="Text 2"/>
-          <p:cNvSpPr/>
-          <p:nvPr/>
-        </p:nvSpPr>
-        <p:spPr>
-          <a:xfrm>
-            <a:off x="457200" y="4709160"/>
-            <a:ext cx="8229600" cy="320040"/>
+              <a:rPr lang="en-US" sz="1500" dirty="0">
+                <a:solidFill>
+                  <a:srgbClr val="1C1917"/>
+                </a:solidFill>
+                <a:latin typeface="Arial" pitchFamily="34" charset="0"/>
+                <a:ea typeface="Arial" pitchFamily="34" charset="-122"/>
+                <a:cs typeface="Arial" pitchFamily="34" charset="-120"/>
+              </a:rPr>
+              <a:t>Hard-coded values buried in formulas instead of referenced input cells.</a:t>
+            </a:r>
+            <a:endParaRPr lang="en-US" sz="1500" dirty="0"/>
+          </a:p>
+          <a:p>
+            <a:pPr marL="152400" indent="-152400">
+              <a:spcAft>
+                <a:spcPts val="800"/>
+              </a:spcAft>
+              <a:buSzPct val="100000"/>
+              <a:buChar char="•"/>
+            </a:pPr>
+            <a:r>
+              <a:rPr lang="en-US" sz="1500" dirty="0">
+                <a:solidFill>
+                  <a:srgbClr val="1C1917"/>
+                </a:solidFill>
+                <a:latin typeface="Arial" pitchFamily="34" charset="0"/>
+                <a:ea typeface="Arial" pitchFamily="34" charset="-122"/>
+                <a:cs typeface="Arial" pitchFamily="34" charset="-120"/>
+              </a:rPr>
+              <a:t>Unresolved circular references, especially dangerous in XVA or working capital models.</a:t>
+            </a:r>
+            <a:endParaRPr lang="en-US" sz="1500" dirty="0"/>
+          </a:p>
+          <a:p>
+            <a:pPr marL="152400" indent="-152400">
+              <a:spcAft>
+                <a:spcPts val="800"/>
+              </a:spcAft>
+              <a:buSzPct val="100000"/>
+              <a:buChar char="•"/>
+            </a:pPr>
+            <a:r>
+              <a:rPr lang="en-US" sz="1500" dirty="0">
+                <a:solidFill>
+                  <a:srgbClr val="1C1917"/>
+                </a:solidFill>
+                <a:latin typeface="Arial" pitchFamily="34" charset="0"/>
+                <a:ea typeface="Arial" pitchFamily="34" charset="-122"/>
+                <a:cs typeface="Arial" pitchFamily="34" charset="-120"/>
+              </a:rPr>
+              <a:t>Mixing annual and quarterly compounding, or conflicting day-count conventions.</a:t>
+            </a:r>
+            <a:endParaRPr lang="en-US" sz="1500" dirty="0"/>
+          </a:p>
+          <a:p>
+            <a:pPr marL="152400" indent="-152400">
+              <a:spcAft>
+                <a:spcPts val="800"/>
+              </a:spcAft>
+              <a:buSzPct val="100000"/>
+              <a:buChar char="•"/>
+            </a:pPr>
+            <a:r>
+              <a:rPr lang="en-US" sz="1500" dirty="0">
+                <a:solidFill>
+                  <a:srgbClr val="1C1917"/>
+                </a:solidFill>
+                <a:latin typeface="Arial" pitchFamily="34" charset="0"/>
+                <a:ea typeface="Arial" pitchFamily="34" charset="-122"/>
+                <a:cs typeface="Arial" pitchFamily="34" charset="-120"/>
+              </a:rPr>
+              <a:t>Accepting base-case outputs without stress-testing adverse scenarios.</a:t>
+            </a:r>
+            <a:endParaRPr lang="en-US" sz="1500" dirty="0"/>
+          </a:p>
+          <a:p>
+            <a:pPr marL="152400" indent="-152400">
+              <a:spcAft>
+                <a:spcPts val="800"/>
+              </a:spcAft>
+              <a:buSzPct val="100000"/>
+              <a:buChar char="•"/>
+            </a:pPr>
+            <a:r>
+              <a:rPr lang="en-US" sz="1500" dirty="0">
+                <a:solidFill>
+                  <a:srgbClr val="1C1917"/>
+                </a:solidFill>
+                <a:latin typeface="Arial" pitchFamily="34" charset="0"/>
+                <a:ea typeface="Arial" pitchFamily="34" charset="-122"/>
+                <a:cs typeface="Arial" pitchFamily="34" charset="-120"/>
+              </a:rPr>
+              <a:t>Inconsistent sign conventions for cash inflows and outflows across linked sheets.</a:t>
+            </a:r>
+            <a:endParaRPr lang="en-US" sz="1500" dirty="0"/>
+          </a:p>
+        </p:txBody>
+      </p:sp>
+      <p:sp>
+        <p:nvSpPr>
+          <p:cNvPr id="7" name="Shape 5"/>
+          <p:cNvSpPr/>
+          <p:nvPr/>
+        </p:nvSpPr>
+        <p:spPr>
+          <a:xfrm>
+            <a:off x="731520" y="4041648"/>
+            <a:ext cx="7680960" cy="566928"/>
+          </a:xfrm>
+          <a:prstGeom prst="roundRect">
+            <a:avLst>
+              <a:gd name="adj" fmla="val 12903"/>
+            </a:avLst>
+          </a:prstGeom>
+          <a:solidFill>
+            <a:srgbClr val="B45309">
+              <a:alpha val="12000"/>
+            </a:srgbClr>
+          </a:solidFill>
+          <a:ln w="12700">
+            <a:solidFill>
+              <a:srgbClr val="B45309"/>
+            </a:solidFill>
+            <a:prstDash val="solid"/>
+          </a:ln>
+        </p:spPr>
+      </p:sp>
+      <p:sp>
+        <p:nvSpPr>
+          <p:cNvPr id="8" name="Text 6"/>
+          <p:cNvSpPr/>
+          <p:nvPr/>
+        </p:nvSpPr>
+        <p:spPr>
+          <a:xfrm>
+            <a:off x="868680" y="4087368"/>
+            <a:ext cx="7406640" cy="475488"/>
           </a:xfrm>
           <a:prstGeom prst="rect">
             <a:avLst/>
@@ -2727,14 +4514,31 @@
               <a:buNone/>
             </a:pPr>
             <a:r>
-              <a:rPr lang="en-US" sz="800" dirty="0">
-                <a:solidFill>
-                  <a:srgbClr val="AAAAAA"/>
-                </a:solidFill>
-              </a:rPr>
-              <a:t>Lesson Forge Pro (owner) — This content is educational material only and does not constitute financial, investment, or trading advice.</a:t>
-            </a:r>
-            <a:endParaRPr lang="en-US" sz="800" dirty="0"/>
+              <a:rPr lang="en-US" sz="1100" b="1" dirty="0">
+                <a:solidFill>
+                  <a:srgbClr val="B45309"/>
+                </a:solidFill>
+                <a:latin typeface="Arial" pitchFamily="34" charset="0"/>
+                <a:ea typeface="Arial" pitchFamily="34" charset="-122"/>
+                <a:cs typeface="Arial" pitchFamily="34" charset="-120"/>
+              </a:rPr>
+              <a:t>Takeaway  </a:t>
+            </a:r>
+            <a:pPr indent="0" marL="0">
+              <a:buNone/>
+            </a:pPr>
+            <a:r>
+              <a:rPr lang="en-US" sz="1150" dirty="0">
+                <a:solidFill>
+                  <a:srgbClr val="1C1917"/>
+                </a:solidFill>
+                <a:latin typeface="Arial" pitchFamily="34" charset="0"/>
+                <a:ea typeface="Arial" pitchFamily="34" charset="-122"/>
+                <a:cs typeface="Arial" pitchFamily="34" charset="-120"/>
+              </a:rPr>
+              <a:t>The most damaging model errors are structural habits—hard-coding, mixed conventions, and skipped stress tests—not one-off arithmetic slips.</a:t>
+            </a:r>
+            <a:endParaRPr lang="en-US" sz="1100" dirty="0"/>
           </a:p>
         </p:txBody>
       </p:sp>
@@ -2746,9 +4550,16 @@
 </p:sld>
 </file>
 
-<file path=ppt/slides/slide4.xml><?xml version="1.0" encoding="utf-8"?>
+<file path=ppt/slides/slide15.xml><?xml version="1.0" encoding="utf-8"?>
 <p:sld xmlns:a="http://schemas.openxmlformats.org/drawingml/2006/main" xmlns:r="http://schemas.openxmlformats.org/officeDocument/2006/relationships" xmlns:p="http://schemas.openxmlformats.org/presentationml/2006/main">
-  <p:cSld name="Slide 4">
+  <p:cSld name="Slide 15">
+    <p:bg>
+      <p:bgPr>
+        <a:solidFill>
+          <a:srgbClr val="FFFFFF"/>
+        </a:solidFill>
+      </p:bgPr>
+    </p:bg>
     <p:spTree>
       <p:nvGrpSpPr>
         <p:cNvPr id="1" name=""/>
@@ -2765,14 +4576,34 @@
       </p:grpSpPr>
       <p:sp>
         <p:nvSpPr>
-          <p:cNvPr id="2" name="Text 0"/>
-          <p:cNvSpPr/>
-          <p:nvPr/>
-        </p:nvSpPr>
-        <p:spPr>
-          <a:xfrm>
-            <a:off x="457200" y="320040"/>
-            <a:ext cx="8229600" cy="731520"/>
+          <p:cNvPr id="2" name="Shape 0"/>
+          <p:cNvSpPr/>
+          <p:nvPr/>
+        </p:nvSpPr>
+        <p:spPr>
+          <a:xfrm>
+            <a:off x="411480" y="384048"/>
+            <a:ext cx="82296" cy="310896"/>
+          </a:xfrm>
+          <a:prstGeom prst="rect">
+            <a:avLst/>
+          </a:prstGeom>
+          <a:solidFill>
+            <a:srgbClr val="B45309"/>
+          </a:solidFill>
+          <a:ln/>
+        </p:spPr>
+      </p:sp>
+      <p:sp>
+        <p:nvSpPr>
+          <p:cNvPr id="3" name="Text 1"/>
+          <p:cNvSpPr/>
+          <p:nvPr/>
+        </p:nvSpPr>
+        <p:spPr>
+          <a:xfrm>
+            <a:off x="566928" y="292608"/>
+            <a:ext cx="8138160" cy="502920"/>
           </a:xfrm>
           <a:prstGeom prst="rect">
             <a:avLst/>
@@ -2788,156 +4619,17 @@
               <a:buNone/>
             </a:pPr>
             <a:r>
-              <a:rPr lang="en-US" sz="2400" b="1" dirty="0">
-                <a:solidFill>
-                  <a:srgbClr val="B45309"/>
-                </a:solidFill>
-              </a:rPr>
-              <a:t>Timed Agenda</a:t>
-            </a:r>
-            <a:endParaRPr lang="en-US" sz="2400" dirty="0"/>
-          </a:p>
-        </p:txBody>
-      </p:sp>
-      <p:sp>
-        <p:nvSpPr>
-          <p:cNvPr id="3" name="Text 1"/>
-          <p:cNvSpPr/>
-          <p:nvPr/>
-        </p:nvSpPr>
-        <p:spPr>
-          <a:xfrm>
-            <a:off x="640080" y="1188720"/>
-            <a:ext cx="7863840" cy="3291840"/>
-          </a:xfrm>
-          <a:prstGeom prst="rect">
-            <a:avLst/>
-          </a:prstGeom>
-          <a:noFill/>
-          <a:ln/>
-        </p:spPr>
-        <p:txBody>
-          <a:bodyPr wrap="square" rtlCol="0" anchor="t"/>
-          <a:lstStyle/>
-          <a:p>
-            <a:pPr marL="342900" indent="-342900">
-              <a:buSzPct val="100000"/>
-              <a:buChar char="•"/>
-            </a:pPr>
-            <a:r>
-              <a:rPr lang="en-US" sz="1600" dirty="0">
-                <a:solidFill>
-                  <a:srgbClr val="333333"/>
-                </a:solidFill>
-              </a:rPr>
-              <a:t>| Time | Topic |</a:t>
-            </a:r>
-            <a:endParaRPr lang="en-US" sz="1600" dirty="0"/>
-          </a:p>
-          <a:p>
-            <a:pPr marL="342900" indent="-342900">
-              <a:buSzPct val="100000"/>
-              <a:buChar char="•"/>
-            </a:pPr>
-            <a:r>
-              <a:rPr lang="en-US" sz="1600" dirty="0">
-                <a:solidFill>
-                  <a:srgbClr val="333333"/>
-                </a:solidFill>
-              </a:rPr>
-              <a:t>| --- | --- |</a:t>
-            </a:r>
-            <a:endParaRPr lang="en-US" sz="1600" dirty="0"/>
-          </a:p>
-          <a:p>
-            <a:pPr marL="342900" indent="-342900">
-              <a:buSzPct val="100000"/>
-              <a:buChar char="•"/>
-            </a:pPr>
-            <a:r>
-              <a:rPr lang="en-US" sz="1600" dirty="0">
-                <a:solidFill>
-                  <a:srgbClr val="333333"/>
-                </a:solidFill>
-              </a:rPr>
-              <a:t>| 0:00 - 0:05 | Introduction and Objectives |</a:t>
-            </a:r>
-            <a:endParaRPr lang="en-US" sz="1600" dirty="0"/>
-          </a:p>
-          <a:p>
-            <a:pPr marL="342900" indent="-342900">
-              <a:buSzPct val="100000"/>
-              <a:buChar char="•"/>
-            </a:pPr>
-            <a:r>
-              <a:rPr lang="en-US" sz="1600" dirty="0">
-                <a:solidFill>
-                  <a:srgbClr val="333333"/>
-                </a:solidFill>
-              </a:rPr>
-              <a:t>| 0:05 - 0:20 | Importance of Model Audits and Risk Management |</a:t>
-            </a:r>
-            <a:endParaRPr lang="en-US" sz="1600" dirty="0"/>
-          </a:p>
-          <a:p>
-            <a:pPr marL="342900" indent="-342900">
-              <a:buSzPct val="100000"/>
-              <a:buChar char="•"/>
-            </a:pPr>
-            <a:r>
-              <a:rPr lang="en-US" sz="1600" dirty="0">
-                <a:solidFill>
-                  <a:srgbClr val="333333"/>
-                </a:solidFill>
-              </a:rPr>
-              <a:t>| 0:20 - 0:35 | Conducting Model Audits |</a:t>
-            </a:r>
-            <a:endParaRPr lang="en-US" sz="1600" dirty="0"/>
-          </a:p>
-          <a:p>
-            <a:pPr marL="342900" indent="-342900">
-              <a:buSzPct val="100000"/>
-              <a:buChar char="•"/>
-            </a:pPr>
-            <a:r>
-              <a:rPr lang="en-US" sz="1600" dirty="0">
-                <a:solidFill>
-                  <a:srgbClr val="333333"/>
-                </a:solidFill>
-              </a:rPr>
-              <a:t>| 0:35 - 0:45 | Energizer/Break |</a:t>
-            </a:r>
-            <a:endParaRPr lang="en-US" sz="1600" dirty="0"/>
-          </a:p>
-          <a:p>
-            <a:pPr marL="342900" indent="-342900">
-              <a:buSzPct val="100000"/>
-              <a:buChar char="•"/>
-            </a:pPr>
-            <a:r>
-              <a:rPr lang="en-US" sz="1600" dirty="0">
-                <a:solidFill>
-                  <a:srgbClr val="333333"/>
-                </a:solidFill>
-              </a:rPr>
-              <a:t>| 0:45 - 1:05 | Developing Risk Management Strategies |</a:t>
-            </a:r>
-            <a:endParaRPr lang="en-US" sz="1600" dirty="0"/>
-          </a:p>
-          <a:p>
-            <a:pPr marL="342900" indent="-342900">
-              <a:buSzPct val="100000"/>
-              <a:buChar char="•"/>
-            </a:pPr>
-            <a:r>
-              <a:rPr lang="en-US" sz="1600" dirty="0">
-                <a:solidFill>
-                  <a:srgbClr val="333333"/>
-                </a:solidFill>
-              </a:rPr>
-              <a:t>| 1:05 - 1:20 | Creating Model Documentation |</a:t>
-            </a:r>
-            <a:endParaRPr lang="en-US" sz="1600" dirty="0"/>
+              <a:rPr lang="en-US" sz="2000" b="1" dirty="0">
+                <a:solidFill>
+                  <a:srgbClr val="1C1917"/>
+                </a:solidFill>
+                <a:latin typeface="Arial" pitchFamily="34" charset="0"/>
+                <a:ea typeface="Arial" pitchFamily="34" charset="-122"/>
+                <a:cs typeface="Arial" pitchFamily="34" charset="-120"/>
+              </a:rPr>
+              <a:t>WACC Audit Error Impact</a:t>
+            </a:r>
+            <a:endParaRPr lang="en-US" sz="2000" dirty="0"/>
           </a:p>
         </p:txBody>
       </p:sp>
@@ -2949,8 +4641,8 @@
         </p:nvSpPr>
         <p:spPr>
           <a:xfrm>
-            <a:off x="457200" y="4709160"/>
-            <a:ext cx="8229600" cy="320040"/>
+            <a:off x="566928" y="4681728"/>
+            <a:ext cx="8138160" cy="320040"/>
           </a:xfrm>
           <a:prstGeom prst="rect">
             <a:avLst/>
@@ -2966,14 +4658,373 @@
               <a:buNone/>
             </a:pPr>
             <a:r>
-              <a:rPr lang="en-US" sz="800" dirty="0">
+              <a:rPr lang="en-US" sz="1000" i="1" dirty="0">
+                <a:solidFill>
+                  <a:srgbClr val="78716C"/>
+                </a:solidFill>
+                <a:latin typeface="Arial" pitchFamily="34" charset="0"/>
+                <a:ea typeface="Arial" pitchFamily="34" charset="-122"/>
+                <a:cs typeface="Arial" pitchFamily="34" charset="-120"/>
+              </a:rPr>
+              <a:t>Input sourcing error (beta), not formula error, caused £1.4M NPV difference</a:t>
+            </a:r>
+            <a:endParaRPr lang="en-US" sz="1000" dirty="0"/>
+          </a:p>
+        </p:txBody>
+      </p:sp>
+      <p:sp>
+        <p:nvSpPr>
+          <p:cNvPr id="5" name="Text 3"/>
+          <p:cNvSpPr/>
+          <p:nvPr/>
+        </p:nvSpPr>
+        <p:spPr>
+          <a:xfrm>
+            <a:off x="411480" y="4919472"/>
+            <a:ext cx="8321040" cy="219456"/>
+          </a:xfrm>
+          <a:prstGeom prst="rect">
+            <a:avLst/>
+          </a:prstGeom>
+          <a:noFill/>
+          <a:ln/>
+        </p:spPr>
+        <p:txBody>
+          <a:bodyPr wrap="square" rtlCol="0" anchor="ctr"/>
+          <a:lstStyle/>
+          <a:p>
+            <a:pPr indent="0" marL="0">
+              <a:buNone/>
+            </a:pPr>
+            <a:r>
+              <a:rPr lang="en-US" sz="750" dirty="0">
                 <a:solidFill>
                   <a:srgbClr val="AAAAAA"/>
                 </a:solidFill>
+                <a:latin typeface="Arial" pitchFamily="34" charset="0"/>
+                <a:ea typeface="Arial" pitchFamily="34" charset="-122"/>
+                <a:cs typeface="Arial" pitchFamily="34" charset="-120"/>
               </a:rPr>
               <a:t>Lesson Forge Pro (owner) — This content is educational material only and does not constitute financial, investment, or trading advice.</a:t>
             </a:r>
-            <a:endParaRPr lang="en-US" sz="800" dirty="0"/>
+            <a:endParaRPr lang="en-US" sz="750" dirty="0"/>
+          </a:p>
+        </p:txBody>
+      </p:sp>
+      <p:sp>
+        <p:nvSpPr>
+          <p:cNvPr id="6" name="Shape 4"/>
+          <p:cNvSpPr/>
+          <p:nvPr/>
+        </p:nvSpPr>
+        <p:spPr>
+          <a:xfrm>
+            <a:off x="685800" y="4206240"/>
+            <a:ext cx="7772400" cy="0"/>
+          </a:xfrm>
+          <a:prstGeom prst="line">
+            <a:avLst/>
+          </a:prstGeom>
+          <a:noFill/>
+          <a:ln w="12700">
+            <a:solidFill>
+              <a:srgbClr val="1C1917"/>
+            </a:solidFill>
+            <a:prstDash val="solid"/>
+          </a:ln>
+        </p:spPr>
+      </p:sp>
+      <p:sp>
+        <p:nvSpPr>
+          <p:cNvPr id="7" name="Shape 5"/>
+          <p:cNvSpPr/>
+          <p:nvPr/>
+        </p:nvSpPr>
+        <p:spPr>
+          <a:xfrm>
+            <a:off x="1684020" y="1364044"/>
+            <a:ext cx="777240" cy="2842196"/>
+          </a:xfrm>
+          <a:prstGeom prst="rect">
+            <a:avLst/>
+          </a:prstGeom>
+          <a:solidFill>
+            <a:srgbClr val="B45309"/>
+          </a:solidFill>
+          <a:ln/>
+        </p:spPr>
+      </p:sp>
+      <p:sp>
+        <p:nvSpPr>
+          <p:cNvPr id="8" name="Text 6"/>
+          <p:cNvSpPr/>
+          <p:nvPr/>
+        </p:nvSpPr>
+        <p:spPr>
+          <a:xfrm>
+            <a:off x="1501140" y="1089724"/>
+            <a:ext cx="1143000" cy="237744"/>
+          </a:xfrm>
+          <a:prstGeom prst="rect">
+            <a:avLst/>
+          </a:prstGeom>
+          <a:noFill/>
+          <a:ln/>
+        </p:spPr>
+        <p:txBody>
+          <a:bodyPr wrap="square" rtlCol="0" anchor="ctr"/>
+          <a:lstStyle/>
+          <a:p>
+            <a:pPr algn="ctr" indent="0" marL="0">
+              <a:buNone/>
+            </a:pPr>
+            <a:r>
+              <a:rPr lang="en-US" sz="950" b="1" dirty="0">
+                <a:solidFill>
+                  <a:srgbClr val="1C1917"/>
+                </a:solidFill>
+                <a:latin typeface="Arial" pitchFamily="34" charset="0"/>
+                <a:ea typeface="Arial" pitchFamily="34" charset="-122"/>
+                <a:cs typeface="Arial" pitchFamily="34" charset="-120"/>
+              </a:rPr>
+              <a:t>5.76</a:t>
+            </a:r>
+            <a:endParaRPr lang="en-US" sz="950" dirty="0"/>
+          </a:p>
+        </p:txBody>
+      </p:sp>
+      <p:sp>
+        <p:nvSpPr>
+          <p:cNvPr id="9" name="Text 7"/>
+          <p:cNvSpPr/>
+          <p:nvPr/>
+        </p:nvSpPr>
+        <p:spPr>
+          <a:xfrm>
+            <a:off x="1455420" y="4315968"/>
+            <a:ext cx="1234440" cy="502920"/>
+          </a:xfrm>
+          <a:prstGeom prst="rect">
+            <a:avLst/>
+          </a:prstGeom>
+          <a:noFill/>
+          <a:ln/>
+        </p:spPr>
+        <p:txBody>
+          <a:bodyPr wrap="square" rtlCol="0" anchor="ctr"/>
+          <a:lstStyle/>
+          <a:p>
+            <a:pPr algn="ctr" indent="0" marL="0">
+              <a:buNone/>
+            </a:pPr>
+            <a:r>
+              <a:rPr lang="en-US" sz="850" dirty="0">
+                <a:solidFill>
+                  <a:srgbClr val="78716C"/>
+                </a:solidFill>
+                <a:latin typeface="Arial" pitchFamily="34" charset="0"/>
+                <a:ea typeface="Arial" pitchFamily="34" charset="-122"/>
+                <a:cs typeface="Arial" pitchFamily="34" charset="-120"/>
+              </a:rPr>
+              <a:t>Developer WACC</a:t>
+            </a:r>
+            <a:endParaRPr lang="en-US" sz="850" dirty="0"/>
+          </a:p>
+        </p:txBody>
+      </p:sp>
+      <p:sp>
+        <p:nvSpPr>
+          <p:cNvPr id="10" name="Shape 8"/>
+          <p:cNvSpPr/>
+          <p:nvPr/>
+        </p:nvSpPr>
+        <p:spPr>
+          <a:xfrm>
+            <a:off x="4183380" y="1280160"/>
+            <a:ext cx="777240" cy="2926080"/>
+          </a:xfrm>
+          <a:prstGeom prst="rect">
+            <a:avLst/>
+          </a:prstGeom>
+          <a:solidFill>
+            <a:srgbClr val="B45309"/>
+          </a:solidFill>
+          <a:ln/>
+        </p:spPr>
+      </p:sp>
+      <p:sp>
+        <p:nvSpPr>
+          <p:cNvPr id="11" name="Text 9"/>
+          <p:cNvSpPr/>
+          <p:nvPr/>
+        </p:nvSpPr>
+        <p:spPr>
+          <a:xfrm>
+            <a:off x="4000500" y="1005840"/>
+            <a:ext cx="1143000" cy="237744"/>
+          </a:xfrm>
+          <a:prstGeom prst="rect">
+            <a:avLst/>
+          </a:prstGeom>
+          <a:noFill/>
+          <a:ln/>
+        </p:spPr>
+        <p:txBody>
+          <a:bodyPr wrap="square" rtlCol="0" anchor="ctr"/>
+          <a:lstStyle/>
+          <a:p>
+            <a:pPr algn="ctr" indent="0" marL="0">
+              <a:buNone/>
+            </a:pPr>
+            <a:r>
+              <a:rPr lang="en-US" sz="950" b="1" dirty="0">
+                <a:solidFill>
+                  <a:srgbClr val="1C1917"/>
+                </a:solidFill>
+                <a:latin typeface="Arial" pitchFamily="34" charset="0"/>
+                <a:ea typeface="Arial" pitchFamily="34" charset="-122"/>
+                <a:cs typeface="Arial" pitchFamily="34" charset="-120"/>
+              </a:rPr>
+              <a:t>5.93</a:t>
+            </a:r>
+            <a:endParaRPr lang="en-US" sz="950" dirty="0"/>
+          </a:p>
+        </p:txBody>
+      </p:sp>
+      <p:sp>
+        <p:nvSpPr>
+          <p:cNvPr id="12" name="Text 10"/>
+          <p:cNvSpPr/>
+          <p:nvPr/>
+        </p:nvSpPr>
+        <p:spPr>
+          <a:xfrm>
+            <a:off x="3954780" y="4315968"/>
+            <a:ext cx="1234440" cy="502920"/>
+          </a:xfrm>
+          <a:prstGeom prst="rect">
+            <a:avLst/>
+          </a:prstGeom>
+          <a:noFill/>
+          <a:ln/>
+        </p:spPr>
+        <p:txBody>
+          <a:bodyPr wrap="square" rtlCol="0" anchor="ctr"/>
+          <a:lstStyle/>
+          <a:p>
+            <a:pPr algn="ctr" indent="0" marL="0">
+              <a:buNone/>
+            </a:pPr>
+            <a:r>
+              <a:rPr lang="en-US" sz="850" dirty="0">
+                <a:solidFill>
+                  <a:srgbClr val="78716C"/>
+                </a:solidFill>
+                <a:latin typeface="Arial" pitchFamily="34" charset="0"/>
+                <a:ea typeface="Arial" pitchFamily="34" charset="-122"/>
+                <a:cs typeface="Arial" pitchFamily="34" charset="-120"/>
+              </a:rPr>
+              <a:t>Auditor WACC</a:t>
+            </a:r>
+            <a:endParaRPr lang="en-US" sz="850" dirty="0"/>
+          </a:p>
+        </p:txBody>
+      </p:sp>
+      <p:sp>
+        <p:nvSpPr>
+          <p:cNvPr id="13" name="Shape 11"/>
+          <p:cNvSpPr/>
+          <p:nvPr/>
+        </p:nvSpPr>
+        <p:spPr>
+          <a:xfrm>
+            <a:off x="6682740" y="3515429"/>
+            <a:ext cx="777240" cy="690811"/>
+          </a:xfrm>
+          <a:prstGeom prst="rect">
+            <a:avLst/>
+          </a:prstGeom>
+          <a:solidFill>
+            <a:srgbClr val="B45309"/>
+          </a:solidFill>
+          <a:ln/>
+        </p:spPr>
+      </p:sp>
+      <p:sp>
+        <p:nvSpPr>
+          <p:cNvPr id="14" name="Text 12"/>
+          <p:cNvSpPr/>
+          <p:nvPr/>
+        </p:nvSpPr>
+        <p:spPr>
+          <a:xfrm>
+            <a:off x="6499860" y="3241109"/>
+            <a:ext cx="1143000" cy="237744"/>
+          </a:xfrm>
+          <a:prstGeom prst="rect">
+            <a:avLst/>
+          </a:prstGeom>
+          <a:noFill/>
+          <a:ln/>
+        </p:spPr>
+        <p:txBody>
+          <a:bodyPr wrap="square" rtlCol="0" anchor="ctr"/>
+          <a:lstStyle/>
+          <a:p>
+            <a:pPr algn="ctr" indent="0" marL="0">
+              <a:buNone/>
+            </a:pPr>
+            <a:r>
+              <a:rPr lang="en-US" sz="950" b="1" dirty="0">
+                <a:solidFill>
+                  <a:srgbClr val="1C1917"/>
+                </a:solidFill>
+                <a:latin typeface="Arial" pitchFamily="34" charset="0"/>
+                <a:ea typeface="Arial" pitchFamily="34" charset="-122"/>
+                <a:cs typeface="Arial" pitchFamily="34" charset="-120"/>
+              </a:rPr>
+              <a:t>1.4</a:t>
+            </a:r>
+            <a:endParaRPr lang="en-US" sz="950" dirty="0"/>
+          </a:p>
+        </p:txBody>
+      </p:sp>
+      <p:sp>
+        <p:nvSpPr>
+          <p:cNvPr id="15" name="Text 13"/>
+          <p:cNvSpPr/>
+          <p:nvPr/>
+        </p:nvSpPr>
+        <p:spPr>
+          <a:xfrm>
+            <a:off x="6454140" y="4315968"/>
+            <a:ext cx="1234440" cy="502920"/>
+          </a:xfrm>
+          <a:prstGeom prst="rect">
+            <a:avLst/>
+          </a:prstGeom>
+          <a:noFill/>
+          <a:ln/>
+        </p:spPr>
+        <p:txBody>
+          <a:bodyPr wrap="square" rtlCol="0" anchor="ctr"/>
+          <a:lstStyle/>
+          <a:p>
+            <a:pPr algn="ctr" indent="0" marL="0">
+              <a:buNone/>
+            </a:pPr>
+            <a:r>
+              <a:rPr lang="en-US" sz="850" dirty="0">
+                <a:solidFill>
+                  <a:srgbClr val="78716C"/>
+                </a:solidFill>
+                <a:latin typeface="Arial" pitchFamily="34" charset="0"/>
+                <a:ea typeface="Arial" pitchFamily="34" charset="-122"/>
+                <a:cs typeface="Arial" pitchFamily="34" charset="-120"/>
+              </a:rPr>
+              <a:t>NPV Reduction £M</a:t>
+            </a:r>
+            <a:endParaRPr lang="en-US" sz="850" dirty="0"/>
           </a:p>
         </p:txBody>
       </p:sp>
@@ -2985,9 +5036,16 @@
 </p:sld>
 </file>
 
-<file path=ppt/slides/slide5.xml><?xml version="1.0" encoding="utf-8"?>
+<file path=ppt/slides/slide16.xml><?xml version="1.0" encoding="utf-8"?>
 <p:sld xmlns:a="http://schemas.openxmlformats.org/drawingml/2006/main" xmlns:r="http://schemas.openxmlformats.org/officeDocument/2006/relationships" xmlns:p="http://schemas.openxmlformats.org/presentationml/2006/main">
-  <p:cSld name="Slide 5">
+  <p:cSld name="Slide 16">
+    <p:bg>
+      <p:bgPr>
+        <a:solidFill>
+          <a:srgbClr val="FFFFFF"/>
+        </a:solidFill>
+      </p:bgPr>
+    </p:bg>
     <p:spTree>
       <p:nvGrpSpPr>
         <p:cNvPr id="1" name=""/>
@@ -3004,14 +5062,34 @@
       </p:grpSpPr>
       <p:sp>
         <p:nvSpPr>
-          <p:cNvPr id="2" name="Text 0"/>
-          <p:cNvSpPr/>
-          <p:nvPr/>
-        </p:nvSpPr>
-        <p:spPr>
-          <a:xfrm>
-            <a:off x="457200" y="320040"/>
-            <a:ext cx="8229600" cy="731520"/>
+          <p:cNvPr id="2" name="Shape 0"/>
+          <p:cNvSpPr/>
+          <p:nvPr/>
+        </p:nvSpPr>
+        <p:spPr>
+          <a:xfrm>
+            <a:off x="411480" y="402336"/>
+            <a:ext cx="82296" cy="329184"/>
+          </a:xfrm>
+          <a:prstGeom prst="rect">
+            <a:avLst/>
+          </a:prstGeom>
+          <a:solidFill>
+            <a:srgbClr val="B45309"/>
+          </a:solidFill>
+          <a:ln/>
+        </p:spPr>
+      </p:sp>
+      <p:sp>
+        <p:nvSpPr>
+          <p:cNvPr id="3" name="Text 1"/>
+          <p:cNvSpPr/>
+          <p:nvPr/>
+        </p:nvSpPr>
+        <p:spPr>
+          <a:xfrm>
+            <a:off x="566928" y="292608"/>
+            <a:ext cx="8138160" cy="548640"/>
           </a:xfrm>
           <a:prstGeom prst="rect">
             <a:avLst/>
@@ -3027,27 +5105,92 @@
               <a:buNone/>
             </a:pPr>
             <a:r>
-              <a:rPr lang="en-US" sz="2400" b="1" dirty="0">
-                <a:solidFill>
-                  <a:srgbClr val="B45309"/>
-                </a:solidFill>
-              </a:rPr>
-              <a:t>Introduction and Objectives (0:00 - 0:05)</a:t>
-            </a:r>
-            <a:endParaRPr lang="en-US" sz="2400" dirty="0"/>
-          </a:p>
-        </p:txBody>
-      </p:sp>
-      <p:sp>
-        <p:nvSpPr>
-          <p:cNvPr id="3" name="Text 1"/>
-          <p:cNvSpPr/>
-          <p:nvPr/>
-        </p:nvSpPr>
-        <p:spPr>
-          <a:xfrm>
-            <a:off x="640080" y="1188720"/>
-            <a:ext cx="7863840" cy="3291840"/>
+              <a:rPr lang="en-US" sz="2100" b="1" dirty="0">
+                <a:solidFill>
+                  <a:srgbClr val="1C1917"/>
+                </a:solidFill>
+                <a:latin typeface="Arial" pitchFamily="34" charset="0"/>
+                <a:ea typeface="Arial" pitchFamily="34" charset="-122"/>
+                <a:cs typeface="Arial" pitchFamily="34" charset="-120"/>
+              </a:rPr>
+              <a:t>Sanity Checks Every Auditor Must Apply</a:t>
+            </a:r>
+            <a:endParaRPr lang="en-US" sz="2100" dirty="0"/>
+          </a:p>
+        </p:txBody>
+      </p:sp>
+      <p:sp>
+        <p:nvSpPr>
+          <p:cNvPr id="4" name="Shape 2"/>
+          <p:cNvSpPr/>
+          <p:nvPr/>
+        </p:nvSpPr>
+        <p:spPr>
+          <a:xfrm>
+            <a:off x="411480" y="960120"/>
+            <a:ext cx="8321040" cy="0"/>
+          </a:xfrm>
+          <a:prstGeom prst="line">
+            <a:avLst/>
+          </a:prstGeom>
+          <a:noFill/>
+          <a:ln w="12700">
+            <a:solidFill>
+              <a:srgbClr val="E7E5E4"/>
+            </a:solidFill>
+            <a:prstDash val="solid"/>
+          </a:ln>
+        </p:spPr>
+      </p:sp>
+      <p:sp>
+        <p:nvSpPr>
+          <p:cNvPr id="5" name="Text 3"/>
+          <p:cNvSpPr/>
+          <p:nvPr/>
+        </p:nvSpPr>
+        <p:spPr>
+          <a:xfrm>
+            <a:off x="411480" y="4864608"/>
+            <a:ext cx="8321040" cy="237744"/>
+          </a:xfrm>
+          <a:prstGeom prst="rect">
+            <a:avLst/>
+          </a:prstGeom>
+          <a:noFill/>
+          <a:ln/>
+        </p:spPr>
+        <p:txBody>
+          <a:bodyPr wrap="square" rtlCol="0" anchor="ctr"/>
+          <a:lstStyle/>
+          <a:p>
+            <a:pPr indent="0" marL="0">
+              <a:buNone/>
+            </a:pPr>
+            <a:r>
+              <a:rPr lang="en-US" sz="750" dirty="0">
+                <a:solidFill>
+                  <a:srgbClr val="AAAAAA"/>
+                </a:solidFill>
+                <a:latin typeface="Arial" pitchFamily="34" charset="0"/>
+                <a:ea typeface="Arial" pitchFamily="34" charset="-122"/>
+                <a:cs typeface="Arial" pitchFamily="34" charset="-120"/>
+              </a:rPr>
+              <a:t>Lesson Forge Pro (owner) — This content is educational material only and does not constitute financial, investment, or trading advice.</a:t>
+            </a:r>
+            <a:endParaRPr lang="en-US" sz="750" dirty="0"/>
+          </a:p>
+        </p:txBody>
+      </p:sp>
+      <p:sp>
+        <p:nvSpPr>
+          <p:cNvPr id="6" name="Text 4"/>
+          <p:cNvSpPr/>
+          <p:nvPr/>
+        </p:nvSpPr>
+        <p:spPr>
+          <a:xfrm>
+            <a:off x="731520" y="1188720"/>
+            <a:ext cx="7680960" cy="2743200"/>
           </a:xfrm>
           <a:prstGeom prst="rect">
             <a:avLst/>
@@ -3059,92 +5202,151 @@
           <a:bodyPr wrap="square" rtlCol="0" anchor="t"/>
           <a:lstStyle/>
           <a:p>
-            <a:pPr marL="342900" indent="-342900">
+            <a:pPr marL="152400" indent="-152400">
+              <a:spcAft>
+                <a:spcPts val="800"/>
+              </a:spcAft>
               <a:buSzPct val="100000"/>
               <a:buChar char="•"/>
             </a:pPr>
             <a:r>
-              <a:rPr lang="en-US" sz="1600" dirty="0">
-                <a:solidFill>
-                  <a:srgbClr val="333333"/>
-                </a:solidFill>
-              </a:rPr>
-              <a:t>Welcome to the session on Model Audit and Risk Management. As financial modelers, we need to ensure that our models are accurate, reliable, and transparent. In </a:t>
-            </a:r>
-            <a:endParaRPr lang="en-US" sz="1600" dirty="0"/>
-          </a:p>
-          <a:p>
-            <a:pPr marL="342900" indent="-342900">
+              <a:rPr lang="en-US" sz="1500" dirty="0">
+                <a:solidFill>
+                  <a:srgbClr val="1C1917"/>
+                </a:solidFill>
+                <a:latin typeface="Arial" pitchFamily="34" charset="0"/>
+                <a:ea typeface="Arial" pitchFamily="34" charset="-122"/>
+                <a:cs typeface="Arial" pitchFamily="34" charset="-120"/>
+              </a:rPr>
+              <a:t>Order-of-magnitude test: compare output to industry benchmarks for plausibility.</a:t>
+            </a:r>
+            <a:endParaRPr lang="en-US" sz="1500" dirty="0"/>
+          </a:p>
+          <a:p>
+            <a:pPr marL="152400" indent="-152400">
+              <a:spcAft>
+                <a:spcPts val="800"/>
+              </a:spcAft>
               <a:buSzPct val="100000"/>
               <a:buChar char="•"/>
             </a:pPr>
             <a:r>
-              <a:rPr lang="en-US" sz="1600" dirty="0">
-                <a:solidFill>
-                  <a:srgbClr val="333333"/>
-                </a:solidFill>
-              </a:rPr>
-              <a:t>Conduct model audits to identify and mitigate risks</a:t>
-            </a:r>
-            <a:endParaRPr lang="en-US" sz="1600" dirty="0"/>
-          </a:p>
-          <a:p>
-            <a:pPr marL="342900" indent="-342900">
+              <a:rPr lang="en-US" sz="1500" dirty="0">
+                <a:solidFill>
+                  <a:srgbClr val="1C1917"/>
+                </a:solidFill>
+                <a:latin typeface="Arial" pitchFamily="34" charset="0"/>
+                <a:ea typeface="Arial" pitchFamily="34" charset="-122"/>
+                <a:cs typeface="Arial" pitchFamily="34" charset="-120"/>
+              </a:rPr>
+              <a:t>Limiting-case test: zero growth should collapse the model to a perpetuity formula.</a:t>
+            </a:r>
+            <a:endParaRPr lang="en-US" sz="1500" dirty="0"/>
+          </a:p>
+          <a:p>
+            <a:pPr marL="152400" indent="-152400">
+              <a:spcAft>
+                <a:spcPts val="800"/>
+              </a:spcAft>
               <a:buSzPct val="100000"/>
               <a:buChar char="•"/>
             </a:pPr>
             <a:r>
-              <a:rPr lang="en-US" sz="1600" dirty="0">
-                <a:solidFill>
-                  <a:srgbClr val="333333"/>
-                </a:solidFill>
-              </a:rPr>
-              <a:t>Develop risk management strategies to address model limitations</a:t>
-            </a:r>
-            <a:endParaRPr lang="en-US" sz="1600" dirty="0"/>
-          </a:p>
-          <a:p>
-            <a:pPr marL="342900" indent="-342900">
+              <a:rPr lang="en-US" sz="1500" dirty="0">
+                <a:solidFill>
+                  <a:srgbClr val="1C1917"/>
+                </a:solidFill>
+                <a:latin typeface="Arial" pitchFamily="34" charset="0"/>
+                <a:ea typeface="Arial" pitchFamily="34" charset="-122"/>
+                <a:cs typeface="Arial" pitchFamily="34" charset="-120"/>
+              </a:rPr>
+              <a:t>Sign check: higher discount rates must produce lower present values.</a:t>
+            </a:r>
+            <a:endParaRPr lang="en-US" sz="1500" dirty="0"/>
+          </a:p>
+          <a:p>
+            <a:pPr marL="152400" indent="-152400">
+              <a:spcAft>
+                <a:spcPts val="800"/>
+              </a:spcAft>
               <a:buSzPct val="100000"/>
               <a:buChar char="•"/>
             </a:pPr>
             <a:r>
-              <a:rPr lang="en-US" sz="1600" dirty="0">
-                <a:solidFill>
-                  <a:srgbClr val="333333"/>
-                </a:solidFill>
-              </a:rPr>
-              <a:t>Create model documentation to ensure transparency and reproducibility</a:t>
-            </a:r>
-            <a:endParaRPr lang="en-US" sz="1600" dirty="0"/>
-          </a:p>
-          <a:p>
-            <a:pPr marL="342900" indent="-342900">
+              <a:rPr lang="en-US" sz="1500" dirty="0">
+                <a:solidFill>
+                  <a:srgbClr val="1C1917"/>
+                </a:solidFill>
+                <a:latin typeface="Arial" pitchFamily="34" charset="0"/>
+                <a:ea typeface="Arial" pitchFamily="34" charset="-122"/>
+                <a:cs typeface="Arial" pitchFamily="34" charset="-120"/>
+              </a:rPr>
+              <a:t>Sum-of-parts: disaggregated outputs must reconcile to the consolidated total.</a:t>
+            </a:r>
+            <a:endParaRPr lang="en-US" sz="1500" dirty="0"/>
+          </a:p>
+          <a:p>
+            <a:pPr marL="152400" indent="-152400">
+              <a:spcAft>
+                <a:spcPts val="800"/>
+              </a:spcAft>
               <a:buSzPct val="100000"/>
               <a:buChar char="•"/>
             </a:pPr>
             <a:r>
-              <a:rPr lang="en-US" sz="1600" dirty="0">
-                <a:solidFill>
-                  <a:srgbClr val="333333"/>
-                </a:solidFill>
-              </a:rPr>
-              <a:t>Think of a model audit like a health check-up for your financial model. Just as a doctor checks your vital signs to ensure you're healthy, a model audit checks </a:t>
-            </a:r>
-            <a:endParaRPr lang="en-US" sz="1600" dirty="0"/>
-          </a:p>
-        </p:txBody>
-      </p:sp>
-      <p:sp>
-        <p:nvSpPr>
-          <p:cNvPr id="4" name="Text 2"/>
-          <p:cNvSpPr/>
-          <p:nvPr/>
-        </p:nvSpPr>
-        <p:spPr>
-          <a:xfrm>
-            <a:off x="457200" y="4709160"/>
-            <a:ext cx="8229600" cy="320040"/>
+              <a:rPr lang="en-US" sz="1500" dirty="0">
+                <a:solidFill>
+                  <a:srgbClr val="1C1917"/>
+                </a:solidFill>
+                <a:latin typeface="Arial" pitchFamily="34" charset="0"/>
+                <a:ea typeface="Arial" pitchFamily="34" charset="-122"/>
+                <a:cs typeface="Arial" pitchFamily="34" charset="-120"/>
+              </a:rPr>
+              <a:t>Sensitivity table: vary WACC ±1% and confirm economically intuitive direction and magnitude.</a:t>
+            </a:r>
+            <a:endParaRPr lang="en-US" sz="1500" dirty="0"/>
+          </a:p>
+        </p:txBody>
+      </p:sp>
+      <p:sp>
+        <p:nvSpPr>
+          <p:cNvPr id="7" name="Shape 5"/>
+          <p:cNvSpPr/>
+          <p:nvPr/>
+        </p:nvSpPr>
+        <p:spPr>
+          <a:xfrm>
+            <a:off x="731520" y="4041648"/>
+            <a:ext cx="7680960" cy="566928"/>
+          </a:xfrm>
+          <a:prstGeom prst="roundRect">
+            <a:avLst>
+              <a:gd name="adj" fmla="val 12903"/>
+            </a:avLst>
+          </a:prstGeom>
+          <a:solidFill>
+            <a:srgbClr val="B45309">
+              <a:alpha val="12000"/>
+            </a:srgbClr>
+          </a:solidFill>
+          <a:ln w="12700">
+            <a:solidFill>
+              <a:srgbClr val="B45309"/>
+            </a:solidFill>
+            <a:prstDash val="solid"/>
+          </a:ln>
+        </p:spPr>
+      </p:sp>
+      <p:sp>
+        <p:nvSpPr>
+          <p:cNvPr id="8" name="Text 6"/>
+          <p:cNvSpPr/>
+          <p:nvPr/>
+        </p:nvSpPr>
+        <p:spPr>
+          <a:xfrm>
+            <a:off x="868680" y="4087368"/>
+            <a:ext cx="7406640" cy="475488"/>
           </a:xfrm>
           <a:prstGeom prst="rect">
             <a:avLst/>
@@ -3160,14 +5362,31 @@
               <a:buNone/>
             </a:pPr>
             <a:r>
-              <a:rPr lang="en-US" sz="800" dirty="0">
-                <a:solidFill>
-                  <a:srgbClr val="AAAAAA"/>
-                </a:solidFill>
-              </a:rPr>
-              <a:t>Lesson Forge Pro (owner) — This content is educational material only and does not constitute financial, investment, or trading advice.</a:t>
-            </a:r>
-            <a:endParaRPr lang="en-US" sz="800" dirty="0"/>
+              <a:rPr lang="en-US" sz="1100" b="1" dirty="0">
+                <a:solidFill>
+                  <a:srgbClr val="B45309"/>
+                </a:solidFill>
+                <a:latin typeface="Arial" pitchFamily="34" charset="0"/>
+                <a:ea typeface="Arial" pitchFamily="34" charset="-122"/>
+                <a:cs typeface="Arial" pitchFamily="34" charset="-120"/>
+              </a:rPr>
+              <a:t>Takeaway  </a:t>
+            </a:r>
+            <a:pPr indent="0" marL="0">
+              <a:buNone/>
+            </a:pPr>
+            <a:r>
+              <a:rPr lang="en-US" sz="1150" dirty="0">
+                <a:solidFill>
+                  <a:srgbClr val="1C1917"/>
+                </a:solidFill>
+                <a:latin typeface="Arial" pitchFamily="34" charset="0"/>
+                <a:ea typeface="Arial" pitchFamily="34" charset="-122"/>
+                <a:cs typeface="Arial" pitchFamily="34" charset="-120"/>
+              </a:rPr>
+              <a:t>Five quick sanity checks—magnitude, limits, signs, reconciliation, sensitivity—catch the majority of errors before a model reaches decision-makers.</a:t>
+            </a:r>
+            <a:endParaRPr lang="en-US" sz="1100" dirty="0"/>
           </a:p>
         </p:txBody>
       </p:sp>
@@ -3179,9 +5398,16 @@
 </p:sld>
 </file>
 
-<file path=ppt/slides/slide6.xml><?xml version="1.0" encoding="utf-8"?>
+<file path=ppt/slides/slide17.xml><?xml version="1.0" encoding="utf-8"?>
 <p:sld xmlns:a="http://schemas.openxmlformats.org/drawingml/2006/main" xmlns:r="http://schemas.openxmlformats.org/officeDocument/2006/relationships" xmlns:p="http://schemas.openxmlformats.org/presentationml/2006/main">
-  <p:cSld name="Slide 6">
+  <p:cSld name="Slide 17">
+    <p:bg>
+      <p:bgPr>
+        <a:solidFill>
+          <a:srgbClr val="FFFFFF"/>
+        </a:solidFill>
+      </p:bgPr>
+    </p:bg>
     <p:spTree>
       <p:nvGrpSpPr>
         <p:cNvPr id="1" name=""/>
@@ -3198,14 +5424,34 @@
       </p:grpSpPr>
       <p:sp>
         <p:nvSpPr>
-          <p:cNvPr id="2" name="Text 0"/>
-          <p:cNvSpPr/>
-          <p:nvPr/>
-        </p:nvSpPr>
-        <p:spPr>
-          <a:xfrm>
-            <a:off x="457200" y="320040"/>
-            <a:ext cx="8229600" cy="731520"/>
+          <p:cNvPr id="2" name="Shape 0"/>
+          <p:cNvSpPr/>
+          <p:nvPr/>
+        </p:nvSpPr>
+        <p:spPr>
+          <a:xfrm>
+            <a:off x="411480" y="402336"/>
+            <a:ext cx="82296" cy="329184"/>
+          </a:xfrm>
+          <a:prstGeom prst="rect">
+            <a:avLst/>
+          </a:prstGeom>
+          <a:solidFill>
+            <a:srgbClr val="B45309"/>
+          </a:solidFill>
+          <a:ln/>
+        </p:spPr>
+      </p:sp>
+      <p:sp>
+        <p:nvSpPr>
+          <p:cNvPr id="3" name="Text 1"/>
+          <p:cNvSpPr/>
+          <p:nvPr/>
+        </p:nvSpPr>
+        <p:spPr>
+          <a:xfrm>
+            <a:off x="566928" y="292608"/>
+            <a:ext cx="8138160" cy="548640"/>
           </a:xfrm>
           <a:prstGeom prst="rect">
             <a:avLst/>
@@ -3221,27 +5467,92 @@
               <a:buNone/>
             </a:pPr>
             <a:r>
-              <a:rPr lang="en-US" sz="2400" b="1" dirty="0">
-                <a:solidFill>
-                  <a:srgbClr val="B45309"/>
-                </a:solidFill>
-              </a:rPr>
-              <a:t>Importance of Model Audits and Risk Management (0:05 - 0:20)</a:t>
-            </a:r>
-            <a:endParaRPr lang="en-US" sz="2400" dirty="0"/>
-          </a:p>
-        </p:txBody>
-      </p:sp>
-      <p:sp>
-        <p:nvSpPr>
-          <p:cNvPr id="3" name="Text 1"/>
-          <p:cNvSpPr/>
-          <p:nvPr/>
-        </p:nvSpPr>
-        <p:spPr>
-          <a:xfrm>
-            <a:off x="640080" y="1188720"/>
-            <a:ext cx="7863840" cy="3291840"/>
+              <a:rPr lang="en-US" sz="2100" b="1" dirty="0">
+                <a:solidFill>
+                  <a:srgbClr val="1C1917"/>
+                </a:solidFill>
+                <a:latin typeface="Arial" pitchFamily="34" charset="0"/>
+                <a:ea typeface="Arial" pitchFamily="34" charset="-122"/>
+                <a:cs typeface="Arial" pitchFamily="34" charset="-120"/>
+              </a:rPr>
+              <a:t>Worked Example: Correcting a Rate-Period Mismatch in DCF</a:t>
+            </a:r>
+            <a:endParaRPr lang="en-US" sz="2100" dirty="0"/>
+          </a:p>
+        </p:txBody>
+      </p:sp>
+      <p:sp>
+        <p:nvSpPr>
+          <p:cNvPr id="4" name="Shape 2"/>
+          <p:cNvSpPr/>
+          <p:nvPr/>
+        </p:nvSpPr>
+        <p:spPr>
+          <a:xfrm>
+            <a:off x="411480" y="960120"/>
+            <a:ext cx="8321040" cy="0"/>
+          </a:xfrm>
+          <a:prstGeom prst="line">
+            <a:avLst/>
+          </a:prstGeom>
+          <a:noFill/>
+          <a:ln w="12700">
+            <a:solidFill>
+              <a:srgbClr val="E7E5E4"/>
+            </a:solidFill>
+            <a:prstDash val="solid"/>
+          </a:ln>
+        </p:spPr>
+      </p:sp>
+      <p:sp>
+        <p:nvSpPr>
+          <p:cNvPr id="5" name="Text 3"/>
+          <p:cNvSpPr/>
+          <p:nvPr/>
+        </p:nvSpPr>
+        <p:spPr>
+          <a:xfrm>
+            <a:off x="411480" y="4864608"/>
+            <a:ext cx="8321040" cy="237744"/>
+          </a:xfrm>
+          <a:prstGeom prst="rect">
+            <a:avLst/>
+          </a:prstGeom>
+          <a:noFill/>
+          <a:ln/>
+        </p:spPr>
+        <p:txBody>
+          <a:bodyPr wrap="square" rtlCol="0" anchor="ctr"/>
+          <a:lstStyle/>
+          <a:p>
+            <a:pPr indent="0" marL="0">
+              <a:buNone/>
+            </a:pPr>
+            <a:r>
+              <a:rPr lang="en-US" sz="750" dirty="0">
+                <a:solidFill>
+                  <a:srgbClr val="AAAAAA"/>
+                </a:solidFill>
+                <a:latin typeface="Arial" pitchFamily="34" charset="0"/>
+                <a:ea typeface="Arial" pitchFamily="34" charset="-122"/>
+                <a:cs typeface="Arial" pitchFamily="34" charset="-120"/>
+              </a:rPr>
+              <a:t>Lesson Forge Pro (owner) — This content is educational material only and does not constitute financial, investment, or trading advice.</a:t>
+            </a:r>
+            <a:endParaRPr lang="en-US" sz="750" dirty="0"/>
+          </a:p>
+        </p:txBody>
+      </p:sp>
+      <p:sp>
+        <p:nvSpPr>
+          <p:cNvPr id="6" name="Text 4"/>
+          <p:cNvSpPr/>
+          <p:nvPr/>
+        </p:nvSpPr>
+        <p:spPr>
+          <a:xfrm>
+            <a:off x="731520" y="1188720"/>
+            <a:ext cx="7680960" cy="2743200"/>
           </a:xfrm>
           <a:prstGeom prst="rect">
             <a:avLst/>
@@ -3253,47 +5564,151 @@
           <a:bodyPr wrap="square" rtlCol="0" anchor="t"/>
           <a:lstStyle/>
           <a:p>
-            <a:pPr marL="342900" indent="-342900">
+            <a:pPr marL="152400" indent="-152400">
+              <a:spcAft>
+                <a:spcPts val="800"/>
+              </a:spcAft>
               <a:buSzPct val="100000"/>
               <a:buChar char="•"/>
             </a:pPr>
             <a:r>
-              <a:rPr lang="en-US" sz="1600" dirty="0">
-                <a:solidFill>
-                  <a:srgbClr val="333333"/>
-                </a:solidFill>
-              </a:rPr>
-              <a:t>Model audits and risk management are crucial in financial modeling because they help identify and mitigate potential risks. A model risk is like a ticking time </a:t>
-            </a:r>
-            <a:endParaRPr lang="en-US" sz="1600" dirty="0"/>
-          </a:p>
-          <a:p>
-            <a:pPr marL="342900" indent="-342900">
+              <a:rPr lang="en-US" sz="1500" dirty="0">
+                <a:solidFill>
+                  <a:srgbClr val="1C1917"/>
+                </a:solidFill>
+                <a:latin typeface="Arial" pitchFamily="34" charset="0"/>
+                <a:ea typeface="Arial" pitchFamily="34" charset="-122"/>
+                <a:cs typeface="Arial" pitchFamily="34" charset="-120"/>
+              </a:rPr>
+              <a:t>Analyst applied annual WACC of 8% using quarterly discount factors—a period mismatch.</a:t>
+            </a:r>
+            <a:endParaRPr lang="en-US" sz="1500" dirty="0"/>
+          </a:p>
+          <a:p>
+            <a:pPr marL="152400" indent="-152400">
+              <a:spcAft>
+                <a:spcPts val="800"/>
+              </a:spcAft>
               <a:buSzPct val="100000"/>
               <a:buChar char="•"/>
             </a:pPr>
             <a:r>
-              <a:rPr lang="en-US" sz="1600" dirty="0">
-                <a:solidFill>
-                  <a:srgbClr val="333333"/>
-                </a:solidFill>
-              </a:rPr>
-              <a:t>For example, imagine you're building a house. You need to ensure that the foundation is strong and stable before you start constructing the walls and roof. Simi</a:t>
-            </a:r>
-            <a:endParaRPr lang="en-US" sz="1600" dirty="0"/>
-          </a:p>
-        </p:txBody>
-      </p:sp>
-      <p:sp>
-        <p:nvSpPr>
-          <p:cNvPr id="4" name="Text 2"/>
-          <p:cNvSpPr/>
-          <p:nvPr/>
-        </p:nvSpPr>
-        <p:spPr>
-          <a:xfrm>
-            <a:off x="457200" y="4709160"/>
-            <a:ext cx="8229600" cy="320040"/>
+              <a:rPr lang="en-US" sz="1500" dirty="0">
+                <a:solidFill>
+                  <a:srgbClr val="1C1917"/>
+                </a:solidFill>
+                <a:latin typeface="Arial" pitchFamily="34" charset="0"/>
+                <a:ea typeface="Arial" pitchFamily="34" charset="-122"/>
+                <a:cs typeface="Arial" pitchFamily="34" charset="-120"/>
+              </a:rPr>
+              <a:t>Correct approach: annual cash flows require annual discount factor 1/(1.08)^n.</a:t>
+            </a:r>
+            <a:endParaRPr lang="en-US" sz="1500" dirty="0"/>
+          </a:p>
+          <a:p>
+            <a:pPr marL="152400" indent="-152400">
+              <a:spcAft>
+                <a:spcPts val="800"/>
+              </a:spcAft>
+              <a:buSzPct val="100000"/>
+              <a:buChar char="•"/>
+            </a:pPr>
+            <a:r>
+              <a:rPr lang="en-US" sz="1500" dirty="0">
+                <a:solidFill>
+                  <a:srgbClr val="1C1917"/>
+                </a:solidFill>
+                <a:latin typeface="Arial" pitchFamily="34" charset="0"/>
+                <a:ea typeface="Arial" pitchFamily="34" charset="-122"/>
+                <a:cs typeface="Arial" pitchFamily="34" charset="-120"/>
+              </a:rPr>
+              <a:t>FCF₅ = £165k × 1.02 = £168.3k; terminal value = £168.3k / 0.06 = £2,805k.</a:t>
+            </a:r>
+            <a:endParaRPr lang="en-US" sz="1500" dirty="0"/>
+          </a:p>
+          <a:p>
+            <a:pPr marL="152400" indent="-152400">
+              <a:spcAft>
+                <a:spcPts val="800"/>
+              </a:spcAft>
+              <a:buSzPct val="100000"/>
+              <a:buChar char="•"/>
+            </a:pPr>
+            <a:r>
+              <a:rPr lang="en-US" sz="1500" dirty="0">
+                <a:solidFill>
+                  <a:srgbClr val="1C1917"/>
+                </a:solidFill>
+                <a:latin typeface="Arial" pitchFamily="34" charset="0"/>
+                <a:ea typeface="Arial" pitchFamily="34" charset="-122"/>
+                <a:cs typeface="Arial" pitchFamily="34" charset="-120"/>
+              </a:rPr>
+              <a:t>Each year's PV recalculated with correct annual factors, then summed.</a:t>
+            </a:r>
+            <a:endParaRPr lang="en-US" sz="1500" dirty="0"/>
+          </a:p>
+          <a:p>
+            <a:pPr marL="152400" indent="-152400">
+              <a:spcAft>
+                <a:spcPts val="800"/>
+              </a:spcAft>
+              <a:buSzPct val="100000"/>
+              <a:buChar char="•"/>
+            </a:pPr>
+            <a:r>
+              <a:rPr lang="en-US" sz="1500" dirty="0">
+                <a:solidFill>
+                  <a:srgbClr val="1C1917"/>
+                </a:solidFill>
+                <a:latin typeface="Arial" pitchFamily="34" charset="0"/>
+                <a:ea typeface="Arial" pitchFamily="34" charset="-122"/>
+                <a:cs typeface="Arial" pitchFamily="34" charset="-120"/>
+              </a:rPr>
+              <a:t>Mismatch systematically overstated PVs, inflating the project valuation.</a:t>
+            </a:r>
+            <a:endParaRPr lang="en-US" sz="1500" dirty="0"/>
+          </a:p>
+        </p:txBody>
+      </p:sp>
+      <p:sp>
+        <p:nvSpPr>
+          <p:cNvPr id="7" name="Shape 5"/>
+          <p:cNvSpPr/>
+          <p:nvPr/>
+        </p:nvSpPr>
+        <p:spPr>
+          <a:xfrm>
+            <a:off x="731520" y="4041648"/>
+            <a:ext cx="7680960" cy="566928"/>
+          </a:xfrm>
+          <a:prstGeom prst="roundRect">
+            <a:avLst>
+              <a:gd name="adj" fmla="val 12903"/>
+            </a:avLst>
+          </a:prstGeom>
+          <a:solidFill>
+            <a:srgbClr val="B45309">
+              <a:alpha val="12000"/>
+            </a:srgbClr>
+          </a:solidFill>
+          <a:ln w="12700">
+            <a:solidFill>
+              <a:srgbClr val="B45309"/>
+            </a:solidFill>
+            <a:prstDash val="solid"/>
+          </a:ln>
+        </p:spPr>
+      </p:sp>
+      <p:sp>
+        <p:nvSpPr>
+          <p:cNvPr id="8" name="Text 6"/>
+          <p:cNvSpPr/>
+          <p:nvPr/>
+        </p:nvSpPr>
+        <p:spPr>
+          <a:xfrm>
+            <a:off x="868680" y="4087368"/>
+            <a:ext cx="7406640" cy="475488"/>
           </a:xfrm>
           <a:prstGeom prst="rect">
             <a:avLst/>
@@ -3309,14 +5724,31 @@
               <a:buNone/>
             </a:pPr>
             <a:r>
-              <a:rPr lang="en-US" sz="800" dirty="0">
-                <a:solidFill>
-                  <a:srgbClr val="AAAAAA"/>
-                </a:solidFill>
-              </a:rPr>
-              <a:t>Lesson Forge Pro (owner) — This content is educational material only and does not constitute financial, investment, or trading advice.</a:t>
-            </a:r>
-            <a:endParaRPr lang="en-US" sz="800" dirty="0"/>
+              <a:rPr lang="en-US" sz="1100" b="1" dirty="0">
+                <a:solidFill>
+                  <a:srgbClr val="B45309"/>
+                </a:solidFill>
+                <a:latin typeface="Arial" pitchFamily="34" charset="0"/>
+                <a:ea typeface="Arial" pitchFamily="34" charset="-122"/>
+                <a:cs typeface="Arial" pitchFamily="34" charset="-120"/>
+              </a:rPr>
+              <a:t>Takeaway  </a:t>
+            </a:r>
+            <a:pPr indent="0" marL="0">
+              <a:buNone/>
+            </a:pPr>
+            <a:r>
+              <a:rPr lang="en-US" sz="1150" dirty="0">
+                <a:solidFill>
+                  <a:srgbClr val="1C1917"/>
+                </a:solidFill>
+                <a:latin typeface="Arial" pitchFamily="34" charset="0"/>
+                <a:ea typeface="Arial" pitchFamily="34" charset="-122"/>
+                <a:cs typeface="Arial" pitchFamily="34" charset="-120"/>
+              </a:rPr>
+              <a:t>Always confirm that the discount rate's compounding frequency exactly matches the cash flow period—mismatches systematically distort every present value.</a:t>
+            </a:r>
+            <a:endParaRPr lang="en-US" sz="1100" dirty="0"/>
           </a:p>
         </p:txBody>
       </p:sp>
@@ -3328,9 +5760,16 @@
 </p:sld>
 </file>
 
-<file path=ppt/slides/slide7.xml><?xml version="1.0" encoding="utf-8"?>
+<file path=ppt/slides/slide18.xml><?xml version="1.0" encoding="utf-8"?>
 <p:sld xmlns:a="http://schemas.openxmlformats.org/drawingml/2006/main" xmlns:r="http://schemas.openxmlformats.org/officeDocument/2006/relationships" xmlns:p="http://schemas.openxmlformats.org/presentationml/2006/main">
-  <p:cSld name="Slide 7">
+  <p:cSld name="Slide 18">
+    <p:bg>
+      <p:bgPr>
+        <a:solidFill>
+          <a:srgbClr val="FFFFFF"/>
+        </a:solidFill>
+      </p:bgPr>
+    </p:bg>
     <p:spTree>
       <p:nvGrpSpPr>
         <p:cNvPr id="1" name=""/>
@@ -3347,14 +5786,34 @@
       </p:grpSpPr>
       <p:sp>
         <p:nvSpPr>
-          <p:cNvPr id="2" name="Text 0"/>
-          <p:cNvSpPr/>
-          <p:nvPr/>
-        </p:nvSpPr>
-        <p:spPr>
-          <a:xfrm>
-            <a:off x="457200" y="320040"/>
-            <a:ext cx="8229600" cy="731520"/>
+          <p:cNvPr id="2" name="Shape 0"/>
+          <p:cNvSpPr/>
+          <p:nvPr/>
+        </p:nvSpPr>
+        <p:spPr>
+          <a:xfrm>
+            <a:off x="0" y="4480560"/>
+            <a:ext cx="9144000" cy="667512"/>
+          </a:xfrm>
+          <a:prstGeom prst="rect">
+            <a:avLst/>
+          </a:prstGeom>
+          <a:solidFill>
+            <a:srgbClr val="B45309"/>
+          </a:solidFill>
+          <a:ln/>
+        </p:spPr>
+      </p:sp>
+      <p:sp>
+        <p:nvSpPr>
+          <p:cNvPr id="3" name="Text 1"/>
+          <p:cNvSpPr/>
+          <p:nvPr/>
+        </p:nvSpPr>
+        <p:spPr>
+          <a:xfrm>
+            <a:off x="685800" y="2148840"/>
+            <a:ext cx="7863840" cy="548640"/>
           </a:xfrm>
           <a:prstGeom prst="rect">
             <a:avLst/>
@@ -3370,111 +5829,17 @@
               <a:buNone/>
             </a:pPr>
             <a:r>
-              <a:rPr lang="en-US" sz="2400" b="1" dirty="0">
-                <a:solidFill>
-                  <a:srgbClr val="B45309"/>
-                </a:solidFill>
-              </a:rPr>
-              <a:t>Conducting Model Audits (0:20 - 0:35)</a:t>
-            </a:r>
-            <a:endParaRPr lang="en-US" sz="2400" dirty="0"/>
-          </a:p>
-        </p:txBody>
-      </p:sp>
-      <p:sp>
-        <p:nvSpPr>
-          <p:cNvPr id="3" name="Text 1"/>
-          <p:cNvSpPr/>
-          <p:nvPr/>
-        </p:nvSpPr>
-        <p:spPr>
-          <a:xfrm>
-            <a:off x="640080" y="1188720"/>
-            <a:ext cx="7863840" cy="3291840"/>
-          </a:xfrm>
-          <a:prstGeom prst="rect">
-            <a:avLst/>
-          </a:prstGeom>
-          <a:noFill/>
-          <a:ln/>
-        </p:spPr>
-        <p:txBody>
-          <a:bodyPr wrap="square" rtlCol="0" anchor="t"/>
-          <a:lstStyle/>
-          <a:p>
-            <a:pPr marL="342900" indent="-342900">
-              <a:buSzPct val="100000"/>
-              <a:buChar char="•"/>
-            </a:pPr>
-            <a:r>
-              <a:rPr lang="en-US" sz="1600" dirty="0">
-                <a:solidFill>
-                  <a:srgbClr val="333333"/>
-                </a:solidFill>
-              </a:rPr>
-              <a:t>Conducting a model audit involves reviewing your model's assumptions, inputs, and outputs to ensure they are accurate and reliable. It's like checking the ingre</a:t>
-            </a:r>
-            <a:endParaRPr lang="en-US" sz="1600" dirty="0"/>
-          </a:p>
-          <a:p>
-            <a:pPr marL="342900" indent="-342900">
-              <a:buSzPct val="100000"/>
-              <a:buChar char="•"/>
-            </a:pPr>
-            <a:r>
-              <a:rPr lang="en-US" sz="1600" dirty="0">
-                <a:solidFill>
-                  <a:srgbClr val="333333"/>
-                </a:solidFill>
-              </a:rPr>
-              <a:t>Here are some steps to follow when conducting a model audit:</a:t>
-            </a:r>
-            <a:endParaRPr lang="en-US" sz="1600" dirty="0"/>
-          </a:p>
-          <a:p>
-            <a:pPr marL="342900" indent="-342900">
-              <a:buSzPct val="100000"/>
-              <a:buChar char="•"/>
-            </a:pPr>
-            <a:r>
-              <a:rPr lang="en-US" sz="1600" dirty="0">
-                <a:solidFill>
-                  <a:srgbClr val="333333"/>
-                </a:solidFill>
-              </a:rPr>
-              <a:t>1. Review your model's documentation to ensure it's up-to-date and accurate.</a:t>
-            </a:r>
-            <a:endParaRPr lang="en-US" sz="1600" dirty="0"/>
-          </a:p>
-          <a:p>
-            <a:pPr marL="342900" indent="-342900">
-              <a:buSzPct val="100000"/>
-              <a:buChar char="•"/>
-            </a:pPr>
-            <a:r>
-              <a:rPr lang="en-US" sz="1600" dirty="0">
-                <a:solidFill>
-                  <a:srgbClr val="333333"/>
-                </a:solidFill>
-              </a:rPr>
-              <a:t>2. Check your model's inputs to ensure they are reliable and consistent.</a:t>
-            </a:r>
-            <a:endParaRPr lang="en-US" sz="1600" dirty="0"/>
-          </a:p>
-          <a:p>
-            <a:pPr marL="342900" indent="-342900">
-              <a:buSzPct val="100000"/>
-              <a:buChar char="•"/>
-            </a:pPr>
-            <a:r>
-              <a:rPr lang="en-US" sz="1600" dirty="0">
-                <a:solidFill>
-                  <a:srgbClr val="333333"/>
-                </a:solidFill>
-              </a:rPr>
-              <a:t>3. Verify your model's outputs to ensure they are accurate and reasonable.</a:t>
-            </a:r>
-            <a:endParaRPr lang="en-US" sz="1600" dirty="0"/>
+              <a:rPr lang="en-US" sz="2000" b="1" dirty="0">
+                <a:solidFill>
+                  <a:srgbClr val="1C1917"/>
+                </a:solidFill>
+                <a:latin typeface="Arial" pitchFamily="34" charset="0"/>
+                <a:ea typeface="Arial" pitchFamily="34" charset="-122"/>
+                <a:cs typeface="Arial" pitchFamily="34" charset="-120"/>
+              </a:rPr>
+              <a:t>Next: practice problems in your textbook chapter</a:t>
+            </a:r>
+            <a:endParaRPr lang="en-US" sz="2000" dirty="0"/>
           </a:p>
         </p:txBody>
       </p:sp>
@@ -3486,8 +5851,8 @@
         </p:nvSpPr>
         <p:spPr>
           <a:xfrm>
-            <a:off x="457200" y="4709160"/>
-            <a:ext cx="8229600" cy="320040"/>
+            <a:off x="685800" y="4599432"/>
+            <a:ext cx="7863840" cy="411480"/>
           </a:xfrm>
           <a:prstGeom prst="rect">
             <a:avLst/>
@@ -3503,14 +5868,17 @@
               <a:buNone/>
             </a:pPr>
             <a:r>
-              <a:rPr lang="en-US" sz="800" dirty="0">
-                <a:solidFill>
-                  <a:srgbClr val="AAAAAA"/>
-                </a:solidFill>
+              <a:rPr lang="en-US" sz="1100" dirty="0">
+                <a:solidFill>
+                  <a:srgbClr val="FFFFFF"/>
+                </a:solidFill>
+                <a:latin typeface="Arial" pitchFamily="34" charset="0"/>
+                <a:ea typeface="Arial" pitchFamily="34" charset="-122"/>
+                <a:cs typeface="Arial" pitchFamily="34" charset="-120"/>
               </a:rPr>
               <a:t>Lesson Forge Pro (owner) — This content is educational material only and does not constitute financial, investment, or trading advice.</a:t>
             </a:r>
-            <a:endParaRPr lang="en-US" sz="800" dirty="0"/>
+            <a:endParaRPr lang="en-US" sz="1100" dirty="0"/>
           </a:p>
         </p:txBody>
       </p:sp>
@@ -3522,9 +5890,16 @@
 </p:sld>
 </file>
 
-<file path=ppt/slides/slide8.xml><?xml version="1.0" encoding="utf-8"?>
+<file path=ppt/slides/slide2.xml><?xml version="1.0" encoding="utf-8"?>
 <p:sld xmlns:a="http://schemas.openxmlformats.org/drawingml/2006/main" xmlns:r="http://schemas.openxmlformats.org/officeDocument/2006/relationships" xmlns:p="http://schemas.openxmlformats.org/presentationml/2006/main">
-  <p:cSld name="Slide 8">
+  <p:cSld name="Slide 2">
+    <p:bg>
+      <p:bgPr>
+        <a:solidFill>
+          <a:srgbClr val="FFFFFF"/>
+        </a:solidFill>
+      </p:bgPr>
+    </p:bg>
     <p:spTree>
       <p:nvGrpSpPr>
         <p:cNvPr id="1" name=""/>
@@ -3541,14 +5916,34 @@
       </p:grpSpPr>
       <p:sp>
         <p:nvSpPr>
-          <p:cNvPr id="2" name="Text 0"/>
-          <p:cNvSpPr/>
-          <p:nvPr/>
-        </p:nvSpPr>
-        <p:spPr>
-          <a:xfrm>
-            <a:off x="457200" y="320040"/>
-            <a:ext cx="8229600" cy="731520"/>
+          <p:cNvPr id="2" name="Shape 0"/>
+          <p:cNvSpPr/>
+          <p:nvPr/>
+        </p:nvSpPr>
+        <p:spPr>
+          <a:xfrm>
+            <a:off x="411480" y="402336"/>
+            <a:ext cx="82296" cy="329184"/>
+          </a:xfrm>
+          <a:prstGeom prst="rect">
+            <a:avLst/>
+          </a:prstGeom>
+          <a:solidFill>
+            <a:srgbClr val="B45309"/>
+          </a:solidFill>
+          <a:ln/>
+        </p:spPr>
+      </p:sp>
+      <p:sp>
+        <p:nvSpPr>
+          <p:cNvPr id="3" name="Text 1"/>
+          <p:cNvSpPr/>
+          <p:nvPr/>
+        </p:nvSpPr>
+        <p:spPr>
+          <a:xfrm>
+            <a:off x="566928" y="292608"/>
+            <a:ext cx="8138160" cy="548640"/>
           </a:xfrm>
           <a:prstGeom prst="rect">
             <a:avLst/>
@@ -3564,64 +5959,53 @@
               <a:buNone/>
             </a:pPr>
             <a:r>
-              <a:rPr lang="en-US" sz="2400" b="1" dirty="0">
-                <a:solidFill>
-                  <a:srgbClr val="B45309"/>
-                </a:solidFill>
-              </a:rPr>
-              <a:t>Energizer/Break (0:35 - 0:45)</a:t>
-            </a:r>
-            <a:endParaRPr lang="en-US" sz="2400" dirty="0"/>
-          </a:p>
-        </p:txBody>
-      </p:sp>
-      <p:sp>
-        <p:nvSpPr>
-          <p:cNvPr id="3" name="Text 1"/>
-          <p:cNvSpPr/>
-          <p:nvPr/>
-        </p:nvSpPr>
-        <p:spPr>
-          <a:xfrm>
-            <a:off x="640080" y="1188720"/>
-            <a:ext cx="7863840" cy="3291840"/>
-          </a:xfrm>
-          <a:prstGeom prst="rect">
-            <a:avLst/>
-          </a:prstGeom>
-          <a:noFill/>
-          <a:ln/>
-        </p:spPr>
-        <p:txBody>
-          <a:bodyPr wrap="square" rtlCol="0" anchor="t"/>
-          <a:lstStyle/>
-          <a:p>
-            <a:pPr marL="342900" indent="-342900">
-              <a:buSzPct val="100000"/>
-              <a:buChar char="•"/>
-            </a:pPr>
-            <a:r>
-              <a:rPr lang="en-US" sz="1600" dirty="0">
-                <a:solidFill>
-                  <a:srgbClr val="333333"/>
-                </a:solidFill>
-              </a:rPr>
-              <a:t>Let's take a short break to stretch our legs and refresh our minds. During this break, think about a time when you encountered a model risk in your work. How di</a:t>
-            </a:r>
-            <a:endParaRPr lang="en-US" sz="1600" dirty="0"/>
-          </a:p>
-        </p:txBody>
-      </p:sp>
-      <p:sp>
-        <p:nvSpPr>
-          <p:cNvPr id="4" name="Text 2"/>
-          <p:cNvSpPr/>
-          <p:nvPr/>
-        </p:nvSpPr>
-        <p:spPr>
-          <a:xfrm>
-            <a:off x="457200" y="4709160"/>
-            <a:ext cx="8229600" cy="320040"/>
+              <a:rPr lang="en-US" sz="2100" b="1" dirty="0">
+                <a:solidFill>
+                  <a:srgbClr val="1C1917"/>
+                </a:solidFill>
+                <a:latin typeface="Arial" pitchFamily="34" charset="0"/>
+                <a:ea typeface="Arial" pitchFamily="34" charset="-122"/>
+                <a:cs typeface="Arial" pitchFamily="34" charset="-120"/>
+              </a:rPr>
+              <a:t>Today's agenda</a:t>
+            </a:r>
+            <a:endParaRPr lang="en-US" sz="2100" dirty="0"/>
+          </a:p>
+        </p:txBody>
+      </p:sp>
+      <p:sp>
+        <p:nvSpPr>
+          <p:cNvPr id="4" name="Shape 2"/>
+          <p:cNvSpPr/>
+          <p:nvPr/>
+        </p:nvSpPr>
+        <p:spPr>
+          <a:xfrm>
+            <a:off x="411480" y="960120"/>
+            <a:ext cx="8321040" cy="0"/>
+          </a:xfrm>
+          <a:prstGeom prst="line">
+            <a:avLst/>
+          </a:prstGeom>
+          <a:noFill/>
+          <a:ln w="12700">
+            <a:solidFill>
+              <a:srgbClr val="E7E5E4"/>
+            </a:solidFill>
+            <a:prstDash val="solid"/>
+          </a:ln>
+        </p:spPr>
+      </p:sp>
+      <p:sp>
+        <p:nvSpPr>
+          <p:cNvPr id="5" name="Text 3"/>
+          <p:cNvSpPr/>
+          <p:nvPr/>
+        </p:nvSpPr>
+        <p:spPr>
+          <a:xfrm>
+            <a:off x="411480" y="4864608"/>
+            <a:ext cx="8321040" cy="237744"/>
           </a:xfrm>
           <a:prstGeom prst="rect">
             <a:avLst/>
@@ -3637,14 +6021,291 @@
               <a:buNone/>
             </a:pPr>
             <a:r>
-              <a:rPr lang="en-US" sz="800" dirty="0">
+              <a:rPr lang="en-US" sz="750" dirty="0">
                 <a:solidFill>
                   <a:srgbClr val="AAAAAA"/>
                 </a:solidFill>
+                <a:latin typeface="Arial" pitchFamily="34" charset="0"/>
+                <a:ea typeface="Arial" pitchFamily="34" charset="-122"/>
+                <a:cs typeface="Arial" pitchFamily="34" charset="-120"/>
               </a:rPr>
               <a:t>Lesson Forge Pro (owner) — This content is educational material only and does not constitute financial, investment, or trading advice.</a:t>
             </a:r>
-            <a:endParaRPr lang="en-US" sz="800" dirty="0"/>
+            <a:endParaRPr lang="en-US" sz="750" dirty="0"/>
+          </a:p>
+        </p:txBody>
+      </p:sp>
+      <p:sp>
+        <p:nvSpPr>
+          <p:cNvPr id="6" name="Text 4"/>
+          <p:cNvSpPr/>
+          <p:nvPr/>
+        </p:nvSpPr>
+        <p:spPr>
+          <a:xfrm>
+            <a:off x="731520" y="1234440"/>
+            <a:ext cx="7680960" cy="3383280"/>
+          </a:xfrm>
+          <a:prstGeom prst="rect">
+            <a:avLst/>
+          </a:prstGeom>
+          <a:noFill/>
+          <a:ln/>
+        </p:spPr>
+        <p:txBody>
+          <a:bodyPr wrap="square" rtlCol="0" anchor="t"/>
+          <a:lstStyle/>
+          <a:p>
+            <a:pPr marL="177800" indent="-177800">
+              <a:spcAft>
+                <a:spcPts val="1000"/>
+              </a:spcAft>
+              <a:buSzPct val="100000"/>
+              <a:buChar char="▪"/>
+            </a:pPr>
+            <a:r>
+              <a:rPr lang="en-US" sz="1600" dirty="0">
+                <a:solidFill>
+                  <a:srgbClr val="1C1917"/>
+                </a:solidFill>
+                <a:latin typeface="Arial" pitchFamily="34" charset="0"/>
+                <a:ea typeface="Arial" pitchFamily="34" charset="-122"/>
+                <a:cs typeface="Arial" pitchFamily="34" charset="-120"/>
+              </a:rPr>
+              <a:t>Core Definitions: Model, Model Risk, Model Audit</a:t>
+            </a:r>
+            <a:endParaRPr lang="en-US" sz="1600" dirty="0"/>
+          </a:p>
+          <a:p>
+            <a:pPr marL="177800" indent="-177800">
+              <a:spcAft>
+                <a:spcPts val="1000"/>
+              </a:spcAft>
+              <a:buSzPct val="100000"/>
+              <a:buChar char="▪"/>
+            </a:pPr>
+            <a:r>
+              <a:rPr lang="en-US" sz="1600" dirty="0">
+                <a:solidFill>
+                  <a:srgbClr val="1C1917"/>
+                </a:solidFill>
+                <a:latin typeface="Arial" pitchFamily="34" charset="0"/>
+                <a:ea typeface="Arial" pitchFamily="34" charset="-122"/>
+                <a:cs typeface="Arial" pitchFamily="34" charset="-120"/>
+              </a:rPr>
+              <a:t>Where Model Audit Fits: Three Lines of Defence</a:t>
+            </a:r>
+            <a:endParaRPr lang="en-US" sz="1600" dirty="0"/>
+          </a:p>
+          <a:p>
+            <a:pPr marL="177800" indent="-177800">
+              <a:spcAft>
+                <a:spcPts val="1000"/>
+              </a:spcAft>
+              <a:buSzPct val="100000"/>
+              <a:buChar char="▪"/>
+            </a:pPr>
+            <a:r>
+              <a:rPr lang="en-US" sz="1600" dirty="0">
+                <a:solidFill>
+                  <a:srgbClr val="1C1917"/>
+                </a:solidFill>
+                <a:latin typeface="Arial" pitchFamily="34" charset="0"/>
+                <a:ea typeface="Arial" pitchFamily="34" charset="-122"/>
+                <a:cs typeface="Arial" pitchFamily="34" charset="-120"/>
+              </a:rPr>
+              <a:t>Key Notation and the Fundamental Audit Identity</a:t>
+            </a:r>
+            <a:endParaRPr lang="en-US" sz="1600" dirty="0"/>
+          </a:p>
+          <a:p>
+            <a:pPr marL="177800" indent="-177800">
+              <a:spcAft>
+                <a:spcPts val="1000"/>
+              </a:spcAft>
+              <a:buSzPct val="100000"/>
+              <a:buChar char="▪"/>
+            </a:pPr>
+            <a:r>
+              <a:rPr lang="en-US" sz="1600" dirty="0">
+                <a:solidFill>
+                  <a:srgbClr val="1C1917"/>
+                </a:solidFill>
+                <a:latin typeface="Arial" pitchFamily="34" charset="0"/>
+                <a:ea typeface="Arial" pitchFamily="34" charset="-122"/>
+                <a:cs typeface="Arial" pitchFamily="34" charset="-120"/>
+              </a:rPr>
+              <a:t>Terminology Applied: DCF Treasury Model Example</a:t>
+            </a:r>
+            <a:endParaRPr lang="en-US" sz="1600" dirty="0"/>
+          </a:p>
+          <a:p>
+            <a:pPr marL="177800" indent="-177800">
+              <a:spcAft>
+                <a:spcPts val="1000"/>
+              </a:spcAft>
+              <a:buSzPct val="100000"/>
+              <a:buChar char="▪"/>
+            </a:pPr>
+            <a:r>
+              <a:rPr lang="en-US" sz="1600" dirty="0">
+                <a:solidFill>
+                  <a:srgbClr val="1C1917"/>
+                </a:solidFill>
+                <a:latin typeface="Arial" pitchFamily="34" charset="0"/>
+                <a:ea typeface="Arial" pitchFamily="34" charset="-122"/>
+                <a:cs typeface="Arial" pitchFamily="34" charset="-120"/>
+              </a:rPr>
+              <a:t>Standard Audit Procedure: Inputs Required</a:t>
+            </a:r>
+            <a:endParaRPr lang="en-US" sz="1600" dirty="0"/>
+          </a:p>
+          <a:p>
+            <a:pPr marL="177800" indent="-177800">
+              <a:spcAft>
+                <a:spcPts val="1000"/>
+              </a:spcAft>
+              <a:buSzPct val="100000"/>
+              <a:buChar char="▪"/>
+            </a:pPr>
+            <a:r>
+              <a:rPr lang="en-US" sz="1600" dirty="0">
+                <a:solidFill>
+                  <a:srgbClr val="1C1917"/>
+                </a:solidFill>
+                <a:latin typeface="Arial" pitchFamily="34" charset="0"/>
+                <a:ea typeface="Arial" pitchFamily="34" charset="-122"/>
+                <a:cs typeface="Arial" pitchFamily="34" charset="-120"/>
+              </a:rPr>
+              <a:t>Step-by-Step Audit Procedure</a:t>
+            </a:r>
+            <a:endParaRPr lang="en-US" sz="1600" dirty="0"/>
+          </a:p>
+          <a:p>
+            <a:pPr marL="177800" indent="-177800">
+              <a:spcAft>
+                <a:spcPts val="1000"/>
+              </a:spcAft>
+              <a:buSzPct val="100000"/>
+              <a:buChar char="▪"/>
+            </a:pPr>
+            <a:r>
+              <a:rPr lang="en-US" sz="1600" dirty="0">
+                <a:solidFill>
+                  <a:srgbClr val="1C1917"/>
+                </a:solidFill>
+                <a:latin typeface="Arial" pitchFamily="34" charset="0"/>
+                <a:ea typeface="Arial" pitchFamily="34" charset="-122"/>
+                <a:cs typeface="Arial" pitchFamily="34" charset="-120"/>
+              </a:rPr>
+              <a:t>Worked Example: Catching a $1,198 NPV Error</a:t>
+            </a:r>
+            <a:endParaRPr lang="en-US" sz="1600" dirty="0"/>
+          </a:p>
+          <a:p>
+            <a:pPr marL="177800" indent="-177800">
+              <a:spcAft>
+                <a:spcPts val="1000"/>
+              </a:spcAft>
+              <a:buSzPct val="100000"/>
+              <a:buChar char="▪"/>
+            </a:pPr>
+            <a:r>
+              <a:rPr lang="en-US" sz="1600" dirty="0">
+                <a:solidFill>
+                  <a:srgbClr val="1C1917"/>
+                </a:solidFill>
+                <a:latin typeface="Arial" pitchFamily="34" charset="0"/>
+                <a:ea typeface="Arial" pitchFamily="34" charset="-122"/>
+                <a:cs typeface="Arial" pitchFamily="34" charset="-120"/>
+              </a:rPr>
+              <a:t>Audit Outputs and Final Checks</a:t>
+            </a:r>
+            <a:endParaRPr lang="en-US" sz="1600" dirty="0"/>
+          </a:p>
+          <a:p>
+            <a:pPr marL="177800" indent="-177800">
+              <a:spcAft>
+                <a:spcPts val="1000"/>
+              </a:spcAft>
+              <a:buSzPct val="100000"/>
+              <a:buChar char="▪"/>
+            </a:pPr>
+            <a:r>
+              <a:rPr lang="en-US" sz="1600" dirty="0">
+                <a:solidFill>
+                  <a:srgbClr val="1C1917"/>
+                </a:solidFill>
+                <a:latin typeface="Arial" pitchFamily="34" charset="0"/>
+                <a:ea typeface="Arial" pitchFamily="34" charset="-122"/>
+                <a:cs typeface="Arial" pitchFamily="34" charset="-120"/>
+              </a:rPr>
+              <a:t>Typical Use Cases Across Finance</a:t>
+            </a:r>
+            <a:endParaRPr lang="en-US" sz="1600" dirty="0"/>
+          </a:p>
+          <a:p>
+            <a:pPr marL="177800" indent="-177800">
+              <a:spcAft>
+                <a:spcPts val="1000"/>
+              </a:spcAft>
+              <a:buSzPct val="100000"/>
+              <a:buChar char="▪"/>
+            </a:pPr>
+            <a:r>
+              <a:rPr lang="en-US" sz="1600" dirty="0">
+                <a:solidFill>
+                  <a:srgbClr val="1C1917"/>
+                </a:solidFill>
+                <a:latin typeface="Arial" pitchFamily="34" charset="0"/>
+                <a:ea typeface="Arial" pitchFamily="34" charset="-122"/>
+                <a:cs typeface="Arial" pitchFamily="34" charset="-120"/>
+              </a:rPr>
+              <a:t>Common Modelling Mistakes</a:t>
+            </a:r>
+            <a:endParaRPr lang="en-US" sz="1600" dirty="0"/>
+          </a:p>
+          <a:p>
+            <a:pPr marL="177800" indent="-177800">
+              <a:spcAft>
+                <a:spcPts val="1000"/>
+              </a:spcAft>
+              <a:buSzPct val="100000"/>
+              <a:buChar char="▪"/>
+            </a:pPr>
+            <a:r>
+              <a:rPr lang="en-US" sz="1600" dirty="0">
+                <a:solidFill>
+                  <a:srgbClr val="1C1917"/>
+                </a:solidFill>
+                <a:latin typeface="Arial" pitchFamily="34" charset="0"/>
+                <a:ea typeface="Arial" pitchFamily="34" charset="-122"/>
+                <a:cs typeface="Arial" pitchFamily="34" charset="-120"/>
+              </a:rPr>
+              <a:t>Sanity Checks Every Auditor Must Apply</a:t>
+            </a:r>
+            <a:endParaRPr lang="en-US" sz="1600" dirty="0"/>
+          </a:p>
+          <a:p>
+            <a:pPr marL="177800" indent="-177800">
+              <a:spcAft>
+                <a:spcPts val="1000"/>
+              </a:spcAft>
+              <a:buSzPct val="100000"/>
+              <a:buChar char="▪"/>
+            </a:pPr>
+            <a:r>
+              <a:rPr lang="en-US" sz="1600" dirty="0">
+                <a:solidFill>
+                  <a:srgbClr val="1C1917"/>
+                </a:solidFill>
+                <a:latin typeface="Arial" pitchFamily="34" charset="0"/>
+                <a:ea typeface="Arial" pitchFamily="34" charset="-122"/>
+                <a:cs typeface="Arial" pitchFamily="34" charset="-120"/>
+              </a:rPr>
+              <a:t>Worked Example: Correcting a Rate-Period Mismatch in DCF</a:t>
+            </a:r>
+            <a:endParaRPr lang="en-US" sz="1600" dirty="0"/>
           </a:p>
         </p:txBody>
       </p:sp>
@@ -3656,9 +6317,16 @@
 </p:sld>
 </file>
 
-<file path=ppt/slides/slide9.xml><?xml version="1.0" encoding="utf-8"?>
+<file path=ppt/slides/slide3.xml><?xml version="1.0" encoding="utf-8"?>
 <p:sld xmlns:a="http://schemas.openxmlformats.org/drawingml/2006/main" xmlns:r="http://schemas.openxmlformats.org/officeDocument/2006/relationships" xmlns:p="http://schemas.openxmlformats.org/presentationml/2006/main">
-  <p:cSld name="Slide 9">
+  <p:cSld name="Slide 3">
+    <p:bg>
+      <p:bgPr>
+        <a:solidFill>
+          <a:srgbClr val="FFFFFF"/>
+        </a:solidFill>
+      </p:bgPr>
+    </p:bg>
     <p:spTree>
       <p:nvGrpSpPr>
         <p:cNvPr id="1" name=""/>
@@ -3675,14 +6343,34 @@
       </p:grpSpPr>
       <p:sp>
         <p:nvSpPr>
-          <p:cNvPr id="2" name="Text 0"/>
-          <p:cNvSpPr/>
-          <p:nvPr/>
-        </p:nvSpPr>
-        <p:spPr>
-          <a:xfrm>
-            <a:off x="457200" y="320040"/>
-            <a:ext cx="8229600" cy="731520"/>
+          <p:cNvPr id="2" name="Shape 0"/>
+          <p:cNvSpPr/>
+          <p:nvPr/>
+        </p:nvSpPr>
+        <p:spPr>
+          <a:xfrm>
+            <a:off x="411480" y="402336"/>
+            <a:ext cx="82296" cy="329184"/>
+          </a:xfrm>
+          <a:prstGeom prst="rect">
+            <a:avLst/>
+          </a:prstGeom>
+          <a:solidFill>
+            <a:srgbClr val="B45309"/>
+          </a:solidFill>
+          <a:ln/>
+        </p:spPr>
+      </p:sp>
+      <p:sp>
+        <p:nvSpPr>
+          <p:cNvPr id="3" name="Text 1"/>
+          <p:cNvSpPr/>
+          <p:nvPr/>
+        </p:nvSpPr>
+        <p:spPr>
+          <a:xfrm>
+            <a:off x="566928" y="292608"/>
+            <a:ext cx="8138160" cy="548640"/>
           </a:xfrm>
           <a:prstGeom prst="rect">
             <a:avLst/>
@@ -3698,27 +6386,92 @@
               <a:buNone/>
             </a:pPr>
             <a:r>
-              <a:rPr lang="en-US" sz="2400" b="1" dirty="0">
-                <a:solidFill>
-                  <a:srgbClr val="B45309"/>
-                </a:solidFill>
-              </a:rPr>
-              <a:t>Developing Risk Management Strategies (0:45 - 1:05)</a:t>
-            </a:r>
-            <a:endParaRPr lang="en-US" sz="2400" dirty="0"/>
-          </a:p>
-        </p:txBody>
-      </p:sp>
-      <p:sp>
-        <p:nvSpPr>
-          <p:cNvPr id="3" name="Text 1"/>
-          <p:cNvSpPr/>
-          <p:nvPr/>
-        </p:nvSpPr>
-        <p:spPr>
-          <a:xfrm>
-            <a:off x="640080" y="1188720"/>
-            <a:ext cx="7863840" cy="3291840"/>
+              <a:rPr lang="en-US" sz="2100" b="1" dirty="0">
+                <a:solidFill>
+                  <a:srgbClr val="1C1917"/>
+                </a:solidFill>
+                <a:latin typeface="Arial" pitchFamily="34" charset="0"/>
+                <a:ea typeface="Arial" pitchFamily="34" charset="-122"/>
+                <a:cs typeface="Arial" pitchFamily="34" charset="-120"/>
+              </a:rPr>
+              <a:t>Core Definitions: Model, Model Risk, Model Audit</a:t>
+            </a:r>
+            <a:endParaRPr lang="en-US" sz="2100" dirty="0"/>
+          </a:p>
+        </p:txBody>
+      </p:sp>
+      <p:sp>
+        <p:nvSpPr>
+          <p:cNvPr id="4" name="Shape 2"/>
+          <p:cNvSpPr/>
+          <p:nvPr/>
+        </p:nvSpPr>
+        <p:spPr>
+          <a:xfrm>
+            <a:off x="411480" y="960120"/>
+            <a:ext cx="8321040" cy="0"/>
+          </a:xfrm>
+          <a:prstGeom prst="line">
+            <a:avLst/>
+          </a:prstGeom>
+          <a:noFill/>
+          <a:ln w="12700">
+            <a:solidFill>
+              <a:srgbClr val="E7E5E4"/>
+            </a:solidFill>
+            <a:prstDash val="solid"/>
+          </a:ln>
+        </p:spPr>
+      </p:sp>
+      <p:sp>
+        <p:nvSpPr>
+          <p:cNvPr id="5" name="Text 3"/>
+          <p:cNvSpPr/>
+          <p:nvPr/>
+        </p:nvSpPr>
+        <p:spPr>
+          <a:xfrm>
+            <a:off x="411480" y="4864608"/>
+            <a:ext cx="8321040" cy="237744"/>
+          </a:xfrm>
+          <a:prstGeom prst="rect">
+            <a:avLst/>
+          </a:prstGeom>
+          <a:noFill/>
+          <a:ln/>
+        </p:spPr>
+        <p:txBody>
+          <a:bodyPr wrap="square" rtlCol="0" anchor="ctr"/>
+          <a:lstStyle/>
+          <a:p>
+            <a:pPr indent="0" marL="0">
+              <a:buNone/>
+            </a:pPr>
+            <a:r>
+              <a:rPr lang="en-US" sz="750" dirty="0">
+                <a:solidFill>
+                  <a:srgbClr val="AAAAAA"/>
+                </a:solidFill>
+                <a:latin typeface="Arial" pitchFamily="34" charset="0"/>
+                <a:ea typeface="Arial" pitchFamily="34" charset="-122"/>
+                <a:cs typeface="Arial" pitchFamily="34" charset="-120"/>
+              </a:rPr>
+              <a:t>Lesson Forge Pro (owner) — This content is educational material only and does not constitute financial, investment, or trading advice.</a:t>
+            </a:r>
+            <a:endParaRPr lang="en-US" sz="750" dirty="0"/>
+          </a:p>
+        </p:txBody>
+      </p:sp>
+      <p:sp>
+        <p:nvSpPr>
+          <p:cNvPr id="6" name="Text 4"/>
+          <p:cNvSpPr/>
+          <p:nvPr/>
+        </p:nvSpPr>
+        <p:spPr>
+          <a:xfrm>
+            <a:off x="731520" y="1188720"/>
+            <a:ext cx="7680960" cy="2743200"/>
           </a:xfrm>
           <a:prstGeom prst="rect">
             <a:avLst/>
@@ -3730,107 +6483,513 @@
           <a:bodyPr wrap="square" rtlCol="0" anchor="t"/>
           <a:lstStyle/>
           <a:p>
-            <a:pPr marL="342900" indent="-342900">
+            <a:pPr marL="152400" indent="-152400">
+              <a:spcAft>
+                <a:spcPts val="800"/>
+              </a:spcAft>
               <a:buSzPct val="100000"/>
               <a:buChar char="•"/>
             </a:pPr>
             <a:r>
-              <a:rPr lang="en-US" sz="1600" dirty="0">
-                <a:solidFill>
-                  <a:srgbClr val="333333"/>
-                </a:solidFill>
-              </a:rPr>
-              <a:t>Developing risk management strategies involves identifying potential risks and taking corrective action to mitigate them. It's like having a fire evacuation pla</a:t>
-            </a:r>
-            <a:endParaRPr lang="en-US" sz="1600" dirty="0"/>
-          </a:p>
-          <a:p>
-            <a:pPr marL="342900" indent="-342900">
+              <a:rPr lang="en-US" sz="1500" dirty="0">
+                <a:solidFill>
+                  <a:srgbClr val="1C1917"/>
+                </a:solidFill>
+                <a:latin typeface="Arial" pitchFamily="34" charset="0"/>
+                <a:ea typeface="Arial" pitchFamily="34" charset="-122"/>
+                <a:cs typeface="Arial" pitchFamily="34" charset="-120"/>
+              </a:rPr>
+              <a:t>A model maps inputs and assumptions to financial outputs via quantitative logic.</a:t>
+            </a:r>
+            <a:endParaRPr lang="en-US" sz="1500" dirty="0"/>
+          </a:p>
+          <a:p>
+            <a:pPr marL="152400" indent="-152400">
+              <a:spcAft>
+                <a:spcPts val="800"/>
+              </a:spcAft>
               <a:buSzPct val="100000"/>
               <a:buChar char="•"/>
             </a:pPr>
             <a:r>
-              <a:rPr lang="en-US" sz="1600" dirty="0">
-                <a:solidFill>
-                  <a:srgbClr val="333333"/>
-                </a:solidFill>
-              </a:rPr>
-              <a:t>Here are some steps to follow when developing risk management strategies:</a:t>
-            </a:r>
-            <a:endParaRPr lang="en-US" sz="1600" dirty="0"/>
-          </a:p>
-          <a:p>
-            <a:pPr marL="342900" indent="-342900">
+              <a:rPr lang="en-US" sz="1500" dirty="0">
+                <a:solidFill>
+                  <a:srgbClr val="1C1917"/>
+                </a:solidFill>
+                <a:latin typeface="Arial" pitchFamily="34" charset="0"/>
+                <a:ea typeface="Arial" pitchFamily="34" charset="-122"/>
+                <a:cs typeface="Arial" pitchFamily="34" charset="-120"/>
+              </a:rPr>
+              <a:t>Model risk arises from fundamental errors (wrong theory) or implementation errors (faulty code/data).</a:t>
+            </a:r>
+            <a:endParaRPr lang="en-US" sz="1500" dirty="0"/>
+          </a:p>
+          <a:p>
+            <a:pPr marL="152400" indent="-152400">
+              <a:spcAft>
+                <a:spcPts val="800"/>
+              </a:spcAft>
               <a:buSzPct val="100000"/>
               <a:buChar char="•"/>
             </a:pPr>
             <a:r>
-              <a:rPr lang="en-US" sz="1600" dirty="0">
-                <a:solidFill>
-                  <a:srgbClr val="333333"/>
-                </a:solidFill>
-              </a:rPr>
-              <a:t>1. Identify potential risks and prioritize them based on their likelihood and impact.</a:t>
-            </a:r>
-            <a:endParaRPr lang="en-US" sz="1600" dirty="0"/>
-          </a:p>
-          <a:p>
-            <a:pPr marL="342900" indent="-342900">
+              <a:rPr lang="en-US" sz="1500" dirty="0">
+                <a:solidFill>
+                  <a:srgbClr val="1C1917"/>
+                </a:solidFill>
+                <a:latin typeface="Arial" pitchFamily="34" charset="0"/>
+                <a:ea typeface="Arial" pitchFamily="34" charset="-122"/>
+                <a:cs typeface="Arial" pitchFamily="34" charset="-120"/>
+              </a:rPr>
+              <a:t>SR 11-7 and SS3/18 are the key regulatory frameworks governing model risk.</a:t>
+            </a:r>
+            <a:endParaRPr lang="en-US" sz="1500" dirty="0"/>
+          </a:p>
+          <a:p>
+            <a:pPr marL="152400" indent="-152400">
+              <a:spcAft>
+                <a:spcPts val="800"/>
+              </a:spcAft>
               <a:buSzPct val="100000"/>
               <a:buChar char="•"/>
             </a:pPr>
             <a:r>
-              <a:rPr lang="en-US" sz="1600" dirty="0">
-                <a:solidFill>
-                  <a:srgbClr val="333333"/>
-                </a:solidFill>
-              </a:rPr>
-              <a:t>2. Develop corrective action plans to mitigate each risk.</a:t>
-            </a:r>
-            <a:endParaRPr lang="en-US" sz="1600" dirty="0"/>
-          </a:p>
-          <a:p>
-            <a:pPr marL="342900" indent="-342900">
+              <a:rPr lang="en-US" sz="1500" dirty="0">
+                <a:solidFill>
+                  <a:srgbClr val="1C1917"/>
+                </a:solidFill>
+                <a:latin typeface="Arial" pitchFamily="34" charset="0"/>
+                <a:ea typeface="Arial" pitchFamily="34" charset="-122"/>
+                <a:cs typeface="Arial" pitchFamily="34" charset="-120"/>
+              </a:rPr>
+              <a:t>Model audit is an independent, structured review of conceptual soundness and implementation.</a:t>
+            </a:r>
+            <a:endParaRPr lang="en-US" sz="1500" dirty="0"/>
+          </a:p>
+          <a:p>
+            <a:pPr marL="152400" indent="-152400">
+              <a:spcAft>
+                <a:spcPts val="800"/>
+              </a:spcAft>
               <a:buSzPct val="100000"/>
               <a:buChar char="•"/>
             </a:pPr>
             <a:r>
-              <a:rPr lang="en-US" sz="1600" dirty="0">
-                <a:solidFill>
-                  <a:srgbClr val="333333"/>
-                </a:solidFill>
-              </a:rPr>
-              <a:t>3. Monitor and review your risk management strategies regularly to ensure they are effective.</a:t>
-            </a:r>
-            <a:endParaRPr lang="en-US" sz="1600" dirty="0"/>
-          </a:p>
-          <a:p>
-            <a:pPr marL="342900" indent="-342900">
+              <a:rPr lang="en-US" sz="1500" dirty="0">
+                <a:solidFill>
+                  <a:srgbClr val="1C1917"/>
+                </a:solidFill>
+                <a:latin typeface="Arial" pitchFamily="34" charset="0"/>
+                <a:ea typeface="Arial" pitchFamily="34" charset="-122"/>
+                <a:cs typeface="Arial" pitchFamily="34" charset="-120"/>
+              </a:rPr>
+              <a:t>Ambiguous terminology is itself a source of model risk—precise vocabulary is essential.</a:t>
+            </a:r>
+            <a:endParaRPr lang="en-US" sz="1500" dirty="0"/>
+          </a:p>
+        </p:txBody>
+      </p:sp>
+      <p:sp>
+        <p:nvSpPr>
+          <p:cNvPr id="7" name="Shape 5"/>
+          <p:cNvSpPr/>
+          <p:nvPr/>
+        </p:nvSpPr>
+        <p:spPr>
+          <a:xfrm>
+            <a:off x="731520" y="4041648"/>
+            <a:ext cx="7680960" cy="566928"/>
+          </a:xfrm>
+          <a:prstGeom prst="roundRect">
+            <a:avLst>
+              <a:gd name="adj" fmla="val 12903"/>
+            </a:avLst>
+          </a:prstGeom>
+          <a:solidFill>
+            <a:srgbClr val="B45309">
+              <a:alpha val="12000"/>
+            </a:srgbClr>
+          </a:solidFill>
+          <a:ln w="12700">
+            <a:solidFill>
+              <a:srgbClr val="B45309"/>
+            </a:solidFill>
+            <a:prstDash val="solid"/>
+          </a:ln>
+        </p:spPr>
+      </p:sp>
+      <p:sp>
+        <p:nvSpPr>
+          <p:cNvPr id="8" name="Text 6"/>
+          <p:cNvSpPr/>
+          <p:nvPr/>
+        </p:nvSpPr>
+        <p:spPr>
+          <a:xfrm>
+            <a:off x="868680" y="4087368"/>
+            <a:ext cx="7406640" cy="475488"/>
+          </a:xfrm>
+          <a:prstGeom prst="rect">
+            <a:avLst/>
+          </a:prstGeom>
+          <a:noFill/>
+          <a:ln/>
+        </p:spPr>
+        <p:txBody>
+          <a:bodyPr wrap="square" rtlCol="0" anchor="ctr"/>
+          <a:lstStyle/>
+          <a:p>
+            <a:pPr indent="0" marL="0">
+              <a:buNone/>
+            </a:pPr>
+            <a:r>
+              <a:rPr lang="en-US" sz="1100" b="1" dirty="0">
+                <a:solidFill>
+                  <a:srgbClr val="B45309"/>
+                </a:solidFill>
+                <a:latin typeface="Arial" pitchFamily="34" charset="0"/>
+                <a:ea typeface="Arial" pitchFamily="34" charset="-122"/>
+                <a:cs typeface="Arial" pitchFamily="34" charset="-120"/>
+              </a:rPr>
+              <a:t>Takeaway  </a:t>
+            </a:r>
+            <a:pPr indent="0" marL="0">
+              <a:buNone/>
+            </a:pPr>
+            <a:r>
+              <a:rPr lang="en-US" sz="1150" dirty="0">
+                <a:solidFill>
+                  <a:srgbClr val="1C1917"/>
+                </a:solidFill>
+                <a:latin typeface="Arial" pitchFamily="34" charset="0"/>
+                <a:ea typeface="Arial" pitchFamily="34" charset="-122"/>
+                <a:cs typeface="Arial" pitchFamily="34" charset="-120"/>
+              </a:rPr>
+              <a:t>Model risk has two distinct regulatory sources—theory errors and implementation errors—and audit exists to identify both.</a:t>
+            </a:r>
+            <a:endParaRPr lang="en-US" sz="1100" dirty="0"/>
+          </a:p>
+        </p:txBody>
+      </p:sp>
+    </p:spTree>
+  </p:cSld>
+  <p:clrMapOvr>
+    <a:masterClrMapping/>
+  </p:clrMapOvr>
+</p:sld>
+</file>
+
+<file path=ppt/slides/slide4.xml><?xml version="1.0" encoding="utf-8"?>
+<p:sld xmlns:a="http://schemas.openxmlformats.org/drawingml/2006/main" xmlns:r="http://schemas.openxmlformats.org/officeDocument/2006/relationships" xmlns:p="http://schemas.openxmlformats.org/presentationml/2006/main">
+  <p:cSld name="Slide 4">
+    <p:bg>
+      <p:bgPr>
+        <a:solidFill>
+          <a:srgbClr val="FFFFFF"/>
+        </a:solidFill>
+      </p:bgPr>
+    </p:bg>
+    <p:spTree>
+      <p:nvGrpSpPr>
+        <p:cNvPr id="1" name=""/>
+        <p:cNvGrpSpPr/>
+        <p:nvPr/>
+      </p:nvGrpSpPr>
+      <p:grpSpPr>
+        <a:xfrm>
+          <a:off x="0" y="0"/>
+          <a:ext cx="0" cy="0"/>
+          <a:chOff x="0" y="0"/>
+          <a:chExt cx="0" cy="0"/>
+        </a:xfrm>
+      </p:grpSpPr>
+      <p:sp>
+        <p:nvSpPr>
+          <p:cNvPr id="2" name="Shape 0"/>
+          <p:cNvSpPr/>
+          <p:nvPr/>
+        </p:nvSpPr>
+        <p:spPr>
+          <a:xfrm>
+            <a:off x="411480" y="402336"/>
+            <a:ext cx="82296" cy="329184"/>
+          </a:xfrm>
+          <a:prstGeom prst="rect">
+            <a:avLst/>
+          </a:prstGeom>
+          <a:solidFill>
+            <a:srgbClr val="B45309"/>
+          </a:solidFill>
+          <a:ln/>
+        </p:spPr>
+      </p:sp>
+      <p:sp>
+        <p:nvSpPr>
+          <p:cNvPr id="3" name="Text 1"/>
+          <p:cNvSpPr/>
+          <p:nvPr/>
+        </p:nvSpPr>
+        <p:spPr>
+          <a:xfrm>
+            <a:off x="566928" y="292608"/>
+            <a:ext cx="8138160" cy="548640"/>
+          </a:xfrm>
+          <a:prstGeom prst="rect">
+            <a:avLst/>
+          </a:prstGeom>
+          <a:noFill/>
+          <a:ln/>
+        </p:spPr>
+        <p:txBody>
+          <a:bodyPr wrap="square" rtlCol="0" anchor="ctr"/>
+          <a:lstStyle/>
+          <a:p>
+            <a:pPr indent="0" marL="0">
+              <a:buNone/>
+            </a:pPr>
+            <a:r>
+              <a:rPr lang="en-US" sz="2100" b="1" dirty="0">
+                <a:solidFill>
+                  <a:srgbClr val="1C1917"/>
+                </a:solidFill>
+                <a:latin typeface="Arial" pitchFamily="34" charset="0"/>
+                <a:ea typeface="Arial" pitchFamily="34" charset="-122"/>
+                <a:cs typeface="Arial" pitchFamily="34" charset="-120"/>
+              </a:rPr>
+              <a:t>Where Model Audit Fits: Three Lines of Defence</a:t>
+            </a:r>
+            <a:endParaRPr lang="en-US" sz="2100" dirty="0"/>
+          </a:p>
+        </p:txBody>
+      </p:sp>
+      <p:sp>
+        <p:nvSpPr>
+          <p:cNvPr id="4" name="Shape 2"/>
+          <p:cNvSpPr/>
+          <p:nvPr/>
+        </p:nvSpPr>
+        <p:spPr>
+          <a:xfrm>
+            <a:off x="411480" y="960120"/>
+            <a:ext cx="8321040" cy="0"/>
+          </a:xfrm>
+          <a:prstGeom prst="line">
+            <a:avLst/>
+          </a:prstGeom>
+          <a:noFill/>
+          <a:ln w="12700">
+            <a:solidFill>
+              <a:srgbClr val="E7E5E4"/>
+            </a:solidFill>
+            <a:prstDash val="solid"/>
+          </a:ln>
+        </p:spPr>
+      </p:sp>
+      <p:sp>
+        <p:nvSpPr>
+          <p:cNvPr id="5" name="Text 3"/>
+          <p:cNvSpPr/>
+          <p:nvPr/>
+        </p:nvSpPr>
+        <p:spPr>
+          <a:xfrm>
+            <a:off x="411480" y="4864608"/>
+            <a:ext cx="8321040" cy="237744"/>
+          </a:xfrm>
+          <a:prstGeom prst="rect">
+            <a:avLst/>
+          </a:prstGeom>
+          <a:noFill/>
+          <a:ln/>
+        </p:spPr>
+        <p:txBody>
+          <a:bodyPr wrap="square" rtlCol="0" anchor="ctr"/>
+          <a:lstStyle/>
+          <a:p>
+            <a:pPr indent="0" marL="0">
+              <a:buNone/>
+            </a:pPr>
+            <a:r>
+              <a:rPr lang="en-US" sz="750" dirty="0">
+                <a:solidFill>
+                  <a:srgbClr val="AAAAAA"/>
+                </a:solidFill>
+                <a:latin typeface="Arial" pitchFamily="34" charset="0"/>
+                <a:ea typeface="Arial" pitchFamily="34" charset="-122"/>
+                <a:cs typeface="Arial" pitchFamily="34" charset="-120"/>
+              </a:rPr>
+              <a:t>Lesson Forge Pro (owner) — This content is educational material only and does not constitute financial, investment, or trading advice.</a:t>
+            </a:r>
+            <a:endParaRPr lang="en-US" sz="750" dirty="0"/>
+          </a:p>
+        </p:txBody>
+      </p:sp>
+      <p:sp>
+        <p:nvSpPr>
+          <p:cNvPr id="6" name="Text 4"/>
+          <p:cNvSpPr/>
+          <p:nvPr/>
+        </p:nvSpPr>
+        <p:spPr>
+          <a:xfrm>
+            <a:off x="731520" y="1188720"/>
+            <a:ext cx="7680960" cy="2743200"/>
+          </a:xfrm>
+          <a:prstGeom prst="rect">
+            <a:avLst/>
+          </a:prstGeom>
+          <a:noFill/>
+          <a:ln/>
+        </p:spPr>
+        <p:txBody>
+          <a:bodyPr wrap="square" rtlCol="0" anchor="t"/>
+          <a:lstStyle/>
+          <a:p>
+            <a:pPr marL="152400" indent="-152400">
+              <a:spcAft>
+                <a:spcPts val="800"/>
+              </a:spcAft>
               <a:buSzPct val="100000"/>
               <a:buChar char="•"/>
             </a:pPr>
             <a:r>
-              <a:rPr lang="en-US" sz="1600" dirty="0">
-                <a:solidFill>
-                  <a:srgbClr val="333333"/>
-                </a:solidFill>
-              </a:rPr>
-              <a:t>For example, imagine you're building a bridge. You need to ensure that it can withstand strong winds and earthquakes. Similarly, in financial modeling, you need</a:t>
-            </a:r>
-            <a:endParaRPr lang="en-US" sz="1600" dirty="0"/>
-          </a:p>
-        </p:txBody>
-      </p:sp>
-      <p:sp>
-        <p:nvSpPr>
-          <p:cNvPr id="4" name="Text 2"/>
-          <p:cNvSpPr/>
-          <p:nvPr/>
-        </p:nvSpPr>
-        <p:spPr>
-          <a:xfrm>
-            <a:off x="457200" y="4709160"/>
-            <a:ext cx="8229600" cy="320040"/>
+              <a:rPr lang="en-US" sz="1500" dirty="0">
+                <a:solidFill>
+                  <a:srgbClr val="1C1917"/>
+                </a:solidFill>
+                <a:latin typeface="Arial" pitchFamily="34" charset="0"/>
+                <a:ea typeface="Arial" pitchFamily="34" charset="-122"/>
+                <a:cs typeface="Arial" pitchFamily="34" charset="-120"/>
+              </a:rPr>
+              <a:t>First line: model developers build and document.</a:t>
+            </a:r>
+            <a:endParaRPr lang="en-US" sz="1500" dirty="0"/>
+          </a:p>
+          <a:p>
+            <a:pPr marL="152400" indent="-152400">
+              <a:spcAft>
+                <a:spcPts val="800"/>
+              </a:spcAft>
+              <a:buSzPct val="100000"/>
+              <a:buChar char="•"/>
+            </a:pPr>
+            <a:r>
+              <a:rPr lang="en-US" sz="1500" dirty="0">
+                <a:solidFill>
+                  <a:srgbClr val="1C1917"/>
+                </a:solidFill>
+                <a:latin typeface="Arial" pitchFamily="34" charset="0"/>
+                <a:ea typeface="Arial" pitchFamily="34" charset="-122"/>
+                <a:cs typeface="Arial" pitchFamily="34" charset="-120"/>
+              </a:rPr>
+              <a:t>Second line: independent validation teams challenge and audit.</a:t>
+            </a:r>
+            <a:endParaRPr lang="en-US" sz="1500" dirty="0"/>
+          </a:p>
+          <a:p>
+            <a:pPr marL="152400" indent="-152400">
+              <a:spcAft>
+                <a:spcPts val="800"/>
+              </a:spcAft>
+              <a:buSzPct val="100000"/>
+              <a:buChar char="•"/>
+            </a:pPr>
+            <a:r>
+              <a:rPr lang="en-US" sz="1500" dirty="0">
+                <a:solidFill>
+                  <a:srgbClr val="1C1917"/>
+                </a:solidFill>
+                <a:latin typeface="Arial" pitchFamily="34" charset="0"/>
+                <a:ea typeface="Arial" pitchFamily="34" charset="-122"/>
+                <a:cs typeface="Arial" pitchFamily="34" charset="-120"/>
+              </a:rPr>
+              <a:t>Third line: internal audit verifies the governance framework itself.</a:t>
+            </a:r>
+            <a:endParaRPr lang="en-US" sz="1500" dirty="0"/>
+          </a:p>
+          <a:p>
+            <a:pPr marL="152400" indent="-152400">
+              <a:spcAft>
+                <a:spcPts val="800"/>
+              </a:spcAft>
+              <a:buSzPct val="100000"/>
+              <a:buChar char="•"/>
+            </a:pPr>
+            <a:r>
+              <a:rPr lang="en-US" sz="1500" dirty="0">
+                <a:solidFill>
+                  <a:srgbClr val="1C1917"/>
+                </a:solidFill>
+                <a:latin typeface="Arial" pitchFamily="34" charset="0"/>
+                <a:ea typeface="Arial" pitchFamily="34" charset="-122"/>
+                <a:cs typeface="Arial" pitchFamily="34" charset="-120"/>
+              </a:rPr>
+              <a:t>Audited models include option pricers, XVA engines, credit risk, and portfolio tools.</a:t>
+            </a:r>
+            <a:endParaRPr lang="en-US" sz="1500" dirty="0"/>
+          </a:p>
+          <a:p>
+            <a:pPr marL="152400" indent="-152400">
+              <a:spcAft>
+                <a:spcPts val="800"/>
+              </a:spcAft>
+              <a:buSzPct val="100000"/>
+              <a:buChar char="•"/>
+            </a:pPr>
+            <a:r>
+              <a:rPr lang="en-US" sz="1500" dirty="0">
+                <a:solidFill>
+                  <a:srgbClr val="1C1917"/>
+                </a:solidFill>
+                <a:latin typeface="Arial" pitchFamily="34" charset="0"/>
+                <a:ea typeface="Arial" pitchFamily="34" charset="-122"/>
+                <a:cs typeface="Arial" pitchFamily="34" charset="-120"/>
+              </a:rPr>
+              <a:t>Best practice requires separate input, calculation, and output layers for traceability.</a:t>
+            </a:r>
+            <a:endParaRPr lang="en-US" sz="1500" dirty="0"/>
+          </a:p>
+        </p:txBody>
+      </p:sp>
+      <p:sp>
+        <p:nvSpPr>
+          <p:cNvPr id="7" name="Shape 5"/>
+          <p:cNvSpPr/>
+          <p:nvPr/>
+        </p:nvSpPr>
+        <p:spPr>
+          <a:xfrm>
+            <a:off x="731520" y="4041648"/>
+            <a:ext cx="7680960" cy="566928"/>
+          </a:xfrm>
+          <a:prstGeom prst="roundRect">
+            <a:avLst>
+              <a:gd name="adj" fmla="val 12903"/>
+            </a:avLst>
+          </a:prstGeom>
+          <a:solidFill>
+            <a:srgbClr val="B45309">
+              <a:alpha val="12000"/>
+            </a:srgbClr>
+          </a:solidFill>
+          <a:ln w="12700">
+            <a:solidFill>
+              <a:srgbClr val="B45309"/>
+            </a:solidFill>
+            <a:prstDash val="solid"/>
+          </a:ln>
+        </p:spPr>
+      </p:sp>
+      <p:sp>
+        <p:nvSpPr>
+          <p:cNvPr id="8" name="Text 6"/>
+          <p:cNvSpPr/>
+          <p:nvPr/>
+        </p:nvSpPr>
+        <p:spPr>
+          <a:xfrm>
+            <a:off x="868680" y="4087368"/>
+            <a:ext cx="7406640" cy="475488"/>
           </a:xfrm>
           <a:prstGeom prst="rect">
             <a:avLst/>
@@ -3846,14 +7005,2624 @@
               <a:buNone/>
             </a:pPr>
             <a:r>
-              <a:rPr lang="en-US" sz="800" dirty="0">
+              <a:rPr lang="en-US" sz="1100" b="1" dirty="0">
+                <a:solidFill>
+                  <a:srgbClr val="B45309"/>
+                </a:solidFill>
+                <a:latin typeface="Arial" pitchFamily="34" charset="0"/>
+                <a:ea typeface="Arial" pitchFamily="34" charset="-122"/>
+                <a:cs typeface="Arial" pitchFamily="34" charset="-120"/>
+              </a:rPr>
+              <a:t>Takeaway  </a:t>
+            </a:r>
+            <a:pPr indent="0" marL="0">
+              <a:buNone/>
+            </a:pPr>
+            <a:r>
+              <a:rPr lang="en-US" sz="1150" dirty="0">
+                <a:solidFill>
+                  <a:srgbClr val="1C1917"/>
+                </a:solidFill>
+                <a:latin typeface="Arial" pitchFamily="34" charset="0"/>
+                <a:ea typeface="Arial" pitchFamily="34" charset="-122"/>
+                <a:cs typeface="Arial" pitchFamily="34" charset="-120"/>
+              </a:rPr>
+              <a:t>Model audit is a second-line activity that independently challenges first-line model development within a formal governance structure.</a:t>
+            </a:r>
+            <a:endParaRPr lang="en-US" sz="1100" dirty="0"/>
+          </a:p>
+        </p:txBody>
+      </p:sp>
+    </p:spTree>
+  </p:cSld>
+  <p:clrMapOvr>
+    <a:masterClrMapping/>
+  </p:clrMapOvr>
+</p:sld>
+</file>
+
+<file path=ppt/slides/slide5.xml><?xml version="1.0" encoding="utf-8"?>
+<p:sld xmlns:a="http://schemas.openxmlformats.org/drawingml/2006/main" xmlns:r="http://schemas.openxmlformats.org/officeDocument/2006/relationships" xmlns:p="http://schemas.openxmlformats.org/presentationml/2006/main">
+  <p:cSld name="Slide 5">
+    <p:bg>
+      <p:bgPr>
+        <a:solidFill>
+          <a:srgbClr val="FFFFFF"/>
+        </a:solidFill>
+      </p:bgPr>
+    </p:bg>
+    <p:spTree>
+      <p:nvGrpSpPr>
+        <p:cNvPr id="1" name=""/>
+        <p:cNvGrpSpPr/>
+        <p:nvPr/>
+      </p:nvGrpSpPr>
+      <p:grpSpPr>
+        <a:xfrm>
+          <a:off x="0" y="0"/>
+          <a:ext cx="0" cy="0"/>
+          <a:chOff x="0" y="0"/>
+          <a:chExt cx="0" cy="0"/>
+        </a:xfrm>
+      </p:grpSpPr>
+      <p:sp>
+        <p:nvSpPr>
+          <p:cNvPr id="2" name="Shape 0"/>
+          <p:cNvSpPr/>
+          <p:nvPr/>
+        </p:nvSpPr>
+        <p:spPr>
+          <a:xfrm>
+            <a:off x="411480" y="402336"/>
+            <a:ext cx="82296" cy="329184"/>
+          </a:xfrm>
+          <a:prstGeom prst="rect">
+            <a:avLst/>
+          </a:prstGeom>
+          <a:solidFill>
+            <a:srgbClr val="B45309"/>
+          </a:solidFill>
+          <a:ln/>
+        </p:spPr>
+      </p:sp>
+      <p:sp>
+        <p:nvSpPr>
+          <p:cNvPr id="3" name="Text 1"/>
+          <p:cNvSpPr/>
+          <p:nvPr/>
+        </p:nvSpPr>
+        <p:spPr>
+          <a:xfrm>
+            <a:off x="566928" y="292608"/>
+            <a:ext cx="8138160" cy="548640"/>
+          </a:xfrm>
+          <a:prstGeom prst="rect">
+            <a:avLst/>
+          </a:prstGeom>
+          <a:noFill/>
+          <a:ln/>
+        </p:spPr>
+        <p:txBody>
+          <a:bodyPr wrap="square" rtlCol="0" anchor="ctr"/>
+          <a:lstStyle/>
+          <a:p>
+            <a:pPr indent="0" marL="0">
+              <a:buNone/>
+            </a:pPr>
+            <a:r>
+              <a:rPr lang="en-US" sz="2100" b="1" dirty="0">
+                <a:solidFill>
+                  <a:srgbClr val="1C1917"/>
+                </a:solidFill>
+                <a:latin typeface="Arial" pitchFamily="34" charset="0"/>
+                <a:ea typeface="Arial" pitchFamily="34" charset="-122"/>
+                <a:cs typeface="Arial" pitchFamily="34" charset="-120"/>
+              </a:rPr>
+              <a:t>Key Notation and the Fundamental Audit Identity</a:t>
+            </a:r>
+            <a:endParaRPr lang="en-US" sz="2100" dirty="0"/>
+          </a:p>
+        </p:txBody>
+      </p:sp>
+      <p:sp>
+        <p:nvSpPr>
+          <p:cNvPr id="4" name="Shape 2"/>
+          <p:cNvSpPr/>
+          <p:nvPr/>
+        </p:nvSpPr>
+        <p:spPr>
+          <a:xfrm>
+            <a:off x="411480" y="960120"/>
+            <a:ext cx="8321040" cy="0"/>
+          </a:xfrm>
+          <a:prstGeom prst="line">
+            <a:avLst/>
+          </a:prstGeom>
+          <a:noFill/>
+          <a:ln w="12700">
+            <a:solidFill>
+              <a:srgbClr val="E7E5E4"/>
+            </a:solidFill>
+            <a:prstDash val="solid"/>
+          </a:ln>
+        </p:spPr>
+      </p:sp>
+      <p:sp>
+        <p:nvSpPr>
+          <p:cNvPr id="5" name="Text 3"/>
+          <p:cNvSpPr/>
+          <p:nvPr/>
+        </p:nvSpPr>
+        <p:spPr>
+          <a:xfrm>
+            <a:off x="411480" y="4864608"/>
+            <a:ext cx="8321040" cy="237744"/>
+          </a:xfrm>
+          <a:prstGeom prst="rect">
+            <a:avLst/>
+          </a:prstGeom>
+          <a:noFill/>
+          <a:ln/>
+        </p:spPr>
+        <p:txBody>
+          <a:bodyPr wrap="square" rtlCol="0" anchor="ctr"/>
+          <a:lstStyle/>
+          <a:p>
+            <a:pPr indent="0" marL="0">
+              <a:buNone/>
+            </a:pPr>
+            <a:r>
+              <a:rPr lang="en-US" sz="750" dirty="0">
                 <a:solidFill>
                   <a:srgbClr val="AAAAAA"/>
                 </a:solidFill>
+                <a:latin typeface="Arial" pitchFamily="34" charset="0"/>
+                <a:ea typeface="Arial" pitchFamily="34" charset="-122"/>
+                <a:cs typeface="Arial" pitchFamily="34" charset="-120"/>
               </a:rPr>
               <a:t>Lesson Forge Pro (owner) — This content is educational material only and does not constitute financial, investment, or trading advice.</a:t>
             </a:r>
-            <a:endParaRPr lang="en-US" sz="800" dirty="0"/>
+            <a:endParaRPr lang="en-US" sz="750" dirty="0"/>
+          </a:p>
+        </p:txBody>
+      </p:sp>
+      <p:sp>
+        <p:nvSpPr>
+          <p:cNvPr id="6" name="Text 4"/>
+          <p:cNvSpPr/>
+          <p:nvPr/>
+        </p:nvSpPr>
+        <p:spPr>
+          <a:xfrm>
+            <a:off x="731520" y="1188720"/>
+            <a:ext cx="7680960" cy="2743200"/>
+          </a:xfrm>
+          <a:prstGeom prst="rect">
+            <a:avLst/>
+          </a:prstGeom>
+          <a:noFill/>
+          <a:ln/>
+        </p:spPr>
+        <p:txBody>
+          <a:bodyPr wrap="square" rtlCol="0" anchor="t"/>
+          <a:lstStyle/>
+          <a:p>
+            <a:pPr marL="152400" indent="-152400">
+              <a:spcAft>
+                <a:spcPts val="800"/>
+              </a:spcAft>
+              <a:buSzPct val="100000"/>
+              <a:buChar char="•"/>
+            </a:pPr>
+            <a:r>
+              <a:rPr lang="en-US" sz="1500" dirty="0">
+                <a:solidFill>
+                  <a:srgbClr val="1C1917"/>
+                </a:solidFill>
+                <a:latin typeface="Arial" pitchFamily="34" charset="0"/>
+                <a:ea typeface="Arial" pitchFamily="34" charset="-122"/>
+                <a:cs typeface="Arial" pitchFamily="34" charset="-120"/>
+              </a:rPr>
+              <a:t>O = f(I): outputs equal the model function applied to inputs.</a:t>
+            </a:r>
+            <a:endParaRPr lang="en-US" sz="1500" dirty="0"/>
+          </a:p>
+          <a:p>
+            <a:pPr marL="152400" indent="-152400">
+              <a:spcAft>
+                <a:spcPts val="800"/>
+              </a:spcAft>
+              <a:buSzPct val="100000"/>
+              <a:buChar char="•"/>
+            </a:pPr>
+            <a:r>
+              <a:rPr lang="en-US" sz="1500" dirty="0">
+                <a:solidFill>
+                  <a:srgbClr val="1C1917"/>
+                </a:solidFill>
+                <a:latin typeface="Arial" pitchFamily="34" charset="0"/>
+                <a:ea typeface="Arial" pitchFamily="34" charset="-122"/>
+                <a:cs typeface="Arial" pitchFamily="34" charset="-120"/>
+              </a:rPr>
+              <a:t>ε = O_model − O_benchmark quantifies model error against a reference.</a:t>
+            </a:r>
+            <a:endParaRPr lang="en-US" sz="1500" dirty="0"/>
+          </a:p>
+          <a:p>
+            <a:pPr marL="152400" indent="-152400">
+              <a:spcAft>
+                <a:spcPts val="800"/>
+              </a:spcAft>
+              <a:buSzPct val="100000"/>
+              <a:buChar char="•"/>
+            </a:pPr>
+            <a:r>
+              <a:rPr lang="en-US" sz="1500" dirty="0">
+                <a:solidFill>
+                  <a:srgbClr val="1C1917"/>
+                </a:solidFill>
+                <a:latin typeface="Arial" pitchFamily="34" charset="0"/>
+                <a:ea typeface="Arial" pitchFamily="34" charset="-122"/>
+                <a:cs typeface="Arial" pitchFamily="34" charset="-120"/>
+              </a:rPr>
+              <a:t>MR (model risk score) = materiality × likelihood of error.</a:t>
+            </a:r>
+            <a:endParaRPr lang="en-US" sz="1500" dirty="0"/>
+          </a:p>
+          <a:p>
+            <a:pPr marL="152400" indent="-152400">
+              <a:spcAft>
+                <a:spcPts val="800"/>
+              </a:spcAft>
+              <a:buSzPct val="100000"/>
+              <a:buChar char="•"/>
+            </a:pPr>
+            <a:r>
+              <a:rPr lang="en-US" sz="1500" dirty="0">
+                <a:solidFill>
+                  <a:srgbClr val="1C1917"/>
+                </a:solidFill>
+                <a:latin typeface="Arial" pitchFamily="34" charset="0"/>
+                <a:ea typeface="Arial" pitchFamily="34" charset="-122"/>
+                <a:cs typeface="Arial" pitchFamily="34" charset="-120"/>
+              </a:rPr>
+              <a:t>Every audit procedure ultimately aims to bound or explain ε.</a:t>
+            </a:r>
+            <a:endParaRPr lang="en-US" sz="1500" dirty="0"/>
+          </a:p>
+          <a:p>
+            <a:pPr marL="152400" indent="-152400">
+              <a:spcAft>
+                <a:spcPts val="800"/>
+              </a:spcAft>
+              <a:buSzPct val="100000"/>
+              <a:buChar char="•"/>
+            </a:pPr>
+            <a:r>
+              <a:rPr lang="en-US" sz="1500" dirty="0">
+                <a:solidFill>
+                  <a:srgbClr val="1C1917"/>
+                </a:solidFill>
+                <a:latin typeface="Arial" pitchFamily="34" charset="0"/>
+                <a:ea typeface="Arial" pitchFamily="34" charset="-122"/>
+                <a:cs typeface="Arial" pitchFamily="34" charset="-120"/>
+              </a:rPr>
+              <a:t>Consistent notation prevents miscommunication across audit and development teams.</a:t>
+            </a:r>
+            <a:endParaRPr lang="en-US" sz="1500" dirty="0"/>
+          </a:p>
+        </p:txBody>
+      </p:sp>
+      <p:sp>
+        <p:nvSpPr>
+          <p:cNvPr id="7" name="Shape 5"/>
+          <p:cNvSpPr/>
+          <p:nvPr/>
+        </p:nvSpPr>
+        <p:spPr>
+          <a:xfrm>
+            <a:off x="731520" y="4041648"/>
+            <a:ext cx="7680960" cy="566928"/>
+          </a:xfrm>
+          <a:prstGeom prst="roundRect">
+            <a:avLst>
+              <a:gd name="adj" fmla="val 12903"/>
+            </a:avLst>
+          </a:prstGeom>
+          <a:solidFill>
+            <a:srgbClr val="B45309">
+              <a:alpha val="12000"/>
+            </a:srgbClr>
+          </a:solidFill>
+          <a:ln w="12700">
+            <a:solidFill>
+              <a:srgbClr val="B45309"/>
+            </a:solidFill>
+            <a:prstDash val="solid"/>
+          </a:ln>
+        </p:spPr>
+      </p:sp>
+      <p:sp>
+        <p:nvSpPr>
+          <p:cNvPr id="8" name="Text 6"/>
+          <p:cNvSpPr/>
+          <p:nvPr/>
+        </p:nvSpPr>
+        <p:spPr>
+          <a:xfrm>
+            <a:off x="868680" y="4087368"/>
+            <a:ext cx="7406640" cy="475488"/>
+          </a:xfrm>
+          <a:prstGeom prst="rect">
+            <a:avLst/>
+          </a:prstGeom>
+          <a:noFill/>
+          <a:ln/>
+        </p:spPr>
+        <p:txBody>
+          <a:bodyPr wrap="square" rtlCol="0" anchor="ctr"/>
+          <a:lstStyle/>
+          <a:p>
+            <a:pPr indent="0" marL="0">
+              <a:buNone/>
+            </a:pPr>
+            <a:r>
+              <a:rPr lang="en-US" sz="1100" b="1" dirty="0">
+                <a:solidFill>
+                  <a:srgbClr val="B45309"/>
+                </a:solidFill>
+                <a:latin typeface="Arial" pitchFamily="34" charset="0"/>
+                <a:ea typeface="Arial" pitchFamily="34" charset="-122"/>
+                <a:cs typeface="Arial" pitchFamily="34" charset="-120"/>
+              </a:rPr>
+              <a:t>Takeaway  </a:t>
+            </a:r>
+            <a:pPr indent="0" marL="0">
+              <a:buNone/>
+            </a:pPr>
+            <a:r>
+              <a:rPr lang="en-US" sz="1150" dirty="0">
+                <a:solidFill>
+                  <a:srgbClr val="1C1917"/>
+                </a:solidFill>
+                <a:latin typeface="Arial" pitchFamily="34" charset="0"/>
+                <a:ea typeface="Arial" pitchFamily="34" charset="-122"/>
+                <a:cs typeface="Arial" pitchFamily="34" charset="-120"/>
+              </a:rPr>
+              <a:t>The identity O = f(I) ± ε frames every audit task as an effort to measure and explain the error term ε.</a:t>
+            </a:r>
+            <a:endParaRPr lang="en-US" sz="1100" dirty="0"/>
+          </a:p>
+        </p:txBody>
+      </p:sp>
+    </p:spTree>
+  </p:cSld>
+  <p:clrMapOvr>
+    <a:masterClrMapping/>
+  </p:clrMapOvr>
+</p:sld>
+</file>
+
+<file path=ppt/slides/slide6.xml><?xml version="1.0" encoding="utf-8"?>
+<p:sld xmlns:a="http://schemas.openxmlformats.org/drawingml/2006/main" xmlns:r="http://schemas.openxmlformats.org/officeDocument/2006/relationships" xmlns:p="http://schemas.openxmlformats.org/presentationml/2006/main">
+  <p:cSld name="Slide 6">
+    <p:bg>
+      <p:bgPr>
+        <a:solidFill>
+          <a:srgbClr val="FFFFFF"/>
+        </a:solidFill>
+      </p:bgPr>
+    </p:bg>
+    <p:spTree>
+      <p:nvGrpSpPr>
+        <p:cNvPr id="1" name=""/>
+        <p:cNvGrpSpPr/>
+        <p:nvPr/>
+      </p:nvGrpSpPr>
+      <p:grpSpPr>
+        <a:xfrm>
+          <a:off x="0" y="0"/>
+          <a:ext cx="0" cy="0"/>
+          <a:chOff x="0" y="0"/>
+          <a:chExt cx="0" cy="0"/>
+        </a:xfrm>
+      </p:grpSpPr>
+      <p:sp>
+        <p:nvSpPr>
+          <p:cNvPr id="2" name="Shape 0"/>
+          <p:cNvSpPr/>
+          <p:nvPr/>
+        </p:nvSpPr>
+        <p:spPr>
+          <a:xfrm>
+            <a:off x="411480" y="402336"/>
+            <a:ext cx="82296" cy="329184"/>
+          </a:xfrm>
+          <a:prstGeom prst="rect">
+            <a:avLst/>
+          </a:prstGeom>
+          <a:solidFill>
+            <a:srgbClr val="B45309"/>
+          </a:solidFill>
+          <a:ln/>
+        </p:spPr>
+      </p:sp>
+      <p:sp>
+        <p:nvSpPr>
+          <p:cNvPr id="3" name="Text 1"/>
+          <p:cNvSpPr/>
+          <p:nvPr/>
+        </p:nvSpPr>
+        <p:spPr>
+          <a:xfrm>
+            <a:off x="566928" y="292608"/>
+            <a:ext cx="8138160" cy="548640"/>
+          </a:xfrm>
+          <a:prstGeom prst="rect">
+            <a:avLst/>
+          </a:prstGeom>
+          <a:noFill/>
+          <a:ln/>
+        </p:spPr>
+        <p:txBody>
+          <a:bodyPr wrap="square" rtlCol="0" anchor="ctr"/>
+          <a:lstStyle/>
+          <a:p>
+            <a:pPr indent="0" marL="0">
+              <a:buNone/>
+            </a:pPr>
+            <a:r>
+              <a:rPr lang="en-US" sz="2100" b="1" dirty="0">
+                <a:solidFill>
+                  <a:srgbClr val="1C1917"/>
+                </a:solidFill>
+                <a:latin typeface="Arial" pitchFamily="34" charset="0"/>
+                <a:ea typeface="Arial" pitchFamily="34" charset="-122"/>
+                <a:cs typeface="Arial" pitchFamily="34" charset="-120"/>
+              </a:rPr>
+              <a:t>Terminology Applied: DCF Treasury Model Example</a:t>
+            </a:r>
+            <a:endParaRPr lang="en-US" sz="2100" dirty="0"/>
+          </a:p>
+        </p:txBody>
+      </p:sp>
+      <p:sp>
+        <p:nvSpPr>
+          <p:cNvPr id="4" name="Shape 2"/>
+          <p:cNvSpPr/>
+          <p:nvPr/>
+        </p:nvSpPr>
+        <p:spPr>
+          <a:xfrm>
+            <a:off x="411480" y="960120"/>
+            <a:ext cx="8321040" cy="0"/>
+          </a:xfrm>
+          <a:prstGeom prst="line">
+            <a:avLst/>
+          </a:prstGeom>
+          <a:noFill/>
+          <a:ln w="12700">
+            <a:solidFill>
+              <a:srgbClr val="E7E5E4"/>
+            </a:solidFill>
+            <a:prstDash val="solid"/>
+          </a:ln>
+        </p:spPr>
+      </p:sp>
+      <p:sp>
+        <p:nvSpPr>
+          <p:cNvPr id="5" name="Text 3"/>
+          <p:cNvSpPr/>
+          <p:nvPr/>
+        </p:nvSpPr>
+        <p:spPr>
+          <a:xfrm>
+            <a:off x="411480" y="4864608"/>
+            <a:ext cx="8321040" cy="237744"/>
+          </a:xfrm>
+          <a:prstGeom prst="rect">
+            <a:avLst/>
+          </a:prstGeom>
+          <a:noFill/>
+          <a:ln/>
+        </p:spPr>
+        <p:txBody>
+          <a:bodyPr wrap="square" rtlCol="0" anchor="ctr"/>
+          <a:lstStyle/>
+          <a:p>
+            <a:pPr indent="0" marL="0">
+              <a:buNone/>
+            </a:pPr>
+            <a:r>
+              <a:rPr lang="en-US" sz="750" dirty="0">
+                <a:solidFill>
+                  <a:srgbClr val="AAAAAA"/>
+                </a:solidFill>
+                <a:latin typeface="Arial" pitchFamily="34" charset="0"/>
+                <a:ea typeface="Arial" pitchFamily="34" charset="-122"/>
+                <a:cs typeface="Arial" pitchFamily="34" charset="-120"/>
+              </a:rPr>
+              <a:t>Lesson Forge Pro (owner) — This content is educational material only and does not constitute financial, investment, or trading advice.</a:t>
+            </a:r>
+            <a:endParaRPr lang="en-US" sz="750" dirty="0"/>
+          </a:p>
+        </p:txBody>
+      </p:sp>
+      <p:sp>
+        <p:nvSpPr>
+          <p:cNvPr id="6" name="Text 4"/>
+          <p:cNvSpPr/>
+          <p:nvPr/>
+        </p:nvSpPr>
+        <p:spPr>
+          <a:xfrm>
+            <a:off x="731520" y="1188720"/>
+            <a:ext cx="7680960" cy="2743200"/>
+          </a:xfrm>
+          <a:prstGeom prst="rect">
+            <a:avLst/>
+          </a:prstGeom>
+          <a:noFill/>
+          <a:ln/>
+        </p:spPr>
+        <p:txBody>
+          <a:bodyPr wrap="square" rtlCol="0" anchor="t"/>
+          <a:lstStyle/>
+          <a:p>
+            <a:pPr marL="152400" indent="-152400">
+              <a:spcAft>
+                <a:spcPts val="800"/>
+              </a:spcAft>
+              <a:buSzPct val="100000"/>
+              <a:buChar char="•"/>
+            </a:pPr>
+            <a:r>
+              <a:rPr lang="en-US" sz="1500" dirty="0">
+                <a:solidFill>
+                  <a:srgbClr val="1C1917"/>
+                </a:solidFill>
+                <a:latin typeface="Arial" pitchFamily="34" charset="0"/>
+                <a:ea typeface="Arial" pitchFamily="34" charset="-122"/>
+                <a:cs typeface="Arial" pitchFamily="34" charset="-120"/>
+              </a:rPr>
+              <a:t>M is the Excel DCF workbook; purpose is capital budgeting approval.</a:t>
+            </a:r>
+            <a:endParaRPr lang="en-US" sz="1500" dirty="0"/>
+          </a:p>
+          <a:p>
+            <a:pPr marL="152400" indent="-152400">
+              <a:spcAft>
+                <a:spcPts val="800"/>
+              </a:spcAft>
+              <a:buSzPct val="100000"/>
+              <a:buChar char="•"/>
+            </a:pPr>
+            <a:r>
+              <a:rPr lang="en-US" sz="1500" dirty="0">
+                <a:solidFill>
+                  <a:srgbClr val="1C1917"/>
+                </a:solidFill>
+                <a:latin typeface="Arial" pitchFamily="34" charset="0"/>
+                <a:ea typeface="Arial" pitchFamily="34" charset="-122"/>
+                <a:cs typeface="Arial" pitchFamily="34" charset="-120"/>
+              </a:rPr>
+              <a:t>I includes Rf = 3.2%, ERP = 5.5%, β = 0.80, debt weight, tax rate, and cash flows.</a:t>
+            </a:r>
+            <a:endParaRPr lang="en-US" sz="1500" dirty="0"/>
+          </a:p>
+          <a:p>
+            <a:pPr marL="152400" indent="-152400">
+              <a:spcAft>
+                <a:spcPts val="800"/>
+              </a:spcAft>
+              <a:buSzPct val="100000"/>
+              <a:buChar char="•"/>
+            </a:pPr>
+            <a:r>
+              <a:rPr lang="en-US" sz="1500" dirty="0">
+                <a:solidFill>
+                  <a:srgbClr val="1C1917"/>
+                </a:solidFill>
+                <a:latin typeface="Arial" pitchFamily="34" charset="0"/>
+                <a:ea typeface="Arial" pitchFamily="34" charset="-122"/>
+                <a:cs typeface="Arial" pitchFamily="34" charset="-120"/>
+              </a:rPr>
+              <a:t>CAPM gives Ke = 7.6%; blended WACC = 5.76%.</a:t>
+            </a:r>
+            <a:endParaRPr lang="en-US" sz="1500" dirty="0"/>
+          </a:p>
+          <a:p>
+            <a:pPr marL="152400" indent="-152400">
+              <a:spcAft>
+                <a:spcPts val="800"/>
+              </a:spcAft>
+              <a:buSzPct val="100000"/>
+              <a:buChar char="•"/>
+            </a:pPr>
+            <a:r>
+              <a:rPr lang="en-US" sz="1500" dirty="0">
+                <a:solidFill>
+                  <a:srgbClr val="1C1917"/>
+                </a:solidFill>
+                <a:latin typeface="Arial" pitchFamily="34" charset="0"/>
+                <a:ea typeface="Arial" pitchFamily="34" charset="-122"/>
+                <a:cs typeface="Arial" pitchFamily="34" charset="-120"/>
+              </a:rPr>
+              <a:t>Each input must be traced to a documented, verifiable source.</a:t>
+            </a:r>
+            <a:endParaRPr lang="en-US" sz="1500" dirty="0"/>
+          </a:p>
+          <a:p>
+            <a:pPr marL="152400" indent="-152400">
+              <a:spcAft>
+                <a:spcPts val="800"/>
+              </a:spcAft>
+              <a:buSzPct val="100000"/>
+              <a:buChar char="•"/>
+            </a:pPr>
+            <a:r>
+              <a:rPr lang="en-US" sz="1500" dirty="0">
+                <a:solidFill>
+                  <a:srgbClr val="1C1917"/>
+                </a:solidFill>
+                <a:latin typeface="Arial" pitchFamily="34" charset="0"/>
+                <a:ea typeface="Arial" pitchFamily="34" charset="-122"/>
+                <a:cs typeface="Arial" pitchFamily="34" charset="-120"/>
+              </a:rPr>
+              <a:t>Materiality tier is assigned based on NPV size relative to firm thresholds.</a:t>
+            </a:r>
+            <a:endParaRPr lang="en-US" sz="1500" dirty="0"/>
+          </a:p>
+        </p:txBody>
+      </p:sp>
+      <p:sp>
+        <p:nvSpPr>
+          <p:cNvPr id="7" name="Shape 5"/>
+          <p:cNvSpPr/>
+          <p:nvPr/>
+        </p:nvSpPr>
+        <p:spPr>
+          <a:xfrm>
+            <a:off x="731520" y="4041648"/>
+            <a:ext cx="7680960" cy="566928"/>
+          </a:xfrm>
+          <a:prstGeom prst="roundRect">
+            <a:avLst>
+              <a:gd name="adj" fmla="val 12903"/>
+            </a:avLst>
+          </a:prstGeom>
+          <a:solidFill>
+            <a:srgbClr val="B45309">
+              <a:alpha val="12000"/>
+            </a:srgbClr>
+          </a:solidFill>
+          <a:ln w="12700">
+            <a:solidFill>
+              <a:srgbClr val="B45309"/>
+            </a:solidFill>
+            <a:prstDash val="solid"/>
+          </a:ln>
+        </p:spPr>
+      </p:sp>
+      <p:sp>
+        <p:nvSpPr>
+          <p:cNvPr id="8" name="Text 6"/>
+          <p:cNvSpPr/>
+          <p:nvPr/>
+        </p:nvSpPr>
+        <p:spPr>
+          <a:xfrm>
+            <a:off x="868680" y="4087368"/>
+            <a:ext cx="7406640" cy="475488"/>
+          </a:xfrm>
+          <a:prstGeom prst="rect">
+            <a:avLst/>
+          </a:prstGeom>
+          <a:noFill/>
+          <a:ln/>
+        </p:spPr>
+        <p:txBody>
+          <a:bodyPr wrap="square" rtlCol="0" anchor="ctr"/>
+          <a:lstStyle/>
+          <a:p>
+            <a:pPr indent="0" marL="0">
+              <a:buNone/>
+            </a:pPr>
+            <a:r>
+              <a:rPr lang="en-US" sz="1100" b="1" dirty="0">
+                <a:solidFill>
+                  <a:srgbClr val="B45309"/>
+                </a:solidFill>
+                <a:latin typeface="Arial" pitchFamily="34" charset="0"/>
+                <a:ea typeface="Arial" pitchFamily="34" charset="-122"/>
+                <a:cs typeface="Arial" pitchFamily="34" charset="-120"/>
+              </a:rPr>
+              <a:t>Takeaway  </a:t>
+            </a:r>
+            <a:pPr indent="0" marL="0">
+              <a:buNone/>
+            </a:pPr>
+            <a:r>
+              <a:rPr lang="en-US" sz="1150" dirty="0">
+                <a:solidFill>
+                  <a:srgbClr val="1C1917"/>
+                </a:solidFill>
+                <a:latin typeface="Arial" pitchFamily="34" charset="0"/>
+                <a:ea typeface="Arial" pitchFamily="34" charset="-122"/>
+                <a:cs typeface="Arial" pitchFamily="34" charset="-120"/>
+              </a:rPr>
+              <a:t>Applying the model/input/function/output vocabulary to a real DCF makes abstract definitions immediately operational.</a:t>
+            </a:r>
+            <a:endParaRPr lang="en-US" sz="1100" dirty="0"/>
+          </a:p>
+        </p:txBody>
+      </p:sp>
+    </p:spTree>
+  </p:cSld>
+  <p:clrMapOvr>
+    <a:masterClrMapping/>
+  </p:clrMapOvr>
+</p:sld>
+</file>
+
+<file path=ppt/slides/slide7.xml><?xml version="1.0" encoding="utf-8"?>
+<p:sld xmlns:a="http://schemas.openxmlformats.org/drawingml/2006/main" xmlns:r="http://schemas.openxmlformats.org/officeDocument/2006/relationships" xmlns:p="http://schemas.openxmlformats.org/presentationml/2006/main">
+  <p:cSld name="Slide 7">
+    <p:bg>
+      <p:bgPr>
+        <a:solidFill>
+          <a:srgbClr val="FFFFFF"/>
+        </a:solidFill>
+      </p:bgPr>
+    </p:bg>
+    <p:spTree>
+      <p:nvGrpSpPr>
+        <p:cNvPr id="1" name=""/>
+        <p:cNvGrpSpPr/>
+        <p:nvPr/>
+      </p:nvGrpSpPr>
+      <p:grpSpPr>
+        <a:xfrm>
+          <a:off x="0" y="0"/>
+          <a:ext cx="0" cy="0"/>
+          <a:chOff x="0" y="0"/>
+          <a:chExt cx="0" cy="0"/>
+        </a:xfrm>
+      </p:grpSpPr>
+      <p:sp>
+        <p:nvSpPr>
+          <p:cNvPr id="2" name="Shape 0"/>
+          <p:cNvSpPr/>
+          <p:nvPr/>
+        </p:nvSpPr>
+        <p:spPr>
+          <a:xfrm>
+            <a:off x="411480" y="384048"/>
+            <a:ext cx="82296" cy="310896"/>
+          </a:xfrm>
+          <a:prstGeom prst="rect">
+            <a:avLst/>
+          </a:prstGeom>
+          <a:solidFill>
+            <a:srgbClr val="B45309"/>
+          </a:solidFill>
+          <a:ln/>
+        </p:spPr>
+      </p:sp>
+      <p:sp>
+        <p:nvSpPr>
+          <p:cNvPr id="3" name="Text 1"/>
+          <p:cNvSpPr/>
+          <p:nvPr/>
+        </p:nvSpPr>
+        <p:spPr>
+          <a:xfrm>
+            <a:off x="566928" y="292608"/>
+            <a:ext cx="8138160" cy="502920"/>
+          </a:xfrm>
+          <a:prstGeom prst="rect">
+            <a:avLst/>
+          </a:prstGeom>
+          <a:noFill/>
+          <a:ln/>
+        </p:spPr>
+        <p:txBody>
+          <a:bodyPr wrap="square" rtlCol="0" anchor="ctr"/>
+          <a:lstStyle/>
+          <a:p>
+            <a:pPr indent="0" marL="0">
+              <a:buNone/>
+            </a:pPr>
+            <a:r>
+              <a:rPr lang="en-US" sz="2000" b="1" dirty="0">
+                <a:solidFill>
+                  <a:srgbClr val="1C1917"/>
+                </a:solidFill>
+                <a:latin typeface="Arial" pitchFamily="34" charset="0"/>
+                <a:ea typeface="Arial" pitchFamily="34" charset="-122"/>
+                <a:cs typeface="Arial" pitchFamily="34" charset="-120"/>
+              </a:rPr>
+              <a:t>Model Audit Standard Procedure</a:t>
+            </a:r>
+            <a:endParaRPr lang="en-US" sz="2000" dirty="0"/>
+          </a:p>
+        </p:txBody>
+      </p:sp>
+      <p:sp>
+        <p:nvSpPr>
+          <p:cNvPr id="4" name="Text 2"/>
+          <p:cNvSpPr/>
+          <p:nvPr/>
+        </p:nvSpPr>
+        <p:spPr>
+          <a:xfrm>
+            <a:off x="566928" y="4681728"/>
+            <a:ext cx="8138160" cy="320040"/>
+          </a:xfrm>
+          <a:prstGeom prst="rect">
+            <a:avLst/>
+          </a:prstGeom>
+          <a:noFill/>
+          <a:ln/>
+        </p:spPr>
+        <p:txBody>
+          <a:bodyPr wrap="square" rtlCol="0" anchor="ctr"/>
+          <a:lstStyle/>
+          <a:p>
+            <a:pPr indent="0" marL="0">
+              <a:buNone/>
+            </a:pPr>
+            <a:r>
+              <a:rPr lang="en-US" sz="1000" i="1" dirty="0">
+                <a:solidFill>
+                  <a:srgbClr val="78716C"/>
+                </a:solidFill>
+                <a:latin typeface="Arial" pitchFamily="34" charset="0"/>
+                <a:ea typeface="Arial" pitchFamily="34" charset="-122"/>
+                <a:cs typeface="Arial" pitchFamily="34" charset="-120"/>
+              </a:rPr>
+              <a:t>Every audit follows this repeatable sequence regardless of model type</a:t>
+            </a:r>
+            <a:endParaRPr lang="en-US" sz="1000" dirty="0"/>
+          </a:p>
+        </p:txBody>
+      </p:sp>
+      <p:sp>
+        <p:nvSpPr>
+          <p:cNvPr id="5" name="Text 3"/>
+          <p:cNvSpPr/>
+          <p:nvPr/>
+        </p:nvSpPr>
+        <p:spPr>
+          <a:xfrm>
+            <a:off x="411480" y="4919472"/>
+            <a:ext cx="8321040" cy="219456"/>
+          </a:xfrm>
+          <a:prstGeom prst="rect">
+            <a:avLst/>
+          </a:prstGeom>
+          <a:noFill/>
+          <a:ln/>
+        </p:spPr>
+        <p:txBody>
+          <a:bodyPr wrap="square" rtlCol="0" anchor="ctr"/>
+          <a:lstStyle/>
+          <a:p>
+            <a:pPr indent="0" marL="0">
+              <a:buNone/>
+            </a:pPr>
+            <a:r>
+              <a:rPr lang="en-US" sz="750" dirty="0">
+                <a:solidFill>
+                  <a:srgbClr val="AAAAAA"/>
+                </a:solidFill>
+                <a:latin typeface="Arial" pitchFamily="34" charset="0"/>
+                <a:ea typeface="Arial" pitchFamily="34" charset="-122"/>
+                <a:cs typeface="Arial" pitchFamily="34" charset="-120"/>
+              </a:rPr>
+              <a:t>Lesson Forge Pro (owner) — This content is educational material only and does not constitute financial, investment, or trading advice.</a:t>
+            </a:r>
+            <a:endParaRPr lang="en-US" sz="750" dirty="0"/>
+          </a:p>
+        </p:txBody>
+      </p:sp>
+      <p:sp>
+        <p:nvSpPr>
+          <p:cNvPr id="6" name="Shape 4"/>
+          <p:cNvSpPr/>
+          <p:nvPr/>
+        </p:nvSpPr>
+        <p:spPr>
+          <a:xfrm>
+            <a:off x="411480" y="1463040"/>
+            <a:ext cx="2011680" cy="960120"/>
+          </a:xfrm>
+          <a:prstGeom prst="roundRect">
+            <a:avLst>
+              <a:gd name="adj" fmla="val 7619"/>
+            </a:avLst>
+          </a:prstGeom>
+          <a:solidFill>
+            <a:srgbClr val="F5F5F4"/>
+          </a:solidFill>
+          <a:ln w="15240">
+            <a:solidFill>
+              <a:srgbClr val="B45309"/>
+            </a:solidFill>
+            <a:prstDash val="solid"/>
+          </a:ln>
+        </p:spPr>
+      </p:sp>
+      <p:sp>
+        <p:nvSpPr>
+          <p:cNvPr id="7" name="Text 5"/>
+          <p:cNvSpPr/>
+          <p:nvPr/>
+        </p:nvSpPr>
+        <p:spPr>
+          <a:xfrm>
+            <a:off x="484632" y="1536192"/>
+            <a:ext cx="310896" cy="274320"/>
+          </a:xfrm>
+          <a:prstGeom prst="rect">
+            <a:avLst/>
+          </a:prstGeom>
+          <a:solidFill>
+            <a:srgbClr val="B45309"/>
+          </a:solidFill>
+          <a:ln/>
+        </p:spPr>
+        <p:txBody>
+          <a:bodyPr wrap="square" rtlCol="0" anchor="ctr"/>
+          <a:lstStyle/>
+          <a:p>
+            <a:pPr algn="ctr" indent="0" marL="0">
+              <a:buNone/>
+            </a:pPr>
+            <a:r>
+              <a:rPr lang="en-US" sz="1000" b="1" dirty="0">
+                <a:solidFill>
+                  <a:srgbClr val="FFFFFF"/>
+                </a:solidFill>
+                <a:latin typeface="Arial" pitchFamily="34" charset="0"/>
+                <a:ea typeface="Arial" pitchFamily="34" charset="-122"/>
+                <a:cs typeface="Arial" pitchFamily="34" charset="-120"/>
+              </a:rPr>
+              <a:t>1</a:t>
+            </a:r>
+            <a:endParaRPr lang="en-US" sz="1000" dirty="0"/>
+          </a:p>
+        </p:txBody>
+      </p:sp>
+      <p:sp>
+        <p:nvSpPr>
+          <p:cNvPr id="8" name="Text 6"/>
+          <p:cNvSpPr/>
+          <p:nvPr/>
+        </p:nvSpPr>
+        <p:spPr>
+          <a:xfrm>
+            <a:off x="411480" y="1737360"/>
+            <a:ext cx="2011680" cy="384048"/>
+          </a:xfrm>
+          <a:prstGeom prst="rect">
+            <a:avLst/>
+          </a:prstGeom>
+          <a:noFill/>
+          <a:ln/>
+        </p:spPr>
+        <p:txBody>
+          <a:bodyPr wrap="square" rtlCol="0" anchor="ctr"/>
+          <a:lstStyle/>
+          <a:p>
+            <a:pPr algn="ctr" indent="0" marL="0">
+              <a:buNone/>
+            </a:pPr>
+            <a:r>
+              <a:rPr lang="en-US" sz="1200" b="1" dirty="0">
+                <a:solidFill>
+                  <a:srgbClr val="1C1917"/>
+                </a:solidFill>
+                <a:latin typeface="Arial" pitchFamily="34" charset="0"/>
+                <a:ea typeface="Arial" pitchFamily="34" charset="-122"/>
+                <a:cs typeface="Arial" pitchFamily="34" charset="-120"/>
+              </a:rPr>
+              <a:t>Scope Definition</a:t>
+            </a:r>
+            <a:endParaRPr lang="en-US" sz="1200" dirty="0"/>
+          </a:p>
+        </p:txBody>
+      </p:sp>
+      <p:sp>
+        <p:nvSpPr>
+          <p:cNvPr id="9" name="Text 7"/>
+          <p:cNvSpPr/>
+          <p:nvPr/>
+        </p:nvSpPr>
+        <p:spPr>
+          <a:xfrm>
+            <a:off x="411480" y="2084832"/>
+            <a:ext cx="2011680" cy="310896"/>
+          </a:xfrm>
+          <a:prstGeom prst="rect">
+            <a:avLst/>
+          </a:prstGeom>
+          <a:noFill/>
+          <a:ln/>
+        </p:spPr>
+        <p:txBody>
+          <a:bodyPr wrap="square" rtlCol="0" anchor="ctr"/>
+          <a:lstStyle/>
+          <a:p>
+            <a:pPr algn="ctr" indent="0" marL="0">
+              <a:buNone/>
+            </a:pPr>
+            <a:r>
+              <a:rPr lang="en-US" sz="900" dirty="0">
+                <a:solidFill>
+                  <a:srgbClr val="78716C"/>
+                </a:solidFill>
+                <a:latin typeface="Arial" pitchFamily="34" charset="0"/>
+                <a:ea typeface="Arial" pitchFamily="34" charset="-122"/>
+                <a:cs typeface="Arial" pitchFamily="34" charset="-120"/>
+              </a:rPr>
+              <a:t>Agree tabs, scenarios, outputs in scope</a:t>
+            </a:r>
+            <a:endParaRPr lang="en-US" sz="900" dirty="0"/>
+          </a:p>
+        </p:txBody>
+      </p:sp>
+      <p:sp>
+        <p:nvSpPr>
+          <p:cNvPr id="10" name="Shape 8"/>
+          <p:cNvSpPr/>
+          <p:nvPr/>
+        </p:nvSpPr>
+        <p:spPr>
+          <a:xfrm>
+            <a:off x="2478024" y="1842516"/>
+            <a:ext cx="301752" cy="201168"/>
+          </a:xfrm>
+          <a:prstGeom prst="rightArrow">
+            <a:avLst/>
+          </a:prstGeom>
+          <a:solidFill>
+            <a:srgbClr val="B45309"/>
+          </a:solidFill>
+          <a:ln/>
+        </p:spPr>
+      </p:sp>
+      <p:sp>
+        <p:nvSpPr>
+          <p:cNvPr id="11" name="Shape 9"/>
+          <p:cNvSpPr/>
+          <p:nvPr/>
+        </p:nvSpPr>
+        <p:spPr>
+          <a:xfrm>
+            <a:off x="2834640" y="1463040"/>
+            <a:ext cx="2011680" cy="960120"/>
+          </a:xfrm>
+          <a:prstGeom prst="roundRect">
+            <a:avLst>
+              <a:gd name="adj" fmla="val 7619"/>
+            </a:avLst>
+          </a:prstGeom>
+          <a:solidFill>
+            <a:srgbClr val="F5F5F4"/>
+          </a:solidFill>
+          <a:ln w="15240">
+            <a:solidFill>
+              <a:srgbClr val="B45309"/>
+            </a:solidFill>
+            <a:prstDash val="solid"/>
+          </a:ln>
+        </p:spPr>
+      </p:sp>
+      <p:sp>
+        <p:nvSpPr>
+          <p:cNvPr id="12" name="Text 10"/>
+          <p:cNvSpPr/>
+          <p:nvPr/>
+        </p:nvSpPr>
+        <p:spPr>
+          <a:xfrm>
+            <a:off x="2907792" y="1536192"/>
+            <a:ext cx="310896" cy="274320"/>
+          </a:xfrm>
+          <a:prstGeom prst="rect">
+            <a:avLst/>
+          </a:prstGeom>
+          <a:solidFill>
+            <a:srgbClr val="B45309"/>
+          </a:solidFill>
+          <a:ln/>
+        </p:spPr>
+        <p:txBody>
+          <a:bodyPr wrap="square" rtlCol="0" anchor="ctr"/>
+          <a:lstStyle/>
+          <a:p>
+            <a:pPr algn="ctr" indent="0" marL="0">
+              <a:buNone/>
+            </a:pPr>
+            <a:r>
+              <a:rPr lang="en-US" sz="1000" b="1" dirty="0">
+                <a:solidFill>
+                  <a:srgbClr val="FFFFFF"/>
+                </a:solidFill>
+                <a:latin typeface="Arial" pitchFamily="34" charset="0"/>
+                <a:ea typeface="Arial" pitchFamily="34" charset="-122"/>
+                <a:cs typeface="Arial" pitchFamily="34" charset="-120"/>
+              </a:rPr>
+              <a:t>2</a:t>
+            </a:r>
+            <a:endParaRPr lang="en-US" sz="1000" dirty="0"/>
+          </a:p>
+        </p:txBody>
+      </p:sp>
+      <p:sp>
+        <p:nvSpPr>
+          <p:cNvPr id="13" name="Text 11"/>
+          <p:cNvSpPr/>
+          <p:nvPr/>
+        </p:nvSpPr>
+        <p:spPr>
+          <a:xfrm>
+            <a:off x="2834640" y="1737360"/>
+            <a:ext cx="2011680" cy="384048"/>
+          </a:xfrm>
+          <a:prstGeom prst="rect">
+            <a:avLst/>
+          </a:prstGeom>
+          <a:noFill/>
+          <a:ln/>
+        </p:spPr>
+        <p:txBody>
+          <a:bodyPr wrap="square" rtlCol="0" anchor="ctr"/>
+          <a:lstStyle/>
+          <a:p>
+            <a:pPr algn="ctr" indent="0" marL="0">
+              <a:buNone/>
+            </a:pPr>
+            <a:r>
+              <a:rPr lang="en-US" sz="1200" b="1" dirty="0">
+                <a:solidFill>
+                  <a:srgbClr val="1C1917"/>
+                </a:solidFill>
+                <a:latin typeface="Arial" pitchFamily="34" charset="0"/>
+                <a:ea typeface="Arial" pitchFamily="34" charset="-122"/>
+                <a:cs typeface="Arial" pitchFamily="34" charset="-120"/>
+              </a:rPr>
+              <a:t>Structural Review</a:t>
+            </a:r>
+            <a:endParaRPr lang="en-US" sz="1200" dirty="0"/>
+          </a:p>
+        </p:txBody>
+      </p:sp>
+      <p:sp>
+        <p:nvSpPr>
+          <p:cNvPr id="14" name="Text 12"/>
+          <p:cNvSpPr/>
+          <p:nvPr/>
+        </p:nvSpPr>
+        <p:spPr>
+          <a:xfrm>
+            <a:off x="2834640" y="2084832"/>
+            <a:ext cx="2011680" cy="310896"/>
+          </a:xfrm>
+          <a:prstGeom prst="rect">
+            <a:avLst/>
+          </a:prstGeom>
+          <a:noFill/>
+          <a:ln/>
+        </p:spPr>
+        <p:txBody>
+          <a:bodyPr wrap="square" rtlCol="0" anchor="ctr"/>
+          <a:lstStyle/>
+          <a:p>
+            <a:pPr algn="ctr" indent="0" marL="0">
+              <a:buNone/>
+            </a:pPr>
+            <a:r>
+              <a:rPr lang="en-US" sz="900" dirty="0">
+                <a:solidFill>
+                  <a:srgbClr val="78716C"/>
+                </a:solidFill>
+                <a:latin typeface="Arial" pitchFamily="34" charset="0"/>
+                <a:ea typeface="Arial" pitchFamily="34" charset="-122"/>
+                <a:cs typeface="Arial" pitchFamily="34" charset="-120"/>
+              </a:rPr>
+              <a:t>Map data flows, flag circular refs</a:t>
+            </a:r>
+            <a:endParaRPr lang="en-US" sz="900" dirty="0"/>
+          </a:p>
+        </p:txBody>
+      </p:sp>
+      <p:sp>
+        <p:nvSpPr>
+          <p:cNvPr id="15" name="Shape 13"/>
+          <p:cNvSpPr/>
+          <p:nvPr/>
+        </p:nvSpPr>
+        <p:spPr>
+          <a:xfrm>
+            <a:off x="4901184" y="1842516"/>
+            <a:ext cx="301752" cy="201168"/>
+          </a:xfrm>
+          <a:prstGeom prst="rightArrow">
+            <a:avLst/>
+          </a:prstGeom>
+          <a:solidFill>
+            <a:srgbClr val="B45309"/>
+          </a:solidFill>
+          <a:ln/>
+        </p:spPr>
+      </p:sp>
+      <p:sp>
+        <p:nvSpPr>
+          <p:cNvPr id="16" name="Shape 14"/>
+          <p:cNvSpPr/>
+          <p:nvPr/>
+        </p:nvSpPr>
+        <p:spPr>
+          <a:xfrm>
+            <a:off x="5257800" y="1463040"/>
+            <a:ext cx="2011680" cy="960120"/>
+          </a:xfrm>
+          <a:prstGeom prst="roundRect">
+            <a:avLst>
+              <a:gd name="adj" fmla="val 7619"/>
+            </a:avLst>
+          </a:prstGeom>
+          <a:solidFill>
+            <a:srgbClr val="F5F5F4"/>
+          </a:solidFill>
+          <a:ln w="15240">
+            <a:solidFill>
+              <a:srgbClr val="B45309"/>
+            </a:solidFill>
+            <a:prstDash val="solid"/>
+          </a:ln>
+        </p:spPr>
+      </p:sp>
+      <p:sp>
+        <p:nvSpPr>
+          <p:cNvPr id="17" name="Text 15"/>
+          <p:cNvSpPr/>
+          <p:nvPr/>
+        </p:nvSpPr>
+        <p:spPr>
+          <a:xfrm>
+            <a:off x="5330952" y="1536192"/>
+            <a:ext cx="310896" cy="274320"/>
+          </a:xfrm>
+          <a:prstGeom prst="rect">
+            <a:avLst/>
+          </a:prstGeom>
+          <a:solidFill>
+            <a:srgbClr val="B45309"/>
+          </a:solidFill>
+          <a:ln/>
+        </p:spPr>
+        <p:txBody>
+          <a:bodyPr wrap="square" rtlCol="0" anchor="ctr"/>
+          <a:lstStyle/>
+          <a:p>
+            <a:pPr algn="ctr" indent="0" marL="0">
+              <a:buNone/>
+            </a:pPr>
+            <a:r>
+              <a:rPr lang="en-US" sz="1000" b="1" dirty="0">
+                <a:solidFill>
+                  <a:srgbClr val="FFFFFF"/>
+                </a:solidFill>
+                <a:latin typeface="Arial" pitchFamily="34" charset="0"/>
+                <a:ea typeface="Arial" pitchFamily="34" charset="-122"/>
+                <a:cs typeface="Arial" pitchFamily="34" charset="-120"/>
+              </a:rPr>
+              <a:t>3</a:t>
+            </a:r>
+            <a:endParaRPr lang="en-US" sz="1000" dirty="0"/>
+          </a:p>
+        </p:txBody>
+      </p:sp>
+      <p:sp>
+        <p:nvSpPr>
+          <p:cNvPr id="18" name="Text 16"/>
+          <p:cNvSpPr/>
+          <p:nvPr/>
+        </p:nvSpPr>
+        <p:spPr>
+          <a:xfrm>
+            <a:off x="5257800" y="1737360"/>
+            <a:ext cx="2011680" cy="384048"/>
+          </a:xfrm>
+          <a:prstGeom prst="rect">
+            <a:avLst/>
+          </a:prstGeom>
+          <a:noFill/>
+          <a:ln/>
+        </p:spPr>
+        <p:txBody>
+          <a:bodyPr wrap="square" rtlCol="0" anchor="ctr"/>
+          <a:lstStyle/>
+          <a:p>
+            <a:pPr algn="ctr" indent="0" marL="0">
+              <a:buNone/>
+            </a:pPr>
+            <a:r>
+              <a:rPr lang="en-US" sz="1200" b="1" dirty="0">
+                <a:solidFill>
+                  <a:srgbClr val="1C1917"/>
+                </a:solidFill>
+                <a:latin typeface="Arial" pitchFamily="34" charset="0"/>
+                <a:ea typeface="Arial" pitchFamily="34" charset="-122"/>
+                <a:cs typeface="Arial" pitchFamily="34" charset="-120"/>
+              </a:rPr>
+              <a:t>Formula Audit</a:t>
+            </a:r>
+            <a:endParaRPr lang="en-US" sz="1200" dirty="0"/>
+          </a:p>
+        </p:txBody>
+      </p:sp>
+      <p:sp>
+        <p:nvSpPr>
+          <p:cNvPr id="19" name="Text 17"/>
+          <p:cNvSpPr/>
+          <p:nvPr/>
+        </p:nvSpPr>
+        <p:spPr>
+          <a:xfrm>
+            <a:off x="5257800" y="2084832"/>
+            <a:ext cx="2011680" cy="310896"/>
+          </a:xfrm>
+          <a:prstGeom prst="rect">
+            <a:avLst/>
+          </a:prstGeom>
+          <a:noFill/>
+          <a:ln/>
+        </p:spPr>
+        <p:txBody>
+          <a:bodyPr wrap="square" rtlCol="0" anchor="ctr"/>
+          <a:lstStyle/>
+          <a:p>
+            <a:pPr algn="ctr" indent="0" marL="0">
+              <a:buNone/>
+            </a:pPr>
+            <a:r>
+              <a:rPr lang="en-US" sz="900" dirty="0">
+                <a:solidFill>
+                  <a:srgbClr val="78716C"/>
+                </a:solidFill>
+                <a:latin typeface="Arial" pitchFamily="34" charset="0"/>
+                <a:ea typeface="Arial" pitchFamily="34" charset="-122"/>
+                <a:cs typeface="Arial" pitchFamily="34" charset="-120"/>
+              </a:rPr>
+              <a:t>Trace precedents, check hard-coded values</a:t>
+            </a:r>
+            <a:endParaRPr lang="en-US" sz="900" dirty="0"/>
+          </a:p>
+        </p:txBody>
+      </p:sp>
+      <p:sp>
+        <p:nvSpPr>
+          <p:cNvPr id="20" name="Shape 18"/>
+          <p:cNvSpPr/>
+          <p:nvPr/>
+        </p:nvSpPr>
+        <p:spPr>
+          <a:xfrm>
+            <a:off x="6163056" y="2496312"/>
+            <a:ext cx="201168" cy="548640"/>
+          </a:xfrm>
+          <a:prstGeom prst="downArrow">
+            <a:avLst/>
+          </a:prstGeom>
+          <a:solidFill>
+            <a:srgbClr val="B45309"/>
+          </a:solidFill>
+          <a:ln/>
+        </p:spPr>
+      </p:sp>
+      <p:sp>
+        <p:nvSpPr>
+          <p:cNvPr id="21" name="Shape 19"/>
+          <p:cNvSpPr/>
+          <p:nvPr/>
+        </p:nvSpPr>
+        <p:spPr>
+          <a:xfrm>
+            <a:off x="5257800" y="3108960"/>
+            <a:ext cx="2011680" cy="960120"/>
+          </a:xfrm>
+          <a:prstGeom prst="roundRect">
+            <a:avLst>
+              <a:gd name="adj" fmla="val 7619"/>
+            </a:avLst>
+          </a:prstGeom>
+          <a:solidFill>
+            <a:srgbClr val="F5F5F4"/>
+          </a:solidFill>
+          <a:ln w="15240">
+            <a:solidFill>
+              <a:srgbClr val="B45309"/>
+            </a:solidFill>
+            <a:prstDash val="solid"/>
+          </a:ln>
+        </p:spPr>
+      </p:sp>
+      <p:sp>
+        <p:nvSpPr>
+          <p:cNvPr id="22" name="Text 20"/>
+          <p:cNvSpPr/>
+          <p:nvPr/>
+        </p:nvSpPr>
+        <p:spPr>
+          <a:xfrm>
+            <a:off x="5330952" y="3182112"/>
+            <a:ext cx="310896" cy="274320"/>
+          </a:xfrm>
+          <a:prstGeom prst="rect">
+            <a:avLst/>
+          </a:prstGeom>
+          <a:solidFill>
+            <a:srgbClr val="B45309"/>
+          </a:solidFill>
+          <a:ln/>
+        </p:spPr>
+        <p:txBody>
+          <a:bodyPr wrap="square" rtlCol="0" anchor="ctr"/>
+          <a:lstStyle/>
+          <a:p>
+            <a:pPr algn="ctr" indent="0" marL="0">
+              <a:buNone/>
+            </a:pPr>
+            <a:r>
+              <a:rPr lang="en-US" sz="1000" b="1" dirty="0">
+                <a:solidFill>
+                  <a:srgbClr val="FFFFFF"/>
+                </a:solidFill>
+                <a:latin typeface="Arial" pitchFamily="34" charset="0"/>
+                <a:ea typeface="Arial" pitchFamily="34" charset="-122"/>
+                <a:cs typeface="Arial" pitchFamily="34" charset="-120"/>
+              </a:rPr>
+              <a:t>4</a:t>
+            </a:r>
+            <a:endParaRPr lang="en-US" sz="1000" dirty="0"/>
+          </a:p>
+        </p:txBody>
+      </p:sp>
+      <p:sp>
+        <p:nvSpPr>
+          <p:cNvPr id="23" name="Text 21"/>
+          <p:cNvSpPr/>
+          <p:nvPr/>
+        </p:nvSpPr>
+        <p:spPr>
+          <a:xfrm>
+            <a:off x="5257800" y="3383280"/>
+            <a:ext cx="2011680" cy="384048"/>
+          </a:xfrm>
+          <a:prstGeom prst="rect">
+            <a:avLst/>
+          </a:prstGeom>
+          <a:noFill/>
+          <a:ln/>
+        </p:spPr>
+        <p:txBody>
+          <a:bodyPr wrap="square" rtlCol="0" anchor="ctr"/>
+          <a:lstStyle/>
+          <a:p>
+            <a:pPr algn="ctr" indent="0" marL="0">
+              <a:buNone/>
+            </a:pPr>
+            <a:r>
+              <a:rPr lang="en-US" sz="1200" b="1" dirty="0">
+                <a:solidFill>
+                  <a:srgbClr val="1C1917"/>
+                </a:solidFill>
+                <a:latin typeface="Arial" pitchFamily="34" charset="0"/>
+                <a:ea typeface="Arial" pitchFamily="34" charset="-122"/>
+                <a:cs typeface="Arial" pitchFamily="34" charset="-120"/>
+              </a:rPr>
+              <a:t>Assumption Verify</a:t>
+            </a:r>
+            <a:endParaRPr lang="en-US" sz="1200" dirty="0"/>
+          </a:p>
+        </p:txBody>
+      </p:sp>
+      <p:sp>
+        <p:nvSpPr>
+          <p:cNvPr id="24" name="Text 22"/>
+          <p:cNvSpPr/>
+          <p:nvPr/>
+        </p:nvSpPr>
+        <p:spPr>
+          <a:xfrm>
+            <a:off x="5257800" y="3730752"/>
+            <a:ext cx="2011680" cy="310896"/>
+          </a:xfrm>
+          <a:prstGeom prst="rect">
+            <a:avLst/>
+          </a:prstGeom>
+          <a:noFill/>
+          <a:ln/>
+        </p:spPr>
+        <p:txBody>
+          <a:bodyPr wrap="square" rtlCol="0" anchor="ctr"/>
+          <a:lstStyle/>
+          <a:p>
+            <a:pPr algn="ctr" indent="0" marL="0">
+              <a:buNone/>
+            </a:pPr>
+            <a:r>
+              <a:rPr lang="en-US" sz="900" dirty="0">
+                <a:solidFill>
+                  <a:srgbClr val="78716C"/>
+                </a:solidFill>
+                <a:latin typeface="Arial" pitchFamily="34" charset="0"/>
+                <a:ea typeface="Arial" pitchFamily="34" charset="-122"/>
+                <a:cs typeface="Arial" pitchFamily="34" charset="-120"/>
+              </a:rPr>
+              <a:t>Cross-reference rates, growth inputs</a:t>
+            </a:r>
+            <a:endParaRPr lang="en-US" sz="900" dirty="0"/>
+          </a:p>
+        </p:txBody>
+      </p:sp>
+      <p:sp>
+        <p:nvSpPr>
+          <p:cNvPr id="25" name="Shape 23"/>
+          <p:cNvSpPr/>
+          <p:nvPr/>
+        </p:nvSpPr>
+        <p:spPr>
+          <a:xfrm>
+            <a:off x="4901184" y="3488436"/>
+            <a:ext cx="301752" cy="201168"/>
+          </a:xfrm>
+          <a:prstGeom prst="leftArrow">
+            <a:avLst/>
+          </a:prstGeom>
+          <a:solidFill>
+            <a:srgbClr val="B45309"/>
+          </a:solidFill>
+          <a:ln/>
+        </p:spPr>
+      </p:sp>
+      <p:sp>
+        <p:nvSpPr>
+          <p:cNvPr id="26" name="Shape 24"/>
+          <p:cNvSpPr/>
+          <p:nvPr/>
+        </p:nvSpPr>
+        <p:spPr>
+          <a:xfrm>
+            <a:off x="2834640" y="3108960"/>
+            <a:ext cx="2011680" cy="960120"/>
+          </a:xfrm>
+          <a:prstGeom prst="roundRect">
+            <a:avLst>
+              <a:gd name="adj" fmla="val 7619"/>
+            </a:avLst>
+          </a:prstGeom>
+          <a:solidFill>
+            <a:srgbClr val="F5F5F4"/>
+          </a:solidFill>
+          <a:ln w="15240">
+            <a:solidFill>
+              <a:srgbClr val="B45309"/>
+            </a:solidFill>
+            <a:prstDash val="solid"/>
+          </a:ln>
+        </p:spPr>
+      </p:sp>
+      <p:sp>
+        <p:nvSpPr>
+          <p:cNvPr id="27" name="Text 25"/>
+          <p:cNvSpPr/>
+          <p:nvPr/>
+        </p:nvSpPr>
+        <p:spPr>
+          <a:xfrm>
+            <a:off x="2907792" y="3182112"/>
+            <a:ext cx="310896" cy="274320"/>
+          </a:xfrm>
+          <a:prstGeom prst="rect">
+            <a:avLst/>
+          </a:prstGeom>
+          <a:solidFill>
+            <a:srgbClr val="B45309"/>
+          </a:solidFill>
+          <a:ln/>
+        </p:spPr>
+        <p:txBody>
+          <a:bodyPr wrap="square" rtlCol="0" anchor="ctr"/>
+          <a:lstStyle/>
+          <a:p>
+            <a:pPr algn="ctr" indent="0" marL="0">
+              <a:buNone/>
+            </a:pPr>
+            <a:r>
+              <a:rPr lang="en-US" sz="1000" b="1" dirty="0">
+                <a:solidFill>
+                  <a:srgbClr val="FFFFFF"/>
+                </a:solidFill>
+                <a:latin typeface="Arial" pitchFamily="34" charset="0"/>
+                <a:ea typeface="Arial" pitchFamily="34" charset="-122"/>
+                <a:cs typeface="Arial" pitchFamily="34" charset="-120"/>
+              </a:rPr>
+              <a:t>5</a:t>
+            </a:r>
+            <a:endParaRPr lang="en-US" sz="1000" dirty="0"/>
+          </a:p>
+        </p:txBody>
+      </p:sp>
+      <p:sp>
+        <p:nvSpPr>
+          <p:cNvPr id="28" name="Text 26"/>
+          <p:cNvSpPr/>
+          <p:nvPr/>
+        </p:nvSpPr>
+        <p:spPr>
+          <a:xfrm>
+            <a:off x="2834640" y="3383280"/>
+            <a:ext cx="2011680" cy="384048"/>
+          </a:xfrm>
+          <a:prstGeom prst="rect">
+            <a:avLst/>
+          </a:prstGeom>
+          <a:noFill/>
+          <a:ln/>
+        </p:spPr>
+        <p:txBody>
+          <a:bodyPr wrap="square" rtlCol="0" anchor="ctr"/>
+          <a:lstStyle/>
+          <a:p>
+            <a:pPr algn="ctr" indent="0" marL="0">
+              <a:buNone/>
+            </a:pPr>
+            <a:r>
+              <a:rPr lang="en-US" sz="1200" b="1" dirty="0">
+                <a:solidFill>
+                  <a:srgbClr val="1C1917"/>
+                </a:solidFill>
+                <a:latin typeface="Arial" pitchFamily="34" charset="0"/>
+                <a:ea typeface="Arial" pitchFamily="34" charset="-122"/>
+                <a:cs typeface="Arial" pitchFamily="34" charset="-120"/>
+              </a:rPr>
+              <a:t>Benchmark Test</a:t>
+            </a:r>
+            <a:endParaRPr lang="en-US" sz="1200" dirty="0"/>
+          </a:p>
+        </p:txBody>
+      </p:sp>
+      <p:sp>
+        <p:nvSpPr>
+          <p:cNvPr id="29" name="Text 27"/>
+          <p:cNvSpPr/>
+          <p:nvPr/>
+        </p:nvSpPr>
+        <p:spPr>
+          <a:xfrm>
+            <a:off x="2834640" y="3730752"/>
+            <a:ext cx="2011680" cy="310896"/>
+          </a:xfrm>
+          <a:prstGeom prst="rect">
+            <a:avLst/>
+          </a:prstGeom>
+          <a:noFill/>
+          <a:ln/>
+        </p:spPr>
+        <p:txBody>
+          <a:bodyPr wrap="square" rtlCol="0" anchor="ctr"/>
+          <a:lstStyle/>
+          <a:p>
+            <a:pPr algn="ctr" indent="0" marL="0">
+              <a:buNone/>
+            </a:pPr>
+            <a:r>
+              <a:rPr lang="en-US" sz="900" dirty="0">
+                <a:solidFill>
+                  <a:srgbClr val="78716C"/>
+                </a:solidFill>
+                <a:latin typeface="Arial" pitchFamily="34" charset="0"/>
+                <a:ea typeface="Arial" pitchFamily="34" charset="-122"/>
+                <a:cs typeface="Arial" pitchFamily="34" charset="-120"/>
+              </a:rPr>
+              <a:t>Compare output to independent calculation</a:t>
+            </a:r>
+            <a:endParaRPr lang="en-US" sz="900" dirty="0"/>
+          </a:p>
+        </p:txBody>
+      </p:sp>
+      <p:sp>
+        <p:nvSpPr>
+          <p:cNvPr id="30" name="Shape 28"/>
+          <p:cNvSpPr/>
+          <p:nvPr/>
+        </p:nvSpPr>
+        <p:spPr>
+          <a:xfrm>
+            <a:off x="2478024" y="3488436"/>
+            <a:ext cx="301752" cy="201168"/>
+          </a:xfrm>
+          <a:prstGeom prst="leftArrow">
+            <a:avLst/>
+          </a:prstGeom>
+          <a:solidFill>
+            <a:srgbClr val="B45309"/>
+          </a:solidFill>
+          <a:ln/>
+        </p:spPr>
+      </p:sp>
+      <p:sp>
+        <p:nvSpPr>
+          <p:cNvPr id="31" name="Shape 29"/>
+          <p:cNvSpPr/>
+          <p:nvPr/>
+        </p:nvSpPr>
+        <p:spPr>
+          <a:xfrm>
+            <a:off x="411480" y="3108960"/>
+            <a:ext cx="2011680" cy="960120"/>
+          </a:xfrm>
+          <a:prstGeom prst="roundRect">
+            <a:avLst>
+              <a:gd name="adj" fmla="val 7619"/>
+            </a:avLst>
+          </a:prstGeom>
+          <a:solidFill>
+            <a:srgbClr val="F5F5F4"/>
+          </a:solidFill>
+          <a:ln w="15240">
+            <a:solidFill>
+              <a:srgbClr val="B45309"/>
+            </a:solidFill>
+            <a:prstDash val="solid"/>
+          </a:ln>
+        </p:spPr>
+      </p:sp>
+      <p:sp>
+        <p:nvSpPr>
+          <p:cNvPr id="32" name="Text 30"/>
+          <p:cNvSpPr/>
+          <p:nvPr/>
+        </p:nvSpPr>
+        <p:spPr>
+          <a:xfrm>
+            <a:off x="484632" y="3182112"/>
+            <a:ext cx="310896" cy="274320"/>
+          </a:xfrm>
+          <a:prstGeom prst="rect">
+            <a:avLst/>
+          </a:prstGeom>
+          <a:solidFill>
+            <a:srgbClr val="B45309"/>
+          </a:solidFill>
+          <a:ln/>
+        </p:spPr>
+        <p:txBody>
+          <a:bodyPr wrap="square" rtlCol="0" anchor="ctr"/>
+          <a:lstStyle/>
+          <a:p>
+            <a:pPr algn="ctr" indent="0" marL="0">
+              <a:buNone/>
+            </a:pPr>
+            <a:r>
+              <a:rPr lang="en-US" sz="1000" b="1" dirty="0">
+                <a:solidFill>
+                  <a:srgbClr val="FFFFFF"/>
+                </a:solidFill>
+                <a:latin typeface="Arial" pitchFamily="34" charset="0"/>
+                <a:ea typeface="Arial" pitchFamily="34" charset="-122"/>
+                <a:cs typeface="Arial" pitchFamily="34" charset="-120"/>
+              </a:rPr>
+              <a:t>6</a:t>
+            </a:r>
+            <a:endParaRPr lang="en-US" sz="1000" dirty="0"/>
+          </a:p>
+        </p:txBody>
+      </p:sp>
+      <p:sp>
+        <p:nvSpPr>
+          <p:cNvPr id="33" name="Text 31"/>
+          <p:cNvSpPr/>
+          <p:nvPr/>
+        </p:nvSpPr>
+        <p:spPr>
+          <a:xfrm>
+            <a:off x="411480" y="3383280"/>
+            <a:ext cx="2011680" cy="384048"/>
+          </a:xfrm>
+          <a:prstGeom prst="rect">
+            <a:avLst/>
+          </a:prstGeom>
+          <a:noFill/>
+          <a:ln/>
+        </p:spPr>
+        <p:txBody>
+          <a:bodyPr wrap="square" rtlCol="0" anchor="ctr"/>
+          <a:lstStyle/>
+          <a:p>
+            <a:pPr algn="ctr" indent="0" marL="0">
+              <a:buNone/>
+            </a:pPr>
+            <a:r>
+              <a:rPr lang="en-US" sz="1200" b="1" dirty="0">
+                <a:solidFill>
+                  <a:srgbClr val="1C1917"/>
+                </a:solidFill>
+                <a:latin typeface="Arial" pitchFamily="34" charset="0"/>
+                <a:ea typeface="Arial" pitchFamily="34" charset="-122"/>
+                <a:cs typeface="Arial" pitchFamily="34" charset="-120"/>
+              </a:rPr>
+              <a:t>Findings Register</a:t>
+            </a:r>
+            <a:endParaRPr lang="en-US" sz="1200" dirty="0"/>
+          </a:p>
+        </p:txBody>
+      </p:sp>
+      <p:sp>
+        <p:nvSpPr>
+          <p:cNvPr id="34" name="Text 32"/>
+          <p:cNvSpPr/>
+          <p:nvPr/>
+        </p:nvSpPr>
+        <p:spPr>
+          <a:xfrm>
+            <a:off x="411480" y="3730752"/>
+            <a:ext cx="2011680" cy="310896"/>
+          </a:xfrm>
+          <a:prstGeom prst="rect">
+            <a:avLst/>
+          </a:prstGeom>
+          <a:noFill/>
+          <a:ln/>
+        </p:spPr>
+        <p:txBody>
+          <a:bodyPr wrap="square" rtlCol="0" anchor="ctr"/>
+          <a:lstStyle/>
+          <a:p>
+            <a:pPr algn="ctr" indent="0" marL="0">
+              <a:buNone/>
+            </a:pPr>
+            <a:r>
+              <a:rPr lang="en-US" sz="900" dirty="0">
+                <a:solidFill>
+                  <a:srgbClr val="78716C"/>
+                </a:solidFill>
+                <a:latin typeface="Arial" pitchFamily="34" charset="0"/>
+                <a:ea typeface="Arial" pitchFamily="34" charset="-122"/>
+                <a:cs typeface="Arial" pitchFamily="34" charset="-120"/>
+              </a:rPr>
+              <a:t>Log errors, assign remediation deadline</a:t>
+            </a:r>
+            <a:endParaRPr lang="en-US" sz="900" dirty="0"/>
+          </a:p>
+        </p:txBody>
+      </p:sp>
+    </p:spTree>
+  </p:cSld>
+  <p:clrMapOvr>
+    <a:masterClrMapping/>
+  </p:clrMapOvr>
+</p:sld>
+</file>
+
+<file path=ppt/slides/slide8.xml><?xml version="1.0" encoding="utf-8"?>
+<p:sld xmlns:a="http://schemas.openxmlformats.org/drawingml/2006/main" xmlns:r="http://schemas.openxmlformats.org/officeDocument/2006/relationships" xmlns:p="http://schemas.openxmlformats.org/presentationml/2006/main">
+  <p:cSld name="Slide 8">
+    <p:bg>
+      <p:bgPr>
+        <a:solidFill>
+          <a:srgbClr val="FFFFFF"/>
+        </a:solidFill>
+      </p:bgPr>
+    </p:bg>
+    <p:spTree>
+      <p:nvGrpSpPr>
+        <p:cNvPr id="1" name=""/>
+        <p:cNvGrpSpPr/>
+        <p:nvPr/>
+      </p:nvGrpSpPr>
+      <p:grpSpPr>
+        <a:xfrm>
+          <a:off x="0" y="0"/>
+          <a:ext cx="0" cy="0"/>
+          <a:chOff x="0" y="0"/>
+          <a:chExt cx="0" cy="0"/>
+        </a:xfrm>
+      </p:grpSpPr>
+      <p:sp>
+        <p:nvSpPr>
+          <p:cNvPr id="2" name="Shape 0"/>
+          <p:cNvSpPr/>
+          <p:nvPr/>
+        </p:nvSpPr>
+        <p:spPr>
+          <a:xfrm>
+            <a:off x="411480" y="402336"/>
+            <a:ext cx="82296" cy="329184"/>
+          </a:xfrm>
+          <a:prstGeom prst="rect">
+            <a:avLst/>
+          </a:prstGeom>
+          <a:solidFill>
+            <a:srgbClr val="B45309"/>
+          </a:solidFill>
+          <a:ln/>
+        </p:spPr>
+      </p:sp>
+      <p:sp>
+        <p:nvSpPr>
+          <p:cNvPr id="3" name="Text 1"/>
+          <p:cNvSpPr/>
+          <p:nvPr/>
+        </p:nvSpPr>
+        <p:spPr>
+          <a:xfrm>
+            <a:off x="566928" y="292608"/>
+            <a:ext cx="8138160" cy="548640"/>
+          </a:xfrm>
+          <a:prstGeom prst="rect">
+            <a:avLst/>
+          </a:prstGeom>
+          <a:noFill/>
+          <a:ln/>
+        </p:spPr>
+        <p:txBody>
+          <a:bodyPr wrap="square" rtlCol="0" anchor="ctr"/>
+          <a:lstStyle/>
+          <a:p>
+            <a:pPr indent="0" marL="0">
+              <a:buNone/>
+            </a:pPr>
+            <a:r>
+              <a:rPr lang="en-US" sz="2100" b="1" dirty="0">
+                <a:solidFill>
+                  <a:srgbClr val="1C1917"/>
+                </a:solidFill>
+                <a:latin typeface="Arial" pitchFamily="34" charset="0"/>
+                <a:ea typeface="Arial" pitchFamily="34" charset="-122"/>
+                <a:cs typeface="Arial" pitchFamily="34" charset="-120"/>
+              </a:rPr>
+              <a:t>Standard Audit Procedure: Inputs Required</a:t>
+            </a:r>
+            <a:endParaRPr lang="en-US" sz="2100" dirty="0"/>
+          </a:p>
+        </p:txBody>
+      </p:sp>
+      <p:sp>
+        <p:nvSpPr>
+          <p:cNvPr id="4" name="Shape 2"/>
+          <p:cNvSpPr/>
+          <p:nvPr/>
+        </p:nvSpPr>
+        <p:spPr>
+          <a:xfrm>
+            <a:off x="411480" y="960120"/>
+            <a:ext cx="8321040" cy="0"/>
+          </a:xfrm>
+          <a:prstGeom prst="line">
+            <a:avLst/>
+          </a:prstGeom>
+          <a:noFill/>
+          <a:ln w="12700">
+            <a:solidFill>
+              <a:srgbClr val="E7E5E4"/>
+            </a:solidFill>
+            <a:prstDash val="solid"/>
+          </a:ln>
+        </p:spPr>
+      </p:sp>
+      <p:sp>
+        <p:nvSpPr>
+          <p:cNvPr id="5" name="Text 3"/>
+          <p:cNvSpPr/>
+          <p:nvPr/>
+        </p:nvSpPr>
+        <p:spPr>
+          <a:xfrm>
+            <a:off x="411480" y="4864608"/>
+            <a:ext cx="8321040" cy="237744"/>
+          </a:xfrm>
+          <a:prstGeom prst="rect">
+            <a:avLst/>
+          </a:prstGeom>
+          <a:noFill/>
+          <a:ln/>
+        </p:spPr>
+        <p:txBody>
+          <a:bodyPr wrap="square" rtlCol="0" anchor="ctr"/>
+          <a:lstStyle/>
+          <a:p>
+            <a:pPr indent="0" marL="0">
+              <a:buNone/>
+            </a:pPr>
+            <a:r>
+              <a:rPr lang="en-US" sz="750" dirty="0">
+                <a:solidFill>
+                  <a:srgbClr val="AAAAAA"/>
+                </a:solidFill>
+                <a:latin typeface="Arial" pitchFamily="34" charset="0"/>
+                <a:ea typeface="Arial" pitchFamily="34" charset="-122"/>
+                <a:cs typeface="Arial" pitchFamily="34" charset="-120"/>
+              </a:rPr>
+              <a:t>Lesson Forge Pro (owner) — This content is educational material only and does not constitute financial, investment, or trading advice.</a:t>
+            </a:r>
+            <a:endParaRPr lang="en-US" sz="750" dirty="0"/>
+          </a:p>
+        </p:txBody>
+      </p:sp>
+      <p:sp>
+        <p:nvSpPr>
+          <p:cNvPr id="6" name="Text 4"/>
+          <p:cNvSpPr/>
+          <p:nvPr/>
+        </p:nvSpPr>
+        <p:spPr>
+          <a:xfrm>
+            <a:off x="731520" y="1188720"/>
+            <a:ext cx="7680960" cy="2743200"/>
+          </a:xfrm>
+          <a:prstGeom prst="rect">
+            <a:avLst/>
+          </a:prstGeom>
+          <a:noFill/>
+          <a:ln/>
+        </p:spPr>
+        <p:txBody>
+          <a:bodyPr wrap="square" rtlCol="0" anchor="t"/>
+          <a:lstStyle/>
+          <a:p>
+            <a:pPr marL="152400" indent="-152400">
+              <a:spcAft>
+                <a:spcPts val="800"/>
+              </a:spcAft>
+              <a:buSzPct val="100000"/>
+              <a:buChar char="•"/>
+            </a:pPr>
+            <a:r>
+              <a:rPr lang="en-US" sz="1500" dirty="0">
+                <a:solidFill>
+                  <a:srgbClr val="1C1917"/>
+                </a:solidFill>
+                <a:latin typeface="Arial" pitchFamily="34" charset="0"/>
+                <a:ea typeface="Arial" pitchFamily="34" charset="-122"/>
+                <a:cs typeface="Arial" pitchFamily="34" charset="-120"/>
+              </a:rPr>
+              <a:t>Obtain the model file, all sheets, named ranges, and linked external files.</a:t>
+            </a:r>
+            <a:endParaRPr lang="en-US" sz="1500" dirty="0"/>
+          </a:p>
+          <a:p>
+            <a:pPr marL="152400" indent="-152400">
+              <a:spcAft>
+                <a:spcPts val="800"/>
+              </a:spcAft>
+              <a:buSzPct val="100000"/>
+              <a:buChar char="•"/>
+            </a:pPr>
+            <a:r>
+              <a:rPr lang="en-US" sz="1500" dirty="0">
+                <a:solidFill>
+                  <a:srgbClr val="1C1917"/>
+                </a:solidFill>
+                <a:latin typeface="Arial" pitchFamily="34" charset="0"/>
+                <a:ea typeface="Arial" pitchFamily="34" charset="-122"/>
+                <a:cs typeface="Arial" pitchFamily="34" charset="-120"/>
+              </a:rPr>
+              <a:t>Collect model documentation: specification, assumption log, version history.</a:t>
+            </a:r>
+            <a:endParaRPr lang="en-US" sz="1500" dirty="0"/>
+          </a:p>
+          <a:p>
+            <a:pPr marL="152400" indent="-152400">
+              <a:spcAft>
+                <a:spcPts val="800"/>
+              </a:spcAft>
+              <a:buSzPct val="100000"/>
+              <a:buChar char="•"/>
+            </a:pPr>
+            <a:r>
+              <a:rPr lang="en-US" sz="1500" dirty="0">
+                <a:solidFill>
+                  <a:srgbClr val="1C1917"/>
+                </a:solidFill>
+                <a:latin typeface="Arial" pitchFamily="34" charset="0"/>
+                <a:ea typeface="Arial" pitchFamily="34" charset="-122"/>
+                <a:cs typeface="Arial" pitchFamily="34" charset="-120"/>
+              </a:rPr>
+              <a:t>Gather source data: market feeds, accounting statements, parameter tables.</a:t>
+            </a:r>
+            <a:endParaRPr lang="en-US" sz="1500" dirty="0"/>
+          </a:p>
+          <a:p>
+            <a:pPr marL="152400" indent="-152400">
+              <a:spcAft>
+                <a:spcPts val="800"/>
+              </a:spcAft>
+              <a:buSzPct val="100000"/>
+              <a:buChar char="•"/>
+            </a:pPr>
+            <a:r>
+              <a:rPr lang="en-US" sz="1500" dirty="0">
+                <a:solidFill>
+                  <a:srgbClr val="1C1917"/>
+                </a:solidFill>
+                <a:latin typeface="Arial" pitchFamily="34" charset="0"/>
+                <a:ea typeface="Arial" pitchFamily="34" charset="-122"/>
+                <a:cs typeface="Arial" pitchFamily="34" charset="-120"/>
+              </a:rPr>
+              <a:t>Retrieve prior audit reports or validation notes for continuity.</a:t>
+            </a:r>
+            <a:endParaRPr lang="en-US" sz="1500" dirty="0"/>
+          </a:p>
+          <a:p>
+            <a:pPr marL="152400" indent="-152400">
+              <a:spcAft>
+                <a:spcPts val="800"/>
+              </a:spcAft>
+              <a:buSzPct val="100000"/>
+              <a:buChar char="•"/>
+            </a:pPr>
+            <a:r>
+              <a:rPr lang="en-US" sz="1500" dirty="0">
+                <a:solidFill>
+                  <a:srgbClr val="1C1917"/>
+                </a:solidFill>
+                <a:latin typeface="Arial" pitchFamily="34" charset="0"/>
+                <a:ea typeface="Arial" pitchFamily="34" charset="-122"/>
+                <a:cs typeface="Arial" pitchFamily="34" charset="-120"/>
+              </a:rPr>
+              <a:t>Prepare an independent benchmark calculation before testing begins.</a:t>
+            </a:r>
+            <a:endParaRPr lang="en-US" sz="1500" dirty="0"/>
+          </a:p>
+        </p:txBody>
+      </p:sp>
+      <p:sp>
+        <p:nvSpPr>
+          <p:cNvPr id="7" name="Shape 5"/>
+          <p:cNvSpPr/>
+          <p:nvPr/>
+        </p:nvSpPr>
+        <p:spPr>
+          <a:xfrm>
+            <a:off x="731520" y="4041648"/>
+            <a:ext cx="7680960" cy="566928"/>
+          </a:xfrm>
+          <a:prstGeom prst="roundRect">
+            <a:avLst>
+              <a:gd name="adj" fmla="val 12903"/>
+            </a:avLst>
+          </a:prstGeom>
+          <a:solidFill>
+            <a:srgbClr val="B45309">
+              <a:alpha val="12000"/>
+            </a:srgbClr>
+          </a:solidFill>
+          <a:ln w="12700">
+            <a:solidFill>
+              <a:srgbClr val="B45309"/>
+            </a:solidFill>
+            <a:prstDash val="solid"/>
+          </a:ln>
+        </p:spPr>
+      </p:sp>
+      <p:sp>
+        <p:nvSpPr>
+          <p:cNvPr id="8" name="Text 6"/>
+          <p:cNvSpPr/>
+          <p:nvPr/>
+        </p:nvSpPr>
+        <p:spPr>
+          <a:xfrm>
+            <a:off x="868680" y="4087368"/>
+            <a:ext cx="7406640" cy="475488"/>
+          </a:xfrm>
+          <a:prstGeom prst="rect">
+            <a:avLst/>
+          </a:prstGeom>
+          <a:noFill/>
+          <a:ln/>
+        </p:spPr>
+        <p:txBody>
+          <a:bodyPr wrap="square" rtlCol="0" anchor="ctr"/>
+          <a:lstStyle/>
+          <a:p>
+            <a:pPr indent="0" marL="0">
+              <a:buNone/>
+            </a:pPr>
+            <a:r>
+              <a:rPr lang="en-US" sz="1100" b="1" dirty="0">
+                <a:solidFill>
+                  <a:srgbClr val="B45309"/>
+                </a:solidFill>
+                <a:latin typeface="Arial" pitchFamily="34" charset="0"/>
+                <a:ea typeface="Arial" pitchFamily="34" charset="-122"/>
+                <a:cs typeface="Arial" pitchFamily="34" charset="-120"/>
+              </a:rPr>
+              <a:t>Takeaway  </a:t>
+            </a:r>
+            <a:pPr indent="0" marL="0">
+              <a:buNone/>
+            </a:pPr>
+            <a:r>
+              <a:rPr lang="en-US" sz="1150" dirty="0">
+                <a:solidFill>
+                  <a:srgbClr val="1C1917"/>
+                </a:solidFill>
+                <a:latin typeface="Arial" pitchFamily="34" charset="0"/>
+                <a:ea typeface="Arial" pitchFamily="34" charset="-122"/>
+                <a:cs typeface="Arial" pitchFamily="34" charset="-120"/>
+              </a:rPr>
+              <a:t>A complete intake of model files, documentation, data, and a benchmark is the non-negotiable starting point for any audit.</a:t>
+            </a:r>
+            <a:endParaRPr lang="en-US" sz="1100" dirty="0"/>
+          </a:p>
+        </p:txBody>
+      </p:sp>
+    </p:spTree>
+  </p:cSld>
+  <p:clrMapOvr>
+    <a:masterClrMapping/>
+  </p:clrMapOvr>
+</p:sld>
+</file>
+
+<file path=ppt/slides/slide9.xml><?xml version="1.0" encoding="utf-8"?>
+<p:sld xmlns:a="http://schemas.openxmlformats.org/drawingml/2006/main" xmlns:r="http://schemas.openxmlformats.org/officeDocument/2006/relationships" xmlns:p="http://schemas.openxmlformats.org/presentationml/2006/main">
+  <p:cSld name="Slide 9">
+    <p:bg>
+      <p:bgPr>
+        <a:solidFill>
+          <a:srgbClr val="FFFFFF"/>
+        </a:solidFill>
+      </p:bgPr>
+    </p:bg>
+    <p:spTree>
+      <p:nvGrpSpPr>
+        <p:cNvPr id="1" name=""/>
+        <p:cNvGrpSpPr/>
+        <p:nvPr/>
+      </p:nvGrpSpPr>
+      <p:grpSpPr>
+        <a:xfrm>
+          <a:off x="0" y="0"/>
+          <a:ext cx="0" cy="0"/>
+          <a:chOff x="0" y="0"/>
+          <a:chExt cx="0" cy="0"/>
+        </a:xfrm>
+      </p:grpSpPr>
+      <p:sp>
+        <p:nvSpPr>
+          <p:cNvPr id="2" name="Shape 0"/>
+          <p:cNvSpPr/>
+          <p:nvPr/>
+        </p:nvSpPr>
+        <p:spPr>
+          <a:xfrm>
+            <a:off x="411480" y="402336"/>
+            <a:ext cx="82296" cy="329184"/>
+          </a:xfrm>
+          <a:prstGeom prst="rect">
+            <a:avLst/>
+          </a:prstGeom>
+          <a:solidFill>
+            <a:srgbClr val="B45309"/>
+          </a:solidFill>
+          <a:ln/>
+        </p:spPr>
+      </p:sp>
+      <p:sp>
+        <p:nvSpPr>
+          <p:cNvPr id="3" name="Text 1"/>
+          <p:cNvSpPr/>
+          <p:nvPr/>
+        </p:nvSpPr>
+        <p:spPr>
+          <a:xfrm>
+            <a:off x="566928" y="292608"/>
+            <a:ext cx="8138160" cy="548640"/>
+          </a:xfrm>
+          <a:prstGeom prst="rect">
+            <a:avLst/>
+          </a:prstGeom>
+          <a:noFill/>
+          <a:ln/>
+        </p:spPr>
+        <p:txBody>
+          <a:bodyPr wrap="square" rtlCol="0" anchor="ctr"/>
+          <a:lstStyle/>
+          <a:p>
+            <a:pPr indent="0" marL="0">
+              <a:buNone/>
+            </a:pPr>
+            <a:r>
+              <a:rPr lang="en-US" sz="2100" b="1" dirty="0">
+                <a:solidFill>
+                  <a:srgbClr val="1C1917"/>
+                </a:solidFill>
+                <a:latin typeface="Arial" pitchFamily="34" charset="0"/>
+                <a:ea typeface="Arial" pitchFamily="34" charset="-122"/>
+                <a:cs typeface="Arial" pitchFamily="34" charset="-120"/>
+              </a:rPr>
+              <a:t>Step-by-Step Audit Procedure</a:t>
+            </a:r>
+            <a:endParaRPr lang="en-US" sz="2100" dirty="0"/>
+          </a:p>
+        </p:txBody>
+      </p:sp>
+      <p:sp>
+        <p:nvSpPr>
+          <p:cNvPr id="4" name="Shape 2"/>
+          <p:cNvSpPr/>
+          <p:nvPr/>
+        </p:nvSpPr>
+        <p:spPr>
+          <a:xfrm>
+            <a:off x="411480" y="960120"/>
+            <a:ext cx="8321040" cy="0"/>
+          </a:xfrm>
+          <a:prstGeom prst="line">
+            <a:avLst/>
+          </a:prstGeom>
+          <a:noFill/>
+          <a:ln w="12700">
+            <a:solidFill>
+              <a:srgbClr val="E7E5E4"/>
+            </a:solidFill>
+            <a:prstDash val="solid"/>
+          </a:ln>
+        </p:spPr>
+      </p:sp>
+      <p:sp>
+        <p:nvSpPr>
+          <p:cNvPr id="5" name="Text 3"/>
+          <p:cNvSpPr/>
+          <p:nvPr/>
+        </p:nvSpPr>
+        <p:spPr>
+          <a:xfrm>
+            <a:off x="411480" y="4864608"/>
+            <a:ext cx="8321040" cy="237744"/>
+          </a:xfrm>
+          <a:prstGeom prst="rect">
+            <a:avLst/>
+          </a:prstGeom>
+          <a:noFill/>
+          <a:ln/>
+        </p:spPr>
+        <p:txBody>
+          <a:bodyPr wrap="square" rtlCol="0" anchor="ctr"/>
+          <a:lstStyle/>
+          <a:p>
+            <a:pPr indent="0" marL="0">
+              <a:buNone/>
+            </a:pPr>
+            <a:r>
+              <a:rPr lang="en-US" sz="750" dirty="0">
+                <a:solidFill>
+                  <a:srgbClr val="AAAAAA"/>
+                </a:solidFill>
+                <a:latin typeface="Arial" pitchFamily="34" charset="0"/>
+                <a:ea typeface="Arial" pitchFamily="34" charset="-122"/>
+                <a:cs typeface="Arial" pitchFamily="34" charset="-120"/>
+              </a:rPr>
+              <a:t>Lesson Forge Pro (owner) — This content is educational material only and does not constitute financial, investment, or trading advice.</a:t>
+            </a:r>
+            <a:endParaRPr lang="en-US" sz="750" dirty="0"/>
+          </a:p>
+        </p:txBody>
+      </p:sp>
+      <p:sp>
+        <p:nvSpPr>
+          <p:cNvPr id="6" name="Text 4"/>
+          <p:cNvSpPr/>
+          <p:nvPr/>
+        </p:nvSpPr>
+        <p:spPr>
+          <a:xfrm>
+            <a:off x="731520" y="1188720"/>
+            <a:ext cx="7680960" cy="2743200"/>
+          </a:xfrm>
+          <a:prstGeom prst="rect">
+            <a:avLst/>
+          </a:prstGeom>
+          <a:noFill/>
+          <a:ln/>
+        </p:spPr>
+        <p:txBody>
+          <a:bodyPr wrap="square" rtlCol="0" anchor="t"/>
+          <a:lstStyle/>
+          <a:p>
+            <a:pPr marL="152400" indent="-152400">
+              <a:spcAft>
+                <a:spcPts val="800"/>
+              </a:spcAft>
+              <a:buSzPct val="100000"/>
+              <a:buChar char="•"/>
+            </a:pPr>
+            <a:r>
+              <a:rPr lang="en-US" sz="1500" dirty="0">
+                <a:solidFill>
+                  <a:srgbClr val="1C1917"/>
+                </a:solidFill>
+                <a:latin typeface="Arial" pitchFamily="34" charset="0"/>
+                <a:ea typeface="Arial" pitchFamily="34" charset="-122"/>
+                <a:cs typeface="Arial" pitchFamily="34" charset="-120"/>
+              </a:rPr>
+              <a:t>Scope definition: agree with model owner on tabs, scenarios, and outputs in scope.</a:t>
+            </a:r>
+            <a:endParaRPr lang="en-US" sz="1500" dirty="0"/>
+          </a:p>
+          <a:p>
+            <a:pPr marL="152400" indent="-152400">
+              <a:spcAft>
+                <a:spcPts val="800"/>
+              </a:spcAft>
+              <a:buSzPct val="100000"/>
+              <a:buChar char="•"/>
+            </a:pPr>
+            <a:r>
+              <a:rPr lang="en-US" sz="1500" dirty="0">
+                <a:solidFill>
+                  <a:srgbClr val="1C1917"/>
+                </a:solidFill>
+                <a:latin typeface="Arial" pitchFamily="34" charset="0"/>
+                <a:ea typeface="Arial" pitchFamily="34" charset="-122"/>
+                <a:cs typeface="Arial" pitchFamily="34" charset="-120"/>
+              </a:rPr>
+              <a:t>Structural review: map data flows; flag circular references, merged cells, hidden rows.</a:t>
+            </a:r>
+            <a:endParaRPr lang="en-US" sz="1500" dirty="0"/>
+          </a:p>
+          <a:p>
+            <a:pPr marL="152400" indent="-152400">
+              <a:spcAft>
+                <a:spcPts val="800"/>
+              </a:spcAft>
+              <a:buSzPct val="100000"/>
+              <a:buChar char="•"/>
+            </a:pPr>
+            <a:r>
+              <a:rPr lang="en-US" sz="1500" dirty="0">
+                <a:solidFill>
+                  <a:srgbClr val="1C1917"/>
+                </a:solidFill>
+                <a:latin typeface="Arial" pitchFamily="34" charset="0"/>
+                <a:ea typeface="Arial" pitchFamily="34" charset="-122"/>
+                <a:cs typeface="Arial" pitchFamily="34" charset="-120"/>
+              </a:rPr>
+              <a:t>Formula audit: trace precedents and dependents; eliminate hard-coded values.</a:t>
+            </a:r>
+            <a:endParaRPr lang="en-US" sz="1500" dirty="0"/>
+          </a:p>
+          <a:p>
+            <a:pPr marL="152400" indent="-152400">
+              <a:spcAft>
+                <a:spcPts val="800"/>
+              </a:spcAft>
+              <a:buSzPct val="100000"/>
+              <a:buChar char="•"/>
+            </a:pPr>
+            <a:r>
+              <a:rPr lang="en-US" sz="1500" dirty="0">
+                <a:solidFill>
+                  <a:srgbClr val="1C1917"/>
+                </a:solidFill>
+                <a:latin typeface="Arial" pitchFamily="34" charset="0"/>
+                <a:ea typeface="Arial" pitchFamily="34" charset="-122"/>
+                <a:cs typeface="Arial" pitchFamily="34" charset="-120"/>
+              </a:rPr>
+              <a:t>Assumption verification: cross-reference every parameter to its documented source.</a:t>
+            </a:r>
+            <a:endParaRPr lang="en-US" sz="1500" dirty="0"/>
+          </a:p>
+          <a:p>
+            <a:pPr marL="152400" indent="-152400">
+              <a:spcAft>
+                <a:spcPts val="800"/>
+              </a:spcAft>
+              <a:buSzPct val="100000"/>
+              <a:buChar char="•"/>
+            </a:pPr>
+            <a:r>
+              <a:rPr lang="en-US" sz="1500" dirty="0">
+                <a:solidFill>
+                  <a:srgbClr val="1C1917"/>
+                </a:solidFill>
+                <a:latin typeface="Arial" pitchFamily="34" charset="0"/>
+                <a:ea typeface="Arial" pitchFamily="34" charset="-122"/>
+                <a:cs typeface="Arial" pitchFamily="34" charset="-120"/>
+              </a:rPr>
+              <a:t>Stress testing: apply extreme inputs and confirm economically sensible model responses.</a:t>
+            </a:r>
+            <a:endParaRPr lang="en-US" sz="1500" dirty="0"/>
+          </a:p>
+        </p:txBody>
+      </p:sp>
+      <p:sp>
+        <p:nvSpPr>
+          <p:cNvPr id="7" name="Shape 5"/>
+          <p:cNvSpPr/>
+          <p:nvPr/>
+        </p:nvSpPr>
+        <p:spPr>
+          <a:xfrm>
+            <a:off x="731520" y="4041648"/>
+            <a:ext cx="7680960" cy="566928"/>
+          </a:xfrm>
+          <a:prstGeom prst="roundRect">
+            <a:avLst>
+              <a:gd name="adj" fmla="val 12903"/>
+            </a:avLst>
+          </a:prstGeom>
+          <a:solidFill>
+            <a:srgbClr val="B45309">
+              <a:alpha val="12000"/>
+            </a:srgbClr>
+          </a:solidFill>
+          <a:ln w="12700">
+            <a:solidFill>
+              <a:srgbClr val="B45309"/>
+            </a:solidFill>
+            <a:prstDash val="solid"/>
+          </a:ln>
+        </p:spPr>
+      </p:sp>
+      <p:sp>
+        <p:nvSpPr>
+          <p:cNvPr id="8" name="Text 6"/>
+          <p:cNvSpPr/>
+          <p:nvPr/>
+        </p:nvSpPr>
+        <p:spPr>
+          <a:xfrm>
+            <a:off x="868680" y="4087368"/>
+            <a:ext cx="7406640" cy="475488"/>
+          </a:xfrm>
+          <a:prstGeom prst="rect">
+            <a:avLst/>
+          </a:prstGeom>
+          <a:noFill/>
+          <a:ln/>
+        </p:spPr>
+        <p:txBody>
+          <a:bodyPr wrap="square" rtlCol="0" anchor="ctr"/>
+          <a:lstStyle/>
+          <a:p>
+            <a:pPr indent="0" marL="0">
+              <a:buNone/>
+            </a:pPr>
+            <a:r>
+              <a:rPr lang="en-US" sz="1100" b="1" dirty="0">
+                <a:solidFill>
+                  <a:srgbClr val="B45309"/>
+                </a:solidFill>
+                <a:latin typeface="Arial" pitchFamily="34" charset="0"/>
+                <a:ea typeface="Arial" pitchFamily="34" charset="-122"/>
+                <a:cs typeface="Arial" pitchFamily="34" charset="-120"/>
+              </a:rPr>
+              <a:t>Takeaway  </a:t>
+            </a:r>
+            <a:pPr indent="0" marL="0">
+              <a:buNone/>
+            </a:pPr>
+            <a:r>
+              <a:rPr lang="en-US" sz="1150" dirty="0">
+                <a:solidFill>
+                  <a:srgbClr val="1C1917"/>
+                </a:solidFill>
+                <a:latin typeface="Arial" pitchFamily="34" charset="0"/>
+                <a:ea typeface="Arial" pitchFamily="34" charset="-122"/>
+                <a:cs typeface="Arial" pitchFamily="34" charset="-120"/>
+              </a:rPr>
+              <a:t>A repeatable six-step sequence—scope, structure, formulas, assumptions, recalculation, stress—ensures no audit layer is skipped.</a:t>
+            </a:r>
+            <a:endParaRPr lang="en-US" sz="1100" dirty="0"/>
           </a:p>
         </p:txBody>
       </p:sp>
